--- a/diagrams/compliance/chain-walk-reconstruction.pptx
+++ b/diagrams/compliance/chain-walk-reconstruction.pptx
@@ -14,6 +14,7 @@
     <p:sldId id="262" r:id="rId13"/>
     <p:sldId id="263" r:id="rId14"/>
     <p:sldId id="264" r:id="rId15"/>
+    <p:sldId id="265" r:id="rId16"/>
   </p:sldIdLst>
   <p:sldSz cx="12191695" cy="6858000" type="screen4x3"/>
   <p:notesSz cx="6858000" cy="9144000"/>
@@ -3229,6 +3230,240 @@
 </p:sld>
 </file>
 
+<file path=ppt/slides/slide10.xml><?xml version="1.0" encoding="utf-8"?>
+<p:sld xmlns:a="http://schemas.openxmlformats.org/drawingml/2006/main" xmlns:p="http://schemas.openxmlformats.org/presentationml/2006/main" xmlns:r="http://schemas.openxmlformats.org/officeDocument/2006/relationships">
+  <p:cSld>
+    <p:bg>
+      <p:bgPr>
+        <a:solidFill>
+          <a:srgbClr val="FAF7F0"/>
+        </a:solidFill>
+        <a:effectLst/>
+      </p:bgPr>
+    </p:bg>
+    <p:spTree>
+      <p:nvGrpSpPr>
+        <p:cNvPr id="1" name=""/>
+        <p:cNvGrpSpPr/>
+        <p:nvPr/>
+      </p:nvGrpSpPr>
+      <p:grpSpPr/>
+      <p:sp>
+        <p:nvSpPr>
+          <p:cNvPr id="2" name="TextBox 1"/>
+          <p:cNvSpPr txBox="1"/>
+          <p:nvPr/>
+        </p:nvSpPr>
+        <p:spPr>
+          <a:xfrm>
+            <a:off x="548640" y="274320"/>
+            <a:ext cx="11064240" cy="731520"/>
+          </a:xfrm>
+          <a:prstGeom prst="rect">
+            <a:avLst/>
+          </a:prstGeom>
+          <a:noFill/>
+        </p:spPr>
+        <p:txBody>
+          <a:bodyPr wrap="square">
+            <a:spAutoFit/>
+          </a:bodyPr>
+          <a:lstStyle/>
+          <a:p>
+            <a:pPr algn="l"/>
+            <a:r>
+              <a:rPr sz="2800" b="1" i="0">
+                <a:solidFill>
+                  <a:srgbClr val="1B2A41"/>
+                </a:solidFill>
+                <a:latin typeface="Avenir Next"/>
+              </a:rPr>
+              <a:t>Reference</a:t>
+            </a:r>
+          </a:p>
+        </p:txBody>
+      </p:sp>
+      <p:sp>
+        <p:nvSpPr>
+          <p:cNvPr id="3" name="TextBox 2"/>
+          <p:cNvSpPr txBox="1"/>
+          <p:nvPr/>
+        </p:nvSpPr>
+        <p:spPr>
+          <a:xfrm>
+            <a:off x="822960" y="1554480"/>
+            <a:ext cx="10789920" cy="4389120"/>
+          </a:xfrm>
+          <a:prstGeom prst="rect">
+            <a:avLst/>
+          </a:prstGeom>
+          <a:noFill/>
+        </p:spPr>
+        <p:txBody>
+          <a:bodyPr wrap="square">
+            <a:spAutoFit/>
+          </a:bodyPr>
+          <a:lstStyle/>
+          <a:p>
+            <a:pPr algn="l"/>
+            <a:r>
+              <a:rPr sz="1500" b="0" i="0">
+                <a:solidFill>
+                  <a:srgbClr val="1B2A41"/>
+                </a:solidFill>
+                <a:latin typeface="Avenir Next"/>
+              </a:rPr>
+              <a:t>In practice:  ffiec-verify  runs steps 1-4 and reports the verdict</a:t>
+            </a:r>
+          </a:p>
+          <a:p>
+            <a:pPr algn="l"/>
+            <a:r>
+              <a:rPr sz="1500" b="0" i="0">
+                <a:solidFill>
+                  <a:srgbClr val="1B2A41"/>
+                </a:solidFill>
+                <a:latin typeface="Avenir Next"/>
+              </a:rPr>
+              <a:t>    (profiles: ffiec, tx-dob — framing changes, verdict never does)</a:t>
+            </a:r>
+          </a:p>
+          <a:p>
+            <a:pPr algn="l"/>
+          </a:p>
+          <a:p>
+            <a:pPr algn="l"/>
+            <a:r>
+              <a:rPr sz="1500" b="0" i="0">
+                <a:solidFill>
+                  <a:srgbClr val="1B2A41"/>
+                </a:solidFill>
+                <a:latin typeface="Avenir Next"/>
+              </a:rPr>
+              <a:t>Spec (public, ffiec-public / chain-of-custody 0.3.0):</a:t>
+            </a:r>
+          </a:p>
+          <a:p>
+            <a:pPr algn="l"/>
+            <a:r>
+              <a:rPr sz="1500" b="0" i="0">
+                <a:solidFill>
+                  <a:srgbClr val="1B2A41"/>
+                </a:solidFill>
+                <a:latin typeface="Avenir Next"/>
+              </a:rPr>
+              <a:t>    §4    the four primitives — per-event MAC, Merkle seal, HSM signature, publication</a:t>
+            </a:r>
+          </a:p>
+          <a:p>
+            <a:pPr algn="l"/>
+            <a:r>
+              <a:rPr sz="1500" b="0" i="0">
+                <a:solidFill>
+                  <a:srgbClr val="1B2A41"/>
+                </a:solidFill>
+                <a:latin typeface="Avenir Next"/>
+              </a:rPr>
+              <a:t>    §7    the verifier procedure this deck walks</a:t>
+            </a:r>
+          </a:p>
+          <a:p>
+            <a:pPr algn="l"/>
+            <a:r>
+              <a:rPr sz="1500" b="0" i="0">
+                <a:solidFill>
+                  <a:srgbClr val="1B2A41"/>
+                </a:solidFill>
+                <a:latin typeface="Avenir Next"/>
+              </a:rPr>
+              <a:t>    §10.76 / §10.1 / §10.5   key-registry manifest, fingerprint reconciliation, role separation</a:t>
+            </a:r>
+          </a:p>
+          <a:p>
+            <a:pPr algn="l"/>
+            <a:r>
+              <a:rPr sz="1500" b="0" i="0">
+                <a:solidFill>
+                  <a:srgbClr val="1B2A41"/>
+                </a:solidFill>
+                <a:latin typeface="Avenir Next"/>
+              </a:rPr>
+              <a:t>    §10.84   ordering proofs across already-sealed days</a:t>
+            </a:r>
+          </a:p>
+          <a:p>
+            <a:pPr algn="l"/>
+            <a:r>
+              <a:rPr sz="1500" b="0" i="0">
+                <a:solidFill>
+                  <a:srgbClr val="1B2A41"/>
+                </a:solidFill>
+                <a:latin typeface="Avenir Next"/>
+              </a:rPr>
+              <a:t>    §10.85   artifact retrieval index — digest→bytes resolution, entry-keyed uniqueness,</a:t>
+            </a:r>
+          </a:p>
+          <a:p>
+            <a:pPr algn="l"/>
+            <a:r>
+              <a:rPr sz="1500" b="0" i="0">
+                <a:solidFill>
+                  <a:srgbClr val="1B2A41"/>
+                </a:solidFill>
+                <a:latin typeface="Avenir Next"/>
+              </a:rPr>
+              <a:t>             chain-bound disposal events, mandatory resolvability sweep</a:t>
+            </a:r>
+          </a:p>
+          <a:p>
+            <a:pPr algn="l"/>
+            <a:r>
+              <a:rPr sz="1500" b="0" i="0">
+                <a:solidFill>
+                  <a:srgbClr val="1B2A41"/>
+                </a:solidFill>
+                <a:latin typeface="Avenir Next"/>
+              </a:rPr>
+              <a:t>    §10.9    retention — keys and seals must outlive the longest-lived artifact they verify</a:t>
+            </a:r>
+          </a:p>
+          <a:p>
+            <a:pPr algn="l"/>
+          </a:p>
+          <a:p>
+            <a:pPr algn="l"/>
+            <a:r>
+              <a:rPr sz="1500" b="0" i="0">
+                <a:solidFill>
+                  <a:srgbClr val="1B2A41"/>
+                </a:solidFill>
+                <a:latin typeface="Avenir Next"/>
+              </a:rPr>
+              <a:t>Companion deck:  diagrams/compliance/merkle-seal-chain.pptx  (forward construction + tamper cascade)</a:t>
+            </a:r>
+          </a:p>
+          <a:p>
+            <a:pPr algn="l"/>
+            <a:r>
+              <a:rPr sz="1500" b="0" i="0">
+                <a:solidFill>
+                  <a:srgbClr val="1B2A41"/>
+                </a:solidFill>
+                <a:latin typeface="Avenir Next"/>
+              </a:rPr>
+              <a:t>Narrative:  prose/compliance/novel/24-success-bank.md</a:t>
+            </a:r>
+          </a:p>
+        </p:txBody>
+      </p:sp>
+    </p:spTree>
+  </p:cSld>
+  <p:clrMapOvr>
+    <a:masterClrMapping/>
+  </p:clrMapOvr>
+</p:sld>
+</file>
+
 <file path=ppt/slides/slide2.xml><?xml version="1.0" encoding="utf-8"?>
 <p:sld xmlns:a="http://schemas.openxmlformats.org/drawingml/2006/main" xmlns:p="http://schemas.openxmlformats.org/presentationml/2006/main" xmlns:r="http://schemas.openxmlformats.org/officeDocument/2006/relationships">
   <p:cSld>
@@ -4144,7 +4379,7 @@
                 </a:solidFill>
                 <a:latin typeface="Avenir Next"/>
               </a:rPr>
-              <a:t>Steps 1-2 — follow prev_entry_mac backward, verifying each hop</a:t>
+              <a:t>Step 0.5 — finding the bytes: the artifact retrieval index (§10.85)</a:t>
             </a:r>
           </a:p>
         </p:txBody>
@@ -4179,7 +4414,7 @@
                 </a:solidFill>
                 <a:latin typeface="Avenir Next"/>
               </a:rPr>
-              <a:t>Each entry names its parent's mac; recompute and compare at every step</a:t>
+              <a:t>The entry binds a digest, not a location. Five years on, the index is how you find the bytes without re-hashing the estate</a:t>
             </a:r>
           </a:p>
         </p:txBody>
@@ -4192,8 +4427,8 @@
         </p:nvSpPr>
         <p:spPr>
           <a:xfrm>
-            <a:off x="8229600" y="1417320"/>
-            <a:ext cx="3657600" cy="1335024"/>
+            <a:off x="502920" y="1645920"/>
+            <a:ext cx="5577840" cy="2286000"/>
           </a:xfrm>
           <a:prstGeom prst="roundRect">
             <a:avLst/>
@@ -4237,8 +4472,8 @@
         </p:nvSpPr>
         <p:spPr>
           <a:xfrm>
-            <a:off x="8229600" y="1417320"/>
-            <a:ext cx="3657600" cy="310896"/>
+            <a:off x="502920" y="1645920"/>
+            <a:ext cx="5577840" cy="310896"/>
           </a:xfrm>
           <a:prstGeom prst="roundRect">
             <a:avLst/>
@@ -4278,7 +4513,7 @@
                 </a:solidFill>
                 <a:latin typeface="Menlo"/>
               </a:rPr>
-              <a:t>E-2025-05-23-0412</a:t>
+              <a:t>RETRIEVAL INDEX ENTRY  (audit.artifact_index.*)</a:t>
             </a:r>
           </a:p>
         </p:txBody>
@@ -4291,8 +4526,8 @@
         </p:nvSpPr>
         <p:spPr>
           <a:xfrm>
-            <a:off x="8339327" y="1764792"/>
-            <a:ext cx="3474720" cy="237744"/>
+            <a:off x="612648" y="1993392"/>
+            <a:ext cx="5394959" cy="237744"/>
           </a:xfrm>
           <a:prstGeom prst="rect">
             <a:avLst/>
@@ -4307,13 +4542,13 @@
           <a:p>
             <a:pPr algn="l"/>
             <a:r>
-              <a:rPr sz="1000" b="0" i="0">
-                <a:solidFill>
-                  <a:srgbClr val="1B2A41"/>
+              <a:rPr sz="1050" b="0" i="0">
+                <a:solidFill>
+                  <a:srgbClr val="C99A2E"/>
                 </a:solidFill>
                 <a:latin typeface="Menlo"/>
               </a:rPr>
-              <a:t>artifact: sha256:7c19…e2a4</a:t>
+              <a:t>key       : (tenant_id, run_id, seq) + digest</a:t>
             </a:r>
           </a:p>
         </p:txBody>
@@ -4326,8 +4561,8 @@
         </p:nvSpPr>
         <p:spPr>
           <a:xfrm>
-            <a:off x="8339327" y="2002536"/>
-            <a:ext cx="3474720" cy="237744"/>
+            <a:off x="612648" y="2231136"/>
+            <a:ext cx="5394959" cy="237744"/>
           </a:xfrm>
           <a:prstGeom prst="rect">
             <a:avLst/>
@@ -4342,13 +4577,13 @@
           <a:p>
             <a:pPr algn="l"/>
             <a:r>
-              <a:rPr sz="1000" b="0" i="0">
-                <a:solidFill>
-                  <a:srgbClr val="C99A2E"/>
+              <a:rPr sz="1050" b="0" i="0">
+                <a:solidFill>
+                  <a:srgbClr val="1B2A41"/>
                 </a:solidFill>
                 <a:latin typeface="Menlo"/>
               </a:rPr>
-              <a:t>prev    : 5d81…e903 ─────┐</a:t>
+              <a:t>            TX-SB-001 / R-2025-0523 / 0412</a:t>
             </a:r>
           </a:p>
         </p:txBody>
@@ -4361,8 +4596,8 @@
         </p:nvSpPr>
         <p:spPr>
           <a:xfrm>
-            <a:off x="8339327" y="2240280"/>
-            <a:ext cx="3474720" cy="237744"/>
+            <a:off x="612648" y="2468880"/>
+            <a:ext cx="5394959" cy="237744"/>
           </a:xfrm>
           <a:prstGeom prst="rect">
             <a:avLst/>
@@ -4377,13 +4612,13 @@
           <a:p>
             <a:pPr algn="l"/>
             <a:r>
-              <a:rPr sz="1000" b="0" i="0">
-                <a:solidFill>
-                  <a:srgbClr val="1B2A41"/>
+              <a:rPr sz="1050" b="0" i="0">
+                <a:solidFill>
+                  <a:srgbClr val="0E7C7B"/>
                 </a:solidFill>
                 <a:latin typeface="Menlo"/>
               </a:rPr>
-              <a:t>key_id  : ikm-2025-Q2-07</a:t>
+              <a:t>digest    : sha256:7c19…e2a4</a:t>
             </a:r>
           </a:p>
         </p:txBody>
@@ -4396,8 +4631,8 @@
         </p:nvSpPr>
         <p:spPr>
           <a:xfrm>
-            <a:off x="8339327" y="2478024"/>
-            <a:ext cx="3474720" cy="237744"/>
+            <a:off x="612648" y="2706624"/>
+            <a:ext cx="5394959" cy="237744"/>
           </a:xfrm>
           <a:prstGeom prst="rect">
             <a:avLst/>
@@ -4412,27 +4647,289 @@
           <a:p>
             <a:pPr algn="l"/>
             <a:r>
-              <a:rPr sz="1000" b="0" i="0">
+              <a:rPr sz="1050" b="0" i="0">
                 <a:solidFill>
                   <a:srgbClr val="1B2A41"/>
                 </a:solidFill>
                 <a:latin typeface="Menlo"/>
               </a:rPr>
-              <a:t>mac     : b44a…91c7</a:t>
-            </a:r>
-          </a:p>
-        </p:txBody>
-      </p:sp>
-      <p:sp>
-        <p:nvSpPr>
-          <p:cNvPr id="10" name="Rounded Rectangle 9"/>
+              <a:t>doc_id    : LN-2025-088231   ◄ business attrs</a:t>
+            </a:r>
+          </a:p>
+        </p:txBody>
+      </p:sp>
+      <p:sp>
+        <p:nvSpPr>
+          <p:cNvPr id="10" name="TextBox 9"/>
+          <p:cNvSpPr txBox="1"/>
+          <p:nvPr/>
+        </p:nvSpPr>
+        <p:spPr>
+          <a:xfrm>
+            <a:off x="612648" y="2944368"/>
+            <a:ext cx="5394959" cy="237744"/>
+          </a:xfrm>
+          <a:prstGeom prst="rect">
+            <a:avLst/>
+          </a:prstGeom>
+          <a:noFill/>
+        </p:spPr>
+        <p:txBody>
+          <a:bodyPr wrap="square">
+            <a:spAutoFit/>
+          </a:bodyPr>
+          <a:lstStyle/>
+          <a:p>
+            <a:pPr algn="l"/>
+            <a:r>
+              <a:rPr sz="1050" b="0" i="0">
+                <a:solidFill>
+                  <a:srgbClr val="1B2A41"/>
+                </a:solidFill>
+                <a:latin typeface="Menlo"/>
+              </a:rPr>
+              <a:t>kind      : loan_file             disambiguate</a:t>
+            </a:r>
+          </a:p>
+        </p:txBody>
+      </p:sp>
+      <p:sp>
+        <p:nvSpPr>
+          <p:cNvPr id="11" name="TextBox 10"/>
+          <p:cNvSpPr txBox="1"/>
+          <p:nvPr/>
+        </p:nvSpPr>
+        <p:spPr>
+          <a:xfrm>
+            <a:off x="612648" y="3182111"/>
+            <a:ext cx="5394959" cy="237744"/>
+          </a:xfrm>
+          <a:prstGeom prst="rect">
+            <a:avLst/>
+          </a:prstGeom>
+          <a:noFill/>
+        </p:spPr>
+        <p:txBody>
+          <a:bodyPr wrap="square">
+            <a:spAutoFit/>
+          </a:bodyPr>
+          <a:lstStyle/>
+          <a:p>
+            <a:pPr algn="l"/>
+            <a:r>
+              <a:rPr sz="1050" b="0" i="0">
+                <a:solidFill>
+                  <a:srgbClr val="1B2A41"/>
+                </a:solidFill>
+                <a:latin typeface="Menlo"/>
+              </a:rPr>
+              <a:t>locators  : s3://evidence-worm/7c/19/…e2a4</a:t>
+            </a:r>
+          </a:p>
+        </p:txBody>
+      </p:sp>
+      <p:sp>
+        <p:nvSpPr>
+          <p:cNvPr id="12" name="TextBox 11"/>
+          <p:cNvSpPr txBox="1"/>
+          <p:nvPr/>
+        </p:nvSpPr>
+        <p:spPr>
+          <a:xfrm>
+            <a:off x="612648" y="3419855"/>
+            <a:ext cx="5394959" cy="237744"/>
+          </a:xfrm>
+          <a:prstGeom prst="rect">
+            <a:avLst/>
+          </a:prstGeom>
+          <a:noFill/>
+        </p:spPr>
+        <p:txBody>
+          <a:bodyPr wrap="square">
+            <a:spAutoFit/>
+          </a:bodyPr>
+          <a:lstStyle/>
+          <a:p>
+            <a:pPr algn="l"/>
+            <a:r>
+              <a:rPr sz="1050" b="0" i="0">
+                <a:solidFill>
+                  <a:srgbClr val="6B7480"/>
+                </a:solidFill>
+                <a:latin typeface="Menlo"/>
+              </a:rPr>
+              <a:t>            (locator = convenience; digest = truth)</a:t>
+            </a:r>
+          </a:p>
+        </p:txBody>
+      </p:sp>
+      <p:sp>
+        <p:nvSpPr>
+          <p:cNvPr id="13" name="TextBox 12"/>
+          <p:cNvSpPr txBox="1"/>
+          <p:nvPr/>
+        </p:nvSpPr>
+        <p:spPr>
+          <a:xfrm>
+            <a:off x="612648" y="3657599"/>
+            <a:ext cx="5394959" cy="237744"/>
+          </a:xfrm>
+          <a:prstGeom prst="rect">
+            <a:avLst/>
+          </a:prstGeom>
+          <a:noFill/>
+        </p:spPr>
+        <p:txBody>
+          <a:bodyPr wrap="square">
+            <a:spAutoFit/>
+          </a:bodyPr>
+          <a:lstStyle/>
+          <a:p>
+            <a:pPr algn="l"/>
+            <a:r>
+              <a:rPr sz="1050" b="0" i="0">
+                <a:solidFill>
+                  <a:srgbClr val="1B2A41"/>
+                </a:solidFill>
+                <a:latin typeface="Menlo"/>
+              </a:rPr>
+              <a:t>shape     : chained entry (Shape 1) or attested (Shape 2)</a:t>
+            </a:r>
+          </a:p>
+        </p:txBody>
+      </p:sp>
+      <p:sp>
+        <p:nvSpPr>
+          <p:cNvPr id="14" name="TextBox 13"/>
+          <p:cNvSpPr txBox="1"/>
+          <p:nvPr/>
+        </p:nvSpPr>
+        <p:spPr>
+          <a:xfrm>
+            <a:off x="6400800" y="1783080"/>
+            <a:ext cx="5394960" cy="2194560"/>
+          </a:xfrm>
+          <a:prstGeom prst="rect">
+            <a:avLst/>
+          </a:prstGeom>
+          <a:noFill/>
+        </p:spPr>
+        <p:txBody>
+          <a:bodyPr wrap="square">
+            <a:spAutoFit/>
+          </a:bodyPr>
+          <a:lstStyle/>
+          <a:p>
+            <a:pPr algn="l"/>
+            <a:r>
+              <a:rPr sz="1300" b="0" i="0">
+                <a:solidFill>
+                  <a:srgbClr val="1B2A41"/>
+                </a:solidFill>
+                <a:latin typeface="Avenir Next"/>
+              </a:rPr>
+              <a:t>Keyed by digest PLUS the chain key —</a:t>
+            </a:r>
+          </a:p>
+          <a:p>
+            <a:pPr algn="l"/>
+            <a:r>
+              <a:rPr sz="1300" b="0" i="0">
+                <a:solidFill>
+                  <a:srgbClr val="1B2A41"/>
+                </a:solidFill>
+                <a:latin typeface="Avenir Next"/>
+              </a:rPr>
+              <a:t>never bare digest. (tenant, run, seq) is</a:t>
+            </a:r>
+          </a:p>
+          <a:p>
+            <a:pPr algn="l"/>
+            <a:r>
+              <a:rPr sz="1300" b="0" i="0">
+                <a:solidFill>
+                  <a:srgbClr val="1B2A41"/>
+                </a:solidFill>
+                <a:latin typeface="Avenir Next"/>
+              </a:rPr>
+              <a:t>unique by construction, so even a</a:t>
+            </a:r>
+          </a:p>
+          <a:p>
+            <a:pPr algn="l"/>
+            <a:r>
+              <a:rPr sz="1300" b="0" i="0">
+                <a:solidFill>
+                  <a:srgbClr val="1B2A41"/>
+                </a:solidFill>
+                <a:latin typeface="Avenir Next"/>
+              </a:rPr>
+              <a:t>hypothetical hash collision resolves to</a:t>
+            </a:r>
+          </a:p>
+          <a:p>
+            <a:pPr algn="l"/>
+            <a:r>
+              <a:rPr sz="1300" b="0" i="0">
+                <a:solidFill>
+                  <a:srgbClr val="1B2A41"/>
+                </a:solidFill>
+                <a:latin typeface="Avenir Next"/>
+              </a:rPr>
+              <a:t>the correct artifact.</a:t>
+            </a:r>
+          </a:p>
+          <a:p>
+            <a:pPr algn="l"/>
+          </a:p>
+          <a:p>
+            <a:pPr algn="l"/>
+            <a:r>
+              <a:rPr sz="1300" b="0" i="0">
+                <a:solidFill>
+                  <a:srgbClr val="1B2A41"/>
+                </a:solidFill>
+                <a:latin typeface="Avenir Next"/>
+              </a:rPr>
+              <a:t>The index itself is integrity-bound:</a:t>
+            </a:r>
+          </a:p>
+          <a:p>
+            <a:pPr algn="l"/>
+            <a:r>
+              <a:rPr sz="1300" b="0" i="0">
+                <a:solidFill>
+                  <a:srgbClr val="1B2A41"/>
+                </a:solidFill>
+                <a:latin typeface="Avenir Next"/>
+              </a:rPr>
+              <a:t>its entries ride the operational chain</a:t>
+            </a:r>
+          </a:p>
+          <a:p>
+            <a:pPr algn="l"/>
+            <a:r>
+              <a:rPr sz="1300" b="0" i="0">
+                <a:solidFill>
+                  <a:srgbClr val="1B2A41"/>
+                </a:solidFill>
+                <a:latin typeface="Avenir Next"/>
+              </a:rPr>
+              <a:t>(MAC'd + sealed like everything else).</a:t>
+            </a:r>
+          </a:p>
+        </p:txBody>
+      </p:sp>
+      <p:sp>
+        <p:nvSpPr>
+          <p:cNvPr id="15" name="Rounded Rectangle 14"/>
           <p:cNvSpPr/>
           <p:nvPr/>
         </p:nvSpPr>
         <p:spPr>
           <a:xfrm>
-            <a:off x="4343400" y="2468880"/>
-            <a:ext cx="3657600" cy="1335024"/>
+            <a:off x="502920" y="4572000"/>
+            <a:ext cx="11155680" cy="1335024"/>
           </a:xfrm>
           <a:prstGeom prst="roundRect">
             <a:avLst/>
@@ -4470,14 +4967,14 @@
       </p:sp>
       <p:sp>
         <p:nvSpPr>
-          <p:cNvPr id="11" name="Rounded Rectangle 10"/>
+          <p:cNvPr id="16" name="Rounded Rectangle 15"/>
           <p:cNvSpPr/>
           <p:nvPr/>
         </p:nvSpPr>
         <p:spPr>
           <a:xfrm>
-            <a:off x="4343400" y="2468880"/>
-            <a:ext cx="3657600" cy="310896"/>
+            <a:off x="502920" y="4572000"/>
+            <a:ext cx="11155680" cy="310896"/>
           </a:xfrm>
           <a:prstGeom prst="roundRect">
             <a:avLst/>
@@ -4517,21 +5014,21 @@
                 </a:solidFill>
                 <a:latin typeface="Menlo"/>
               </a:rPr>
-              <a:t>E-2025-05-23-0411</a:t>
-            </a:r>
-          </a:p>
-        </p:txBody>
-      </p:sp>
-      <p:sp>
-        <p:nvSpPr>
-          <p:cNvPr id="12" name="TextBox 11"/>
+              <a:t>RESOLUTION OUTCOMES  (four, each means something different)</a:t>
+            </a:r>
+          </a:p>
+        </p:txBody>
+      </p:sp>
+      <p:sp>
+        <p:nvSpPr>
+          <p:cNvPr id="17" name="TextBox 16"/>
           <p:cNvSpPr txBox="1"/>
           <p:nvPr/>
         </p:nvSpPr>
         <p:spPr>
           <a:xfrm>
-            <a:off x="4453128" y="2816352"/>
-            <a:ext cx="3474720" cy="237744"/>
+            <a:off x="612648" y="4919472"/>
+            <a:ext cx="10972800" cy="237744"/>
           </a:xfrm>
           <a:prstGeom prst="rect">
             <a:avLst/>
@@ -4546,27 +5043,27 @@
           <a:p>
             <a:pPr algn="l"/>
             <a:r>
-              <a:rPr sz="1000" b="0" i="0">
-                <a:solidFill>
-                  <a:srgbClr val="1B2A41"/>
+              <a:rPr sz="1050" b="0" i="0">
+                <a:solidFill>
+                  <a:srgbClr val="0E7C7B"/>
                 </a:solidFill>
                 <a:latin typeface="Menlo"/>
               </a:rPr>
-              <a:t>artifact: sha256:aa02…19bd</a:t>
-            </a:r>
-          </a:p>
-        </p:txBody>
-      </p:sp>
-      <p:sp>
-        <p:nvSpPr>
-          <p:cNvPr id="13" name="TextBox 12"/>
+              <a:t>resolved            : bytes fetched, sha256(bytes) == digest  ✓  self-proving</a:t>
+            </a:r>
+          </a:p>
+        </p:txBody>
+      </p:sp>
+      <p:sp>
+        <p:nvSpPr>
+          <p:cNvPr id="18" name="TextBox 17"/>
           <p:cNvSpPr txBox="1"/>
           <p:nvPr/>
         </p:nvSpPr>
         <p:spPr>
           <a:xfrm>
-            <a:off x="4453128" y="3054096"/>
-            <a:ext cx="3474720" cy="237744"/>
+            <a:off x="612648" y="5157216"/>
+            <a:ext cx="10972800" cy="237744"/>
           </a:xfrm>
           <a:prstGeom prst="rect">
             <a:avLst/>
@@ -4581,27 +5078,27 @@
           <a:p>
             <a:pPr algn="l"/>
             <a:r>
-              <a:rPr sz="1000" b="0" i="0">
-                <a:solidFill>
-                  <a:srgbClr val="C99A2E"/>
+              <a:rPr sz="1050" b="0" i="0">
+                <a:solidFill>
+                  <a:srgbClr val="1B2A41"/>
                 </a:solidFill>
                 <a:latin typeface="Menlo"/>
               </a:rPr>
-              <a:t>prev    : 27f0…6c11 ─────┐</a:t>
-            </a:r>
-          </a:p>
-        </p:txBody>
-      </p:sp>
-      <p:sp>
-        <p:nvSpPr>
-          <p:cNvPr id="14" name="TextBox 13"/>
+              <a:t>disposed            : chain-bound chain.artifact_disposed event exists (dated OUTSIDE retention window)</a:t>
+            </a:r>
+          </a:p>
+        </p:txBody>
+      </p:sp>
+      <p:sp>
+        <p:nvSpPr>
+          <p:cNvPr id="19" name="TextBox 18"/>
           <p:cNvSpPr txBox="1"/>
           <p:nvPr/>
         </p:nvSpPr>
         <p:spPr>
           <a:xfrm>
-            <a:off x="4453128" y="3291839"/>
-            <a:ext cx="3474720" cy="237744"/>
+            <a:off x="612648" y="5394959"/>
+            <a:ext cx="10972800" cy="237744"/>
           </a:xfrm>
           <a:prstGeom prst="rect">
             <a:avLst/>
@@ -4616,27 +5113,27 @@
           <a:p>
             <a:pPr algn="l"/>
             <a:r>
-              <a:rPr sz="1000" b="0" i="0">
-                <a:solidFill>
-                  <a:srgbClr val="1B2A41"/>
+              <a:rPr sz="1050" b="0" i="0">
+                <a:solidFill>
+                  <a:srgbClr val="B32D2D"/>
                 </a:solidFill>
                 <a:latin typeface="Menlo"/>
               </a:rPr>
-              <a:t>key_id  : ikm-2025-Q2-07</a:t>
-            </a:r>
-          </a:p>
-        </p:txBody>
-      </p:sp>
-      <p:sp>
-        <p:nvSpPr>
-          <p:cNvPr id="15" name="TextBox 14"/>
+              <a:t>retention failure   : absent with NO disposal event — a finding (§10.9 floors)</a:t>
+            </a:r>
+          </a:p>
+        </p:txBody>
+      </p:sp>
+      <p:sp>
+        <p:nvSpPr>
+          <p:cNvPr id="20" name="TextBox 19"/>
           <p:cNvSpPr txBox="1"/>
           <p:nvPr/>
         </p:nvSpPr>
         <p:spPr>
           <a:xfrm>
-            <a:off x="4453128" y="3529583"/>
-            <a:ext cx="3474720" cy="237744"/>
+            <a:off x="612648" y="5632703"/>
+            <a:ext cx="10972800" cy="237744"/>
           </a:xfrm>
           <a:prstGeom prst="rect">
             <a:avLst/>
@@ -4651,126 +5148,27 @@
           <a:p>
             <a:pPr algn="l"/>
             <a:r>
-              <a:rPr sz="1000" b="0" i="0">
-                <a:solidFill>
-                  <a:srgbClr val="C99A2E"/>
+              <a:rPr sz="1050" b="0" i="0">
+                <a:solidFill>
+                  <a:srgbClr val="B32D2D"/>
                 </a:solidFill>
                 <a:latin typeface="Menlo"/>
               </a:rPr>
-              <a:t>mac     : 5d81…e903  ◄───┘ matches</a:t>
-            </a:r>
-          </a:p>
-        </p:txBody>
-      </p:sp>
-      <p:sp>
-        <p:nvSpPr>
-          <p:cNvPr id="16" name="Rounded Rectangle 15"/>
-          <p:cNvSpPr/>
-          <p:nvPr/>
-        </p:nvSpPr>
-        <p:spPr>
-          <a:xfrm>
-            <a:off x="457200" y="3520440"/>
-            <a:ext cx="3657600" cy="1335024"/>
-          </a:xfrm>
-          <a:prstGeom prst="roundRect">
-            <a:avLst/>
-          </a:prstGeom>
-          <a:solidFill>
-            <a:srgbClr val="FAF7F0"/>
-          </a:solidFill>
-          <a:ln w="15875">
-            <a:solidFill>
-              <a:srgbClr val="1B2A41"/>
-            </a:solidFill>
-          </a:ln>
-        </p:spPr>
-        <p:style>
-          <a:lnRef idx="1">
-            <a:schemeClr val="accent1"/>
-          </a:lnRef>
-          <a:fillRef idx="3">
-            <a:schemeClr val="accent1"/>
-          </a:fillRef>
-          <a:effectRef idx="2">
-            <a:schemeClr val="accent1"/>
-          </a:effectRef>
-          <a:fontRef idx="minor">
-            <a:schemeClr val="lt1"/>
-          </a:fontRef>
-        </p:style>
-        <p:txBody>
-          <a:bodyPr rtlCol="0" anchor="ctr" wrap="square"/>
-          <a:lstStyle/>
-          <a:p>
-            <a:pPr algn="ctr"/>
-          </a:p>
-        </p:txBody>
-      </p:sp>
-      <p:sp>
-        <p:nvSpPr>
-          <p:cNvPr id="17" name="Rounded Rectangle 16"/>
-          <p:cNvSpPr/>
-          <p:nvPr/>
-        </p:nvSpPr>
-        <p:spPr>
-          <a:xfrm>
-            <a:off x="457200" y="3520440"/>
-            <a:ext cx="3657600" cy="310896"/>
-          </a:xfrm>
-          <a:prstGeom prst="roundRect">
-            <a:avLst/>
-          </a:prstGeom>
-          <a:solidFill>
-            <a:srgbClr val="1B2A41"/>
-          </a:solidFill>
-          <a:ln w="15875">
-            <a:solidFill>
-              <a:srgbClr val="1B2A41"/>
-            </a:solidFill>
-          </a:ln>
-        </p:spPr>
-        <p:style>
-          <a:lnRef idx="1">
-            <a:schemeClr val="accent1"/>
-          </a:lnRef>
-          <a:fillRef idx="3">
-            <a:schemeClr val="accent1"/>
-          </a:fillRef>
-          <a:effectRef idx="2">
-            <a:schemeClr val="accent1"/>
-          </a:effectRef>
-          <a:fontRef idx="minor">
-            <a:schemeClr val="lt1"/>
-          </a:fontRef>
-        </p:style>
-        <p:txBody>
-          <a:bodyPr rtlCol="0" anchor="ctr" wrap="square"/>
-          <a:lstStyle/>
-          <a:p>
-            <a:pPr algn="ctr"/>
-            <a:r>
-              <a:rPr sz="1150" b="1">
-                <a:solidFill>
-                  <a:srgbClr val="FAF7F0"/>
-                </a:solidFill>
-                <a:latin typeface="Menlo"/>
-              </a:rPr>
-              <a:t>E-2025-05-23-0410</a:t>
-            </a:r>
-          </a:p>
-        </p:txBody>
-      </p:sp>
-      <p:sp>
-        <p:nvSpPr>
-          <p:cNvPr id="18" name="TextBox 17"/>
+              <a:t>integrity failure   : bytes fetched but re-hash ≠ digest — a §7-class break</a:t>
+            </a:r>
+          </a:p>
+        </p:txBody>
+      </p:sp>
+      <p:sp>
+        <p:nvSpPr>
+          <p:cNvPr id="21" name="TextBox 20"/>
           <p:cNvSpPr txBox="1"/>
           <p:nvPr/>
         </p:nvSpPr>
         <p:spPr>
           <a:xfrm>
-            <a:off x="566928" y="3867912"/>
-            <a:ext cx="3474720" cy="237744"/>
+            <a:off x="502920" y="6263640"/>
+            <a:ext cx="11155680" cy="457200"/>
           </a:xfrm>
           <a:prstGeom prst="rect">
             <a:avLst/>
@@ -4785,356 +5183,13 @@
           <a:p>
             <a:pPr algn="l"/>
             <a:r>
-              <a:rPr sz="1000" b="0" i="0">
-                <a:solidFill>
-                  <a:srgbClr val="1B2A41"/>
-                </a:solidFill>
-                <a:latin typeface="Menlo"/>
-              </a:rPr>
-              <a:t>artifact: sha256:90cd…77e8</a:t>
-            </a:r>
-          </a:p>
-        </p:txBody>
-      </p:sp>
-      <p:sp>
-        <p:nvSpPr>
-          <p:cNvPr id="19" name="TextBox 18"/>
-          <p:cNvSpPr txBox="1"/>
-          <p:nvPr/>
-        </p:nvSpPr>
-        <p:spPr>
-          <a:xfrm>
-            <a:off x="566928" y="4105656"/>
-            <a:ext cx="3474720" cy="237744"/>
-          </a:xfrm>
-          <a:prstGeom prst="rect">
-            <a:avLst/>
-          </a:prstGeom>
-          <a:noFill/>
-        </p:spPr>
-        <p:txBody>
-          <a:bodyPr wrap="square">
-            <a:spAutoFit/>
-          </a:bodyPr>
-          <a:lstStyle/>
-          <a:p>
-            <a:pPr algn="l"/>
-            <a:r>
-              <a:rPr sz="1000" b="0" i="0">
-                <a:solidFill>
-                  <a:srgbClr val="1B2A41"/>
-                </a:solidFill>
-                <a:latin typeface="Menlo"/>
-              </a:rPr>
-              <a:t>prev    : c1a9…04f2  (→ 0409 …)</a:t>
-            </a:r>
-          </a:p>
-        </p:txBody>
-      </p:sp>
-      <p:sp>
-        <p:nvSpPr>
-          <p:cNvPr id="20" name="TextBox 19"/>
-          <p:cNvSpPr txBox="1"/>
-          <p:nvPr/>
-        </p:nvSpPr>
-        <p:spPr>
-          <a:xfrm>
-            <a:off x="566928" y="4343400"/>
-            <a:ext cx="3474720" cy="237744"/>
-          </a:xfrm>
-          <a:prstGeom prst="rect">
-            <a:avLst/>
-          </a:prstGeom>
-          <a:noFill/>
-        </p:spPr>
-        <p:txBody>
-          <a:bodyPr wrap="square">
-            <a:spAutoFit/>
-          </a:bodyPr>
-          <a:lstStyle/>
-          <a:p>
-            <a:pPr algn="l"/>
-            <a:r>
-              <a:rPr sz="1000" b="0" i="0">
-                <a:solidFill>
-                  <a:srgbClr val="1B2A41"/>
-                </a:solidFill>
-                <a:latin typeface="Menlo"/>
-              </a:rPr>
-              <a:t>key_id  : ikm-2025-Q2-07</a:t>
-            </a:r>
-          </a:p>
-        </p:txBody>
-      </p:sp>
-      <p:sp>
-        <p:nvSpPr>
-          <p:cNvPr id="21" name="TextBox 20"/>
-          <p:cNvSpPr txBox="1"/>
-          <p:nvPr/>
-        </p:nvSpPr>
-        <p:spPr>
-          <a:xfrm>
-            <a:off x="566928" y="4581144"/>
-            <a:ext cx="3474720" cy="237744"/>
-          </a:xfrm>
-          <a:prstGeom prst="rect">
-            <a:avLst/>
-          </a:prstGeom>
-          <a:noFill/>
-        </p:spPr>
-        <p:txBody>
-          <a:bodyPr wrap="square">
-            <a:spAutoFit/>
-          </a:bodyPr>
-          <a:lstStyle/>
-          <a:p>
-            <a:pPr algn="l"/>
-            <a:r>
-              <a:rPr sz="1000" b="0" i="0">
-                <a:solidFill>
-                  <a:srgbClr val="C99A2E"/>
-                </a:solidFill>
-                <a:latin typeface="Menlo"/>
-              </a:rPr>
-              <a:t>mac     : 27f0…6c11  ◄───┘ matches</a:t>
-            </a:r>
-          </a:p>
-        </p:txBody>
-      </p:sp>
-      <p:cxnSp>
-        <p:nvCxnSpPr>
-          <p:cNvPr id="22" name="Connector 21"/>
-          <p:cNvCxnSpPr/>
-          <p:nvPr/>
-        </p:nvCxnSpPr>
-        <p:spPr>
-          <a:xfrm flipH="1">
-            <a:off x="8001000" y="2148840"/>
-            <a:ext cx="228600" cy="868680"/>
-          </a:xfrm>
-          <a:prstGeom prst="line">
-            <a:avLst/>
-          </a:prstGeom>
-          <a:ln w="31750">
-            <a:solidFill>
-              <a:srgbClr val="C99A2E"/>
-            </a:solidFill>
-            <a:tailEnd type="arrow"/>
-          </a:ln>
-        </p:spPr>
-        <p:style>
-          <a:lnRef idx="2">
-            <a:schemeClr val="accent1"/>
-          </a:lnRef>
-          <a:fillRef idx="0">
-            <a:schemeClr val="accent1"/>
-          </a:fillRef>
-          <a:effectRef idx="1">
-            <a:schemeClr val="accent1"/>
-          </a:effectRef>
-          <a:fontRef idx="minor">
-            <a:schemeClr val="tx1"/>
-          </a:fontRef>
-        </p:style>
-      </p:cxnSp>
-      <p:cxnSp>
-        <p:nvCxnSpPr>
-          <p:cNvPr id="23" name="Connector 22"/>
-          <p:cNvCxnSpPr/>
-          <p:nvPr/>
-        </p:nvCxnSpPr>
-        <p:spPr>
-          <a:xfrm flipH="1">
-            <a:off x="4114800" y="3200400"/>
-            <a:ext cx="228600" cy="868680"/>
-          </a:xfrm>
-          <a:prstGeom prst="line">
-            <a:avLst/>
-          </a:prstGeom>
-          <a:ln w="31750">
-            <a:solidFill>
-              <a:srgbClr val="C99A2E"/>
-            </a:solidFill>
-            <a:tailEnd type="arrow"/>
-          </a:ln>
-        </p:spPr>
-        <p:style>
-          <a:lnRef idx="2">
-            <a:schemeClr val="accent1"/>
-          </a:lnRef>
-          <a:fillRef idx="0">
-            <a:schemeClr val="accent1"/>
-          </a:fillRef>
-          <a:effectRef idx="1">
-            <a:schemeClr val="accent1"/>
-          </a:effectRef>
-          <a:fontRef idx="minor">
-            <a:schemeClr val="tx1"/>
-          </a:fontRef>
-        </p:style>
-      </p:cxnSp>
-      <p:sp>
-        <p:nvSpPr>
-          <p:cNvPr id="24" name="TextBox 23"/>
-          <p:cNvSpPr txBox="1"/>
-          <p:nvPr/>
-        </p:nvSpPr>
-        <p:spPr>
-          <a:xfrm>
-            <a:off x="8366760" y="3566160"/>
-            <a:ext cx="3291840" cy="2377440"/>
-          </a:xfrm>
-          <a:prstGeom prst="rect">
-            <a:avLst/>
-          </a:prstGeom>
-          <a:noFill/>
-        </p:spPr>
-        <p:txBody>
-          <a:bodyPr wrap="square">
-            <a:spAutoFit/>
-          </a:bodyPr>
-          <a:lstStyle/>
-          <a:p>
-            <a:pPr algn="l"/>
-            <a:r>
-              <a:rPr sz="1300" b="0" i="0">
+              <a:rPr sz="1250" b="0" i="1">
                 <a:solidFill>
                   <a:srgbClr val="6B7480"/>
                 </a:solidFill>
                 <a:latin typeface="Avenir Next"/>
               </a:rPr>
-              <a:t>At each hop:</a:t>
-            </a:r>
-          </a:p>
-          <a:p>
-            <a:pPr algn="l"/>
-            <a:r>
-              <a:rPr sz="1300" b="0" i="0">
-                <a:solidFill>
-                  <a:srgbClr val="6B7480"/>
-                </a:solidFill>
-                <a:latin typeface="Avenir Next"/>
-              </a:rPr>
-              <a:t>1. fetch the parent entry</a:t>
-            </a:r>
-          </a:p>
-          <a:p>
-            <a:pPr algn="l"/>
-            <a:r>
-              <a:rPr sz="1300" b="0" i="0">
-                <a:solidFill>
-                  <a:srgbClr val="6B7480"/>
-                </a:solidFill>
-                <a:latin typeface="Avenir Next"/>
-              </a:rPr>
-              <a:t>2. RECOMPUTE its mac from</a:t>
-            </a:r>
-          </a:p>
-          <a:p>
-            <a:pPr algn="l"/>
-            <a:r>
-              <a:rPr sz="1300" b="0" i="0">
-                <a:solidFill>
-                  <a:srgbClr val="6B7480"/>
-                </a:solidFill>
-                <a:latin typeface="Avenir Next"/>
-              </a:rPr>
-              <a:t>    its own fields + key</a:t>
-            </a:r>
-          </a:p>
-          <a:p>
-            <a:pPr algn="l"/>
-            <a:r>
-              <a:rPr sz="1300" b="0" i="0">
-                <a:solidFill>
-                  <a:srgbClr val="6B7480"/>
-                </a:solidFill>
-                <a:latin typeface="Avenir Next"/>
-              </a:rPr>
-              <a:t>3. compare to the child's</a:t>
-            </a:r>
-          </a:p>
-          <a:p>
-            <a:pPr algn="l"/>
-            <a:r>
-              <a:rPr sz="1300" b="0" i="0">
-                <a:solidFill>
-                  <a:srgbClr val="6B7480"/>
-                </a:solidFill>
-                <a:latin typeface="Avenir Next"/>
-              </a:rPr>
-              <a:t>    prev_entry_mac</a:t>
-            </a:r>
-          </a:p>
-          <a:p>
-            <a:pPr algn="l"/>
-            <a:r>
-              <a:rPr sz="1300" b="0" i="0">
-                <a:solidFill>
-                  <a:srgbClr val="6B7480"/>
-                </a:solidFill>
-                <a:latin typeface="Avenir Next"/>
-              </a:rPr>
-              <a:t>Mismatch = break at this</a:t>
-            </a:r>
-          </a:p>
-          <a:p>
-            <a:pPr algn="l"/>
-            <a:r>
-              <a:rPr sz="1300" b="0" i="0">
-                <a:solidFill>
-                  <a:srgbClr val="6B7480"/>
-                </a:solidFill>
-                <a:latin typeface="Avenir Next"/>
-              </a:rPr>
-              <a:t>exact hop. Match = proven</a:t>
-            </a:r>
-          </a:p>
-          <a:p>
-            <a:pPr algn="l"/>
-            <a:r>
-              <a:rPr sz="1300" b="0" i="0">
-                <a:solidFill>
-                  <a:srgbClr val="6B7480"/>
-                </a:solidFill>
-                <a:latin typeface="Avenir Next"/>
-              </a:rPr>
-              <a:t>link; keep walking.</a:t>
-            </a:r>
-          </a:p>
-        </p:txBody>
-      </p:sp>
-      <p:sp>
-        <p:nvSpPr>
-          <p:cNvPr id="25" name="TextBox 24"/>
-          <p:cNvSpPr txBox="1"/>
-          <p:nvPr/>
-        </p:nvSpPr>
-        <p:spPr>
-          <a:xfrm>
-            <a:off x="457200" y="5623560"/>
-            <a:ext cx="11247120" cy="640080"/>
-          </a:xfrm>
-          <a:prstGeom prst="rect">
-            <a:avLst/>
-          </a:prstGeom>
-          <a:noFill/>
-        </p:spPr>
-        <p:txBody>
-          <a:bodyPr wrap="square">
-            <a:spAutoFit/>
-          </a:bodyPr>
-          <a:lstStyle/>
-          <a:p>
-            <a:pPr algn="l"/>
-            <a:r>
-              <a:rPr sz="1500" b="0" i="1">
-                <a:solidFill>
-                  <a:srgbClr val="1B2A41"/>
-                </a:solidFill>
-                <a:latin typeface="Avenir Next"/>
-              </a:rPr>
-              <a:t>Walk ends at the genesis entry (prev = ∅). You have now re-derived the spine — proven, not just read.</a:t>
+              <a:t>A mandatory periodic resolvability sweep (audit.artifact_index.sweep) rides the chain — losses surface on a clock, not by luck.</a:t>
             </a:r>
           </a:p>
         </p:txBody>
@@ -5195,7 +5250,7 @@
                 </a:solidFill>
                 <a:latin typeface="Avenir Next"/>
               </a:rPr>
-              <a:t>Why the walk alone is not enough</a:t>
+              <a:t>Steps 1-2 — follow prev_entry_mac backward, verifying each hop</a:t>
             </a:r>
           </a:p>
         </p:txBody>
@@ -5230,7 +5285,7 @@
                 </a:solidFill>
                 <a:latin typeface="Avenir Next"/>
               </a:rPr>
-              <a:t>A fabricator can build a chain that is internally consistent</a:t>
+              <a:t>Each entry names its parent's mac; recompute and compare at every step</a:t>
             </a:r>
           </a:p>
         </p:txBody>
@@ -5243,8 +5298,8 @@
         </p:nvSpPr>
         <p:spPr>
           <a:xfrm>
-            <a:off x="731520" y="1737360"/>
-            <a:ext cx="5120640" cy="3017520"/>
+            <a:off x="8229600" y="1417320"/>
+            <a:ext cx="3657600" cy="1335024"/>
           </a:xfrm>
           <a:prstGeom prst="roundRect">
             <a:avLst/>
@@ -5254,7 +5309,7 @@
           </a:solidFill>
           <a:ln w="15875">
             <a:solidFill>
-              <a:srgbClr val="B32D2D"/>
+              <a:srgbClr val="1B2A41"/>
             </a:solidFill>
           </a:ln>
         </p:spPr>
@@ -5282,157 +5337,24 @@
       </p:sp>
       <p:sp>
         <p:nvSpPr>
-          <p:cNvPr id="5" name="TextBox 4"/>
-          <p:cNvSpPr txBox="1"/>
-          <p:nvPr/>
-        </p:nvSpPr>
-        <p:spPr>
-          <a:xfrm>
-            <a:off x="914400" y="1874519"/>
-            <a:ext cx="4754880" cy="457200"/>
-          </a:xfrm>
-          <a:prstGeom prst="rect">
-            <a:avLst/>
-          </a:prstGeom>
-          <a:noFill/>
-        </p:spPr>
-        <p:txBody>
-          <a:bodyPr wrap="square">
-            <a:spAutoFit/>
-          </a:bodyPr>
-          <a:lstStyle/>
-          <a:p>
-            <a:pPr algn="l"/>
-            <a:r>
-              <a:rPr sz="1400" b="1" i="0">
-                <a:solidFill>
-                  <a:srgbClr val="B32D2D"/>
-                </a:solidFill>
-                <a:latin typeface="Avenir Next"/>
-              </a:rPr>
-              <a:t>THE FORGERY PROBLEM</a:t>
-            </a:r>
-          </a:p>
-        </p:txBody>
-      </p:sp>
-      <p:sp>
-        <p:nvSpPr>
-          <p:cNvPr id="6" name="TextBox 5"/>
-          <p:cNvSpPr txBox="1"/>
-          <p:nvPr/>
-        </p:nvSpPr>
-        <p:spPr>
-          <a:xfrm>
-            <a:off x="914400" y="2377440"/>
-            <a:ext cx="4754880" cy="2194560"/>
-          </a:xfrm>
-          <a:prstGeom prst="rect">
-            <a:avLst/>
-          </a:prstGeom>
-          <a:noFill/>
-        </p:spPr>
-        <p:txBody>
-          <a:bodyPr wrap="square">
-            <a:spAutoFit/>
-          </a:bodyPr>
-          <a:lstStyle/>
-          <a:p>
-            <a:pPr algn="l"/>
-            <a:r>
-              <a:rPr sz="1300" b="0" i="0">
-                <a:solidFill>
-                  <a:srgbClr val="1B2A41"/>
-                </a:solidFill>
-                <a:latin typeface="Avenir Next"/>
-              </a:rPr>
-              <a:t>Rebuild every entry from the point of a</a:t>
-            </a:r>
-          </a:p>
-          <a:p>
-            <a:pPr algn="l"/>
-            <a:r>
-              <a:rPr sz="1300" b="0" i="0">
-                <a:solidFill>
-                  <a:srgbClr val="1B2A41"/>
-                </a:solidFill>
-                <a:latin typeface="Avenir Next"/>
-              </a:rPr>
-              <a:t>change forward, re-MAC the tail, and the</a:t>
-            </a:r>
-          </a:p>
-          <a:p>
-            <a:pPr algn="l"/>
-            <a:r>
-              <a:rPr sz="1300" b="0" i="0">
-                <a:solidFill>
-                  <a:srgbClr val="1B2A41"/>
-                </a:solidFill>
-                <a:latin typeface="Avenir Next"/>
-              </a:rPr>
-              <a:t>links all match again.</a:t>
-            </a:r>
-          </a:p>
-          <a:p>
-            <a:pPr algn="l"/>
-          </a:p>
-          <a:p>
-            <a:pPr algn="l"/>
-            <a:r>
-              <a:rPr sz="1300" b="0" i="0">
-                <a:solidFill>
-                  <a:srgbClr val="1B2A41"/>
-                </a:solidFill>
-                <a:latin typeface="Avenir Next"/>
-              </a:rPr>
-              <a:t>Internal consistency proves sequence —</a:t>
-            </a:r>
-          </a:p>
-          <a:p>
-            <a:pPr algn="l"/>
-            <a:r>
-              <a:rPr sz="1300" b="0" i="0">
-                <a:solidFill>
-                  <a:srgbClr val="1B2A41"/>
-                </a:solidFill>
-                <a:latin typeface="Avenir Next"/>
-              </a:rPr>
-              <a:t>it does not prove the sequence existed</a:t>
-            </a:r>
-          </a:p>
-          <a:p>
-            <a:pPr algn="l"/>
-            <a:r>
-              <a:rPr sz="1300" b="0" i="0">
-                <a:solidFill>
-                  <a:srgbClr val="1B2A41"/>
-                </a:solidFill>
-                <a:latin typeface="Avenir Next"/>
-              </a:rPr>
-              <a:t>BEFORE today.</a:t>
-            </a:r>
-          </a:p>
-        </p:txBody>
-      </p:sp>
-      <p:sp>
-        <p:nvSpPr>
-          <p:cNvPr id="7" name="Rounded Rectangle 6"/>
+          <p:cNvPr id="5" name="Rounded Rectangle 4"/>
           <p:cNvSpPr/>
           <p:nvPr/>
         </p:nvSpPr>
         <p:spPr>
           <a:xfrm>
-            <a:off x="6309360" y="1737360"/>
-            <a:ext cx="5212080" cy="3017520"/>
+            <a:off x="8229600" y="1417320"/>
+            <a:ext cx="3657600" cy="310896"/>
           </a:xfrm>
           <a:prstGeom prst="roundRect">
             <a:avLst/>
           </a:prstGeom>
           <a:solidFill>
-            <a:srgbClr val="E7EEF2"/>
+            <a:srgbClr val="1B2A41"/>
           </a:solidFill>
           <a:ln w="15875">
             <a:solidFill>
-              <a:srgbClr val="0E7C7B"/>
+              <a:srgbClr val="1B2A41"/>
             </a:solidFill>
           </a:ln>
         </p:spPr>
@@ -5455,6 +5377,85 @@
           <a:lstStyle/>
           <a:p>
             <a:pPr algn="ctr"/>
+            <a:r>
+              <a:rPr sz="1150" b="1">
+                <a:solidFill>
+                  <a:srgbClr val="FAF7F0"/>
+                </a:solidFill>
+                <a:latin typeface="Menlo"/>
+              </a:rPr>
+              <a:t>E-2025-05-23-0412</a:t>
+            </a:r>
+          </a:p>
+        </p:txBody>
+      </p:sp>
+      <p:sp>
+        <p:nvSpPr>
+          <p:cNvPr id="6" name="TextBox 5"/>
+          <p:cNvSpPr txBox="1"/>
+          <p:nvPr/>
+        </p:nvSpPr>
+        <p:spPr>
+          <a:xfrm>
+            <a:off x="8339327" y="1764792"/>
+            <a:ext cx="3474720" cy="237744"/>
+          </a:xfrm>
+          <a:prstGeom prst="rect">
+            <a:avLst/>
+          </a:prstGeom>
+          <a:noFill/>
+        </p:spPr>
+        <p:txBody>
+          <a:bodyPr wrap="square">
+            <a:spAutoFit/>
+          </a:bodyPr>
+          <a:lstStyle/>
+          <a:p>
+            <a:pPr algn="l"/>
+            <a:r>
+              <a:rPr sz="1000" b="0" i="0">
+                <a:solidFill>
+                  <a:srgbClr val="1B2A41"/>
+                </a:solidFill>
+                <a:latin typeface="Menlo"/>
+              </a:rPr>
+              <a:t>artifact: sha256:7c19…e2a4</a:t>
+            </a:r>
+          </a:p>
+        </p:txBody>
+      </p:sp>
+      <p:sp>
+        <p:nvSpPr>
+          <p:cNvPr id="7" name="TextBox 6"/>
+          <p:cNvSpPr txBox="1"/>
+          <p:nvPr/>
+        </p:nvSpPr>
+        <p:spPr>
+          <a:xfrm>
+            <a:off x="8339327" y="2002536"/>
+            <a:ext cx="3474720" cy="237744"/>
+          </a:xfrm>
+          <a:prstGeom prst="rect">
+            <a:avLst/>
+          </a:prstGeom>
+          <a:noFill/>
+        </p:spPr>
+        <p:txBody>
+          <a:bodyPr wrap="square">
+            <a:spAutoFit/>
+          </a:bodyPr>
+          <a:lstStyle/>
+          <a:p>
+            <a:pPr algn="l"/>
+            <a:r>
+              <a:rPr sz="1000" b="0" i="0">
+                <a:solidFill>
+                  <a:srgbClr val="C99A2E"/>
+                </a:solidFill>
+                <a:latin typeface="Menlo"/>
+              </a:rPr>
+              <a:t>prev    : 5d81…e903 ─────┐</a:t>
+            </a:r>
           </a:p>
         </p:txBody>
       </p:sp>
@@ -5466,8 +5467,8 @@
         </p:nvSpPr>
         <p:spPr>
           <a:xfrm>
-            <a:off x="6492240" y="1874519"/>
-            <a:ext cx="4846320" cy="457200"/>
+            <a:off x="8339327" y="2240280"/>
+            <a:ext cx="3474720" cy="237744"/>
           </a:xfrm>
           <a:prstGeom prst="rect">
             <a:avLst/>
@@ -5482,13 +5483,13 @@
           <a:p>
             <a:pPr algn="l"/>
             <a:r>
-              <a:rPr sz="1400" b="1" i="0">
-                <a:solidFill>
-                  <a:srgbClr val="0E7C7B"/>
-                </a:solidFill>
-                <a:latin typeface="Avenir Next"/>
-              </a:rPr>
-              <a:t>THE ANCHOR</a:t>
+              <a:rPr sz="1000" b="0" i="0">
+                <a:solidFill>
+                  <a:srgbClr val="1B2A41"/>
+                </a:solidFill>
+                <a:latin typeface="Menlo"/>
+              </a:rPr>
+              <a:t>key_id  : ikm-2025-Q2-07</a:t>
             </a:r>
           </a:p>
         </p:txBody>
@@ -5501,8 +5502,8 @@
         </p:nvSpPr>
         <p:spPr>
           <a:xfrm>
-            <a:off x="6492240" y="2377440"/>
-            <a:ext cx="4846320" cy="2194560"/>
+            <a:off x="8339327" y="2478024"/>
+            <a:ext cx="3474720" cy="237744"/>
           </a:xfrm>
           <a:prstGeom prst="rect">
             <a:avLst/>
@@ -5517,90 +5518,126 @@
           <a:p>
             <a:pPr algn="l"/>
             <a:r>
-              <a:rPr sz="1300" b="0" i="0">
-                <a:solidFill>
-                  <a:srgbClr val="1B2A41"/>
-                </a:solidFill>
-                <a:latin typeface="Avenir Next"/>
-              </a:rPr>
-              <a:t>Each day's entries were rolled into a</a:t>
-            </a:r>
-          </a:p>
-          <a:p>
-            <a:pPr algn="l"/>
-            <a:r>
-              <a:rPr sz="1300" b="0" i="0">
-                <a:solidFill>
-                  <a:srgbClr val="1B2A41"/>
-                </a:solidFill>
-                <a:latin typeface="Avenir Next"/>
-              </a:rPr>
-              <a:t>Merkle root, signed by the HSM, and</a:t>
-            </a:r>
-          </a:p>
-          <a:p>
-            <a:pPr algn="l"/>
-            <a:r>
-              <a:rPr sz="1300" b="0" i="0">
-                <a:solidFill>
-                  <a:srgbClr val="1B2A41"/>
-                </a:solidFill>
-                <a:latin typeface="Avenir Next"/>
-              </a:rPr>
-              <a:t>PUBLISHED that day — outside the</a:t>
-            </a:r>
-          </a:p>
-          <a:p>
-            <a:pPr algn="l"/>
-            <a:r>
-              <a:rPr sz="1300" b="0" i="0">
-                <a:solidFill>
-                  <a:srgbClr val="1B2A41"/>
-                </a:solidFill>
-                <a:latin typeface="Avenir Next"/>
-              </a:rPr>
-              <a:t>institution's reach.</a:t>
-            </a:r>
-          </a:p>
-          <a:p>
-            <a:pPr algn="l"/>
-          </a:p>
-          <a:p>
-            <a:pPr algn="l"/>
-            <a:r>
-              <a:rPr sz="1300" b="0" i="0">
-                <a:solidFill>
-                  <a:srgbClr val="1B2A41"/>
-                </a:solidFill>
-                <a:latin typeface="Avenir Next"/>
-              </a:rPr>
-              <a:t>History is pinned where the bank's own</a:t>
-            </a:r>
-          </a:p>
-          <a:p>
-            <a:pPr algn="l"/>
-            <a:r>
-              <a:rPr sz="1300" b="0" i="0">
-                <a:solidFill>
-                  <a:srgbClr val="1B2A41"/>
-                </a:solidFill>
-                <a:latin typeface="Avenir Next"/>
-              </a:rPr>
-              <a:t>accounts cannot follow.</a:t>
-            </a:r>
-          </a:p>
-        </p:txBody>
-      </p:sp>
-      <p:sp>
-        <p:nvSpPr>
-          <p:cNvPr id="10" name="TextBox 9"/>
+              <a:rPr sz="1000" b="0" i="0">
+                <a:solidFill>
+                  <a:srgbClr val="1B2A41"/>
+                </a:solidFill>
+                <a:latin typeface="Menlo"/>
+              </a:rPr>
+              <a:t>mac     : b44a…91c7</a:t>
+            </a:r>
+          </a:p>
+        </p:txBody>
+      </p:sp>
+      <p:sp>
+        <p:nvSpPr>
+          <p:cNvPr id="10" name="Rounded Rectangle 9"/>
+          <p:cNvSpPr/>
+          <p:nvPr/>
+        </p:nvSpPr>
+        <p:spPr>
+          <a:xfrm>
+            <a:off x="4343400" y="2468880"/>
+            <a:ext cx="3657600" cy="1335024"/>
+          </a:xfrm>
+          <a:prstGeom prst="roundRect">
+            <a:avLst/>
+          </a:prstGeom>
+          <a:solidFill>
+            <a:srgbClr val="FAF7F0"/>
+          </a:solidFill>
+          <a:ln w="15875">
+            <a:solidFill>
+              <a:srgbClr val="1B2A41"/>
+            </a:solidFill>
+          </a:ln>
+        </p:spPr>
+        <p:style>
+          <a:lnRef idx="1">
+            <a:schemeClr val="accent1"/>
+          </a:lnRef>
+          <a:fillRef idx="3">
+            <a:schemeClr val="accent1"/>
+          </a:fillRef>
+          <a:effectRef idx="2">
+            <a:schemeClr val="accent1"/>
+          </a:effectRef>
+          <a:fontRef idx="minor">
+            <a:schemeClr val="lt1"/>
+          </a:fontRef>
+        </p:style>
+        <p:txBody>
+          <a:bodyPr rtlCol="0" anchor="ctr" wrap="square"/>
+          <a:lstStyle/>
+          <a:p>
+            <a:pPr algn="ctr"/>
+          </a:p>
+        </p:txBody>
+      </p:sp>
+      <p:sp>
+        <p:nvSpPr>
+          <p:cNvPr id="11" name="Rounded Rectangle 10"/>
+          <p:cNvSpPr/>
+          <p:nvPr/>
+        </p:nvSpPr>
+        <p:spPr>
+          <a:xfrm>
+            <a:off x="4343400" y="2468880"/>
+            <a:ext cx="3657600" cy="310896"/>
+          </a:xfrm>
+          <a:prstGeom prst="roundRect">
+            <a:avLst/>
+          </a:prstGeom>
+          <a:solidFill>
+            <a:srgbClr val="1B2A41"/>
+          </a:solidFill>
+          <a:ln w="15875">
+            <a:solidFill>
+              <a:srgbClr val="1B2A41"/>
+            </a:solidFill>
+          </a:ln>
+        </p:spPr>
+        <p:style>
+          <a:lnRef idx="1">
+            <a:schemeClr val="accent1"/>
+          </a:lnRef>
+          <a:fillRef idx="3">
+            <a:schemeClr val="accent1"/>
+          </a:fillRef>
+          <a:effectRef idx="2">
+            <a:schemeClr val="accent1"/>
+          </a:effectRef>
+          <a:fontRef idx="minor">
+            <a:schemeClr val="lt1"/>
+          </a:fontRef>
+        </p:style>
+        <p:txBody>
+          <a:bodyPr rtlCol="0" anchor="ctr" wrap="square"/>
+          <a:lstStyle/>
+          <a:p>
+            <a:pPr algn="ctr"/>
+            <a:r>
+              <a:rPr sz="1150" b="1">
+                <a:solidFill>
+                  <a:srgbClr val="FAF7F0"/>
+                </a:solidFill>
+                <a:latin typeface="Menlo"/>
+              </a:rPr>
+              <a:t>E-2025-05-23-0411</a:t>
+            </a:r>
+          </a:p>
+        </p:txBody>
+      </p:sp>
+      <p:sp>
+        <p:nvSpPr>
+          <p:cNvPr id="12" name="TextBox 11"/>
           <p:cNvSpPr txBox="1"/>
           <p:nvPr/>
         </p:nvSpPr>
         <p:spPr>
           <a:xfrm>
-            <a:off x="731520" y="5120640"/>
-            <a:ext cx="10972800" cy="1097280"/>
+            <a:off x="4453128" y="2816352"/>
+            <a:ext cx="3474720" cy="237744"/>
           </a:xfrm>
           <a:prstGeom prst="rect">
             <a:avLst/>
@@ -5615,25 +5652,595 @@
           <a:p>
             <a:pPr algn="l"/>
             <a:r>
-              <a:rPr sz="1600" b="1" i="0">
-                <a:solidFill>
-                  <a:srgbClr val="1B2A41"/>
-                </a:solidFill>
-                <a:latin typeface="Avenir Next"/>
-              </a:rPr>
-              <a:t>So the walk has a second half: recompute each crossed day's root and compare it to the seal</a:t>
-            </a:r>
-          </a:p>
-          <a:p>
-            <a:pPr algn="l"/>
-            <a:r>
-              <a:rPr sz="1600" b="1" i="0">
-                <a:solidFill>
-                  <a:srgbClr val="1B2A41"/>
-                </a:solidFill>
-                <a:latin typeface="Avenir Next"/>
-              </a:rPr>
-              <a:t>that day published — a year before you started asking.</a:t>
+              <a:rPr sz="1000" b="0" i="0">
+                <a:solidFill>
+                  <a:srgbClr val="1B2A41"/>
+                </a:solidFill>
+                <a:latin typeface="Menlo"/>
+              </a:rPr>
+              <a:t>artifact: sha256:aa02…19bd</a:t>
+            </a:r>
+          </a:p>
+        </p:txBody>
+      </p:sp>
+      <p:sp>
+        <p:nvSpPr>
+          <p:cNvPr id="13" name="TextBox 12"/>
+          <p:cNvSpPr txBox="1"/>
+          <p:nvPr/>
+        </p:nvSpPr>
+        <p:spPr>
+          <a:xfrm>
+            <a:off x="4453128" y="3054096"/>
+            <a:ext cx="3474720" cy="237744"/>
+          </a:xfrm>
+          <a:prstGeom prst="rect">
+            <a:avLst/>
+          </a:prstGeom>
+          <a:noFill/>
+        </p:spPr>
+        <p:txBody>
+          <a:bodyPr wrap="square">
+            <a:spAutoFit/>
+          </a:bodyPr>
+          <a:lstStyle/>
+          <a:p>
+            <a:pPr algn="l"/>
+            <a:r>
+              <a:rPr sz="1000" b="0" i="0">
+                <a:solidFill>
+                  <a:srgbClr val="C99A2E"/>
+                </a:solidFill>
+                <a:latin typeface="Menlo"/>
+              </a:rPr>
+              <a:t>prev    : 27f0…6c11 ─────┐</a:t>
+            </a:r>
+          </a:p>
+        </p:txBody>
+      </p:sp>
+      <p:sp>
+        <p:nvSpPr>
+          <p:cNvPr id="14" name="TextBox 13"/>
+          <p:cNvSpPr txBox="1"/>
+          <p:nvPr/>
+        </p:nvSpPr>
+        <p:spPr>
+          <a:xfrm>
+            <a:off x="4453128" y="3291839"/>
+            <a:ext cx="3474720" cy="237744"/>
+          </a:xfrm>
+          <a:prstGeom prst="rect">
+            <a:avLst/>
+          </a:prstGeom>
+          <a:noFill/>
+        </p:spPr>
+        <p:txBody>
+          <a:bodyPr wrap="square">
+            <a:spAutoFit/>
+          </a:bodyPr>
+          <a:lstStyle/>
+          <a:p>
+            <a:pPr algn="l"/>
+            <a:r>
+              <a:rPr sz="1000" b="0" i="0">
+                <a:solidFill>
+                  <a:srgbClr val="1B2A41"/>
+                </a:solidFill>
+                <a:latin typeface="Menlo"/>
+              </a:rPr>
+              <a:t>key_id  : ikm-2025-Q2-07</a:t>
+            </a:r>
+          </a:p>
+        </p:txBody>
+      </p:sp>
+      <p:sp>
+        <p:nvSpPr>
+          <p:cNvPr id="15" name="TextBox 14"/>
+          <p:cNvSpPr txBox="1"/>
+          <p:nvPr/>
+        </p:nvSpPr>
+        <p:spPr>
+          <a:xfrm>
+            <a:off x="4453128" y="3529583"/>
+            <a:ext cx="3474720" cy="237744"/>
+          </a:xfrm>
+          <a:prstGeom prst="rect">
+            <a:avLst/>
+          </a:prstGeom>
+          <a:noFill/>
+        </p:spPr>
+        <p:txBody>
+          <a:bodyPr wrap="square">
+            <a:spAutoFit/>
+          </a:bodyPr>
+          <a:lstStyle/>
+          <a:p>
+            <a:pPr algn="l"/>
+            <a:r>
+              <a:rPr sz="1000" b="0" i="0">
+                <a:solidFill>
+                  <a:srgbClr val="C99A2E"/>
+                </a:solidFill>
+                <a:latin typeface="Menlo"/>
+              </a:rPr>
+              <a:t>mac     : 5d81…e903  ◄───┘ matches</a:t>
+            </a:r>
+          </a:p>
+        </p:txBody>
+      </p:sp>
+      <p:sp>
+        <p:nvSpPr>
+          <p:cNvPr id="16" name="Rounded Rectangle 15"/>
+          <p:cNvSpPr/>
+          <p:nvPr/>
+        </p:nvSpPr>
+        <p:spPr>
+          <a:xfrm>
+            <a:off x="457200" y="3520440"/>
+            <a:ext cx="3657600" cy="1335024"/>
+          </a:xfrm>
+          <a:prstGeom prst="roundRect">
+            <a:avLst/>
+          </a:prstGeom>
+          <a:solidFill>
+            <a:srgbClr val="FAF7F0"/>
+          </a:solidFill>
+          <a:ln w="15875">
+            <a:solidFill>
+              <a:srgbClr val="1B2A41"/>
+            </a:solidFill>
+          </a:ln>
+        </p:spPr>
+        <p:style>
+          <a:lnRef idx="1">
+            <a:schemeClr val="accent1"/>
+          </a:lnRef>
+          <a:fillRef idx="3">
+            <a:schemeClr val="accent1"/>
+          </a:fillRef>
+          <a:effectRef idx="2">
+            <a:schemeClr val="accent1"/>
+          </a:effectRef>
+          <a:fontRef idx="minor">
+            <a:schemeClr val="lt1"/>
+          </a:fontRef>
+        </p:style>
+        <p:txBody>
+          <a:bodyPr rtlCol="0" anchor="ctr" wrap="square"/>
+          <a:lstStyle/>
+          <a:p>
+            <a:pPr algn="ctr"/>
+          </a:p>
+        </p:txBody>
+      </p:sp>
+      <p:sp>
+        <p:nvSpPr>
+          <p:cNvPr id="17" name="Rounded Rectangle 16"/>
+          <p:cNvSpPr/>
+          <p:nvPr/>
+        </p:nvSpPr>
+        <p:spPr>
+          <a:xfrm>
+            <a:off x="457200" y="3520440"/>
+            <a:ext cx="3657600" cy="310896"/>
+          </a:xfrm>
+          <a:prstGeom prst="roundRect">
+            <a:avLst/>
+          </a:prstGeom>
+          <a:solidFill>
+            <a:srgbClr val="1B2A41"/>
+          </a:solidFill>
+          <a:ln w="15875">
+            <a:solidFill>
+              <a:srgbClr val="1B2A41"/>
+            </a:solidFill>
+          </a:ln>
+        </p:spPr>
+        <p:style>
+          <a:lnRef idx="1">
+            <a:schemeClr val="accent1"/>
+          </a:lnRef>
+          <a:fillRef idx="3">
+            <a:schemeClr val="accent1"/>
+          </a:fillRef>
+          <a:effectRef idx="2">
+            <a:schemeClr val="accent1"/>
+          </a:effectRef>
+          <a:fontRef idx="minor">
+            <a:schemeClr val="lt1"/>
+          </a:fontRef>
+        </p:style>
+        <p:txBody>
+          <a:bodyPr rtlCol="0" anchor="ctr" wrap="square"/>
+          <a:lstStyle/>
+          <a:p>
+            <a:pPr algn="ctr"/>
+            <a:r>
+              <a:rPr sz="1150" b="1">
+                <a:solidFill>
+                  <a:srgbClr val="FAF7F0"/>
+                </a:solidFill>
+                <a:latin typeface="Menlo"/>
+              </a:rPr>
+              <a:t>E-2025-05-23-0410</a:t>
+            </a:r>
+          </a:p>
+        </p:txBody>
+      </p:sp>
+      <p:sp>
+        <p:nvSpPr>
+          <p:cNvPr id="18" name="TextBox 17"/>
+          <p:cNvSpPr txBox="1"/>
+          <p:nvPr/>
+        </p:nvSpPr>
+        <p:spPr>
+          <a:xfrm>
+            <a:off x="566928" y="3867912"/>
+            <a:ext cx="3474720" cy="237744"/>
+          </a:xfrm>
+          <a:prstGeom prst="rect">
+            <a:avLst/>
+          </a:prstGeom>
+          <a:noFill/>
+        </p:spPr>
+        <p:txBody>
+          <a:bodyPr wrap="square">
+            <a:spAutoFit/>
+          </a:bodyPr>
+          <a:lstStyle/>
+          <a:p>
+            <a:pPr algn="l"/>
+            <a:r>
+              <a:rPr sz="1000" b="0" i="0">
+                <a:solidFill>
+                  <a:srgbClr val="1B2A41"/>
+                </a:solidFill>
+                <a:latin typeface="Menlo"/>
+              </a:rPr>
+              <a:t>artifact: sha256:90cd…77e8</a:t>
+            </a:r>
+          </a:p>
+        </p:txBody>
+      </p:sp>
+      <p:sp>
+        <p:nvSpPr>
+          <p:cNvPr id="19" name="TextBox 18"/>
+          <p:cNvSpPr txBox="1"/>
+          <p:nvPr/>
+        </p:nvSpPr>
+        <p:spPr>
+          <a:xfrm>
+            <a:off x="566928" y="4105656"/>
+            <a:ext cx="3474720" cy="237744"/>
+          </a:xfrm>
+          <a:prstGeom prst="rect">
+            <a:avLst/>
+          </a:prstGeom>
+          <a:noFill/>
+        </p:spPr>
+        <p:txBody>
+          <a:bodyPr wrap="square">
+            <a:spAutoFit/>
+          </a:bodyPr>
+          <a:lstStyle/>
+          <a:p>
+            <a:pPr algn="l"/>
+            <a:r>
+              <a:rPr sz="1000" b="0" i="0">
+                <a:solidFill>
+                  <a:srgbClr val="1B2A41"/>
+                </a:solidFill>
+                <a:latin typeface="Menlo"/>
+              </a:rPr>
+              <a:t>prev    : c1a9…04f2  (→ 0409 …)</a:t>
+            </a:r>
+          </a:p>
+        </p:txBody>
+      </p:sp>
+      <p:sp>
+        <p:nvSpPr>
+          <p:cNvPr id="20" name="TextBox 19"/>
+          <p:cNvSpPr txBox="1"/>
+          <p:nvPr/>
+        </p:nvSpPr>
+        <p:spPr>
+          <a:xfrm>
+            <a:off x="566928" y="4343400"/>
+            <a:ext cx="3474720" cy="237744"/>
+          </a:xfrm>
+          <a:prstGeom prst="rect">
+            <a:avLst/>
+          </a:prstGeom>
+          <a:noFill/>
+        </p:spPr>
+        <p:txBody>
+          <a:bodyPr wrap="square">
+            <a:spAutoFit/>
+          </a:bodyPr>
+          <a:lstStyle/>
+          <a:p>
+            <a:pPr algn="l"/>
+            <a:r>
+              <a:rPr sz="1000" b="0" i="0">
+                <a:solidFill>
+                  <a:srgbClr val="1B2A41"/>
+                </a:solidFill>
+                <a:latin typeface="Menlo"/>
+              </a:rPr>
+              <a:t>key_id  : ikm-2025-Q2-07</a:t>
+            </a:r>
+          </a:p>
+        </p:txBody>
+      </p:sp>
+      <p:sp>
+        <p:nvSpPr>
+          <p:cNvPr id="21" name="TextBox 20"/>
+          <p:cNvSpPr txBox="1"/>
+          <p:nvPr/>
+        </p:nvSpPr>
+        <p:spPr>
+          <a:xfrm>
+            <a:off x="566928" y="4581144"/>
+            <a:ext cx="3474720" cy="237744"/>
+          </a:xfrm>
+          <a:prstGeom prst="rect">
+            <a:avLst/>
+          </a:prstGeom>
+          <a:noFill/>
+        </p:spPr>
+        <p:txBody>
+          <a:bodyPr wrap="square">
+            <a:spAutoFit/>
+          </a:bodyPr>
+          <a:lstStyle/>
+          <a:p>
+            <a:pPr algn="l"/>
+            <a:r>
+              <a:rPr sz="1000" b="0" i="0">
+                <a:solidFill>
+                  <a:srgbClr val="C99A2E"/>
+                </a:solidFill>
+                <a:latin typeface="Menlo"/>
+              </a:rPr>
+              <a:t>mac     : 27f0…6c11  ◄───┘ matches</a:t>
+            </a:r>
+          </a:p>
+        </p:txBody>
+      </p:sp>
+      <p:cxnSp>
+        <p:nvCxnSpPr>
+          <p:cNvPr id="22" name="Connector 21"/>
+          <p:cNvCxnSpPr/>
+          <p:nvPr/>
+        </p:nvCxnSpPr>
+        <p:spPr>
+          <a:xfrm flipH="1">
+            <a:off x="8001000" y="2148840"/>
+            <a:ext cx="228600" cy="868680"/>
+          </a:xfrm>
+          <a:prstGeom prst="line">
+            <a:avLst/>
+          </a:prstGeom>
+          <a:ln w="31750">
+            <a:solidFill>
+              <a:srgbClr val="C99A2E"/>
+            </a:solidFill>
+            <a:tailEnd type="arrow"/>
+          </a:ln>
+        </p:spPr>
+        <p:style>
+          <a:lnRef idx="2">
+            <a:schemeClr val="accent1"/>
+          </a:lnRef>
+          <a:fillRef idx="0">
+            <a:schemeClr val="accent1"/>
+          </a:fillRef>
+          <a:effectRef idx="1">
+            <a:schemeClr val="accent1"/>
+          </a:effectRef>
+          <a:fontRef idx="minor">
+            <a:schemeClr val="tx1"/>
+          </a:fontRef>
+        </p:style>
+      </p:cxnSp>
+      <p:cxnSp>
+        <p:nvCxnSpPr>
+          <p:cNvPr id="23" name="Connector 22"/>
+          <p:cNvCxnSpPr/>
+          <p:nvPr/>
+        </p:nvCxnSpPr>
+        <p:spPr>
+          <a:xfrm flipH="1">
+            <a:off x="4114800" y="3200400"/>
+            <a:ext cx="228600" cy="868680"/>
+          </a:xfrm>
+          <a:prstGeom prst="line">
+            <a:avLst/>
+          </a:prstGeom>
+          <a:ln w="31750">
+            <a:solidFill>
+              <a:srgbClr val="C99A2E"/>
+            </a:solidFill>
+            <a:tailEnd type="arrow"/>
+          </a:ln>
+        </p:spPr>
+        <p:style>
+          <a:lnRef idx="2">
+            <a:schemeClr val="accent1"/>
+          </a:lnRef>
+          <a:fillRef idx="0">
+            <a:schemeClr val="accent1"/>
+          </a:fillRef>
+          <a:effectRef idx="1">
+            <a:schemeClr val="accent1"/>
+          </a:effectRef>
+          <a:fontRef idx="minor">
+            <a:schemeClr val="tx1"/>
+          </a:fontRef>
+        </p:style>
+      </p:cxnSp>
+      <p:sp>
+        <p:nvSpPr>
+          <p:cNvPr id="24" name="TextBox 23"/>
+          <p:cNvSpPr txBox="1"/>
+          <p:nvPr/>
+        </p:nvSpPr>
+        <p:spPr>
+          <a:xfrm>
+            <a:off x="8366760" y="3566160"/>
+            <a:ext cx="3291840" cy="2377440"/>
+          </a:xfrm>
+          <a:prstGeom prst="rect">
+            <a:avLst/>
+          </a:prstGeom>
+          <a:noFill/>
+        </p:spPr>
+        <p:txBody>
+          <a:bodyPr wrap="square">
+            <a:spAutoFit/>
+          </a:bodyPr>
+          <a:lstStyle/>
+          <a:p>
+            <a:pPr algn="l"/>
+            <a:r>
+              <a:rPr sz="1300" b="0" i="0">
+                <a:solidFill>
+                  <a:srgbClr val="6B7480"/>
+                </a:solidFill>
+                <a:latin typeface="Avenir Next"/>
+              </a:rPr>
+              <a:t>At each hop:</a:t>
+            </a:r>
+          </a:p>
+          <a:p>
+            <a:pPr algn="l"/>
+            <a:r>
+              <a:rPr sz="1300" b="0" i="0">
+                <a:solidFill>
+                  <a:srgbClr val="6B7480"/>
+                </a:solidFill>
+                <a:latin typeface="Avenir Next"/>
+              </a:rPr>
+              <a:t>1. fetch the parent entry</a:t>
+            </a:r>
+          </a:p>
+          <a:p>
+            <a:pPr algn="l"/>
+            <a:r>
+              <a:rPr sz="1300" b="0" i="0">
+                <a:solidFill>
+                  <a:srgbClr val="6B7480"/>
+                </a:solidFill>
+                <a:latin typeface="Avenir Next"/>
+              </a:rPr>
+              <a:t>2. RECOMPUTE its mac from</a:t>
+            </a:r>
+          </a:p>
+          <a:p>
+            <a:pPr algn="l"/>
+            <a:r>
+              <a:rPr sz="1300" b="0" i="0">
+                <a:solidFill>
+                  <a:srgbClr val="6B7480"/>
+                </a:solidFill>
+                <a:latin typeface="Avenir Next"/>
+              </a:rPr>
+              <a:t>    its own fields + key</a:t>
+            </a:r>
+          </a:p>
+          <a:p>
+            <a:pPr algn="l"/>
+            <a:r>
+              <a:rPr sz="1300" b="0" i="0">
+                <a:solidFill>
+                  <a:srgbClr val="6B7480"/>
+                </a:solidFill>
+                <a:latin typeface="Avenir Next"/>
+              </a:rPr>
+              <a:t>3. compare to the child's</a:t>
+            </a:r>
+          </a:p>
+          <a:p>
+            <a:pPr algn="l"/>
+            <a:r>
+              <a:rPr sz="1300" b="0" i="0">
+                <a:solidFill>
+                  <a:srgbClr val="6B7480"/>
+                </a:solidFill>
+                <a:latin typeface="Avenir Next"/>
+              </a:rPr>
+              <a:t>    prev_entry_mac</a:t>
+            </a:r>
+          </a:p>
+          <a:p>
+            <a:pPr algn="l"/>
+            <a:r>
+              <a:rPr sz="1300" b="0" i="0">
+                <a:solidFill>
+                  <a:srgbClr val="6B7480"/>
+                </a:solidFill>
+                <a:latin typeface="Avenir Next"/>
+              </a:rPr>
+              <a:t>Mismatch = break at this</a:t>
+            </a:r>
+          </a:p>
+          <a:p>
+            <a:pPr algn="l"/>
+            <a:r>
+              <a:rPr sz="1300" b="0" i="0">
+                <a:solidFill>
+                  <a:srgbClr val="6B7480"/>
+                </a:solidFill>
+                <a:latin typeface="Avenir Next"/>
+              </a:rPr>
+              <a:t>exact hop. Match = proven</a:t>
+            </a:r>
+          </a:p>
+          <a:p>
+            <a:pPr algn="l"/>
+            <a:r>
+              <a:rPr sz="1300" b="0" i="0">
+                <a:solidFill>
+                  <a:srgbClr val="6B7480"/>
+                </a:solidFill>
+                <a:latin typeface="Avenir Next"/>
+              </a:rPr>
+              <a:t>link; keep walking.</a:t>
+            </a:r>
+          </a:p>
+        </p:txBody>
+      </p:sp>
+      <p:sp>
+        <p:nvSpPr>
+          <p:cNvPr id="25" name="TextBox 24"/>
+          <p:cNvSpPr txBox="1"/>
+          <p:nvPr/>
+        </p:nvSpPr>
+        <p:spPr>
+          <a:xfrm>
+            <a:off x="457200" y="5623560"/>
+            <a:ext cx="11247120" cy="640080"/>
+          </a:xfrm>
+          <a:prstGeom prst="rect">
+            <a:avLst/>
+          </a:prstGeom>
+          <a:noFill/>
+        </p:spPr>
+        <p:txBody>
+          <a:bodyPr wrap="square">
+            <a:spAutoFit/>
+          </a:bodyPr>
+          <a:lstStyle/>
+          <a:p>
+            <a:pPr algn="l"/>
+            <a:r>
+              <a:rPr sz="1500" b="0" i="1">
+                <a:solidFill>
+                  <a:srgbClr val="1B2A41"/>
+                </a:solidFill>
+                <a:latin typeface="Avenir Next"/>
+              </a:rPr>
+              <a:t>Walk ends at the genesis entry (prev = ∅). You have now re-derived the spine — proven, not just read.</a:t>
             </a:r>
           </a:p>
         </p:txBody>
@@ -5694,7 +6301,7 @@
                 </a:solidFill>
                 <a:latin typeface="Avenir Next"/>
               </a:rPr>
-              <a:t>Step 3 — recompute the day's Merkle root, compare to the published seal</a:t>
+              <a:t>Why the walk alone is not enough</a:t>
             </a:r>
           </a:p>
         </p:txBody>
@@ -5729,7 +6336,7 @@
                 </a:solidFill>
                 <a:latin typeface="Avenir Next"/>
               </a:rPr>
-              <a:t>May 23, 2025: 517 entries → one root → one signed seal</a:t>
+              <a:t>A fabricator can build a chain that is internally consistent</a:t>
             </a:r>
           </a:p>
         </p:txBody>
@@ -5742,8 +6349,8 @@
         </p:nvSpPr>
         <p:spPr>
           <a:xfrm>
-            <a:off x="548640" y="1600200"/>
-            <a:ext cx="3749039" cy="1335024"/>
+            <a:off x="731520" y="1737360"/>
+            <a:ext cx="5120640" cy="3017520"/>
           </a:xfrm>
           <a:prstGeom prst="roundRect">
             <a:avLst/>
@@ -5753,7 +6360,7 @@
           </a:solidFill>
           <a:ln w="15875">
             <a:solidFill>
-              <a:srgbClr val="1B2A41"/>
+              <a:srgbClr val="B32D2D"/>
             </a:solidFill>
           </a:ln>
         </p:spPr>
@@ -5781,24 +6388,157 @@
       </p:sp>
       <p:sp>
         <p:nvSpPr>
-          <p:cNvPr id="5" name="Rounded Rectangle 4"/>
+          <p:cNvPr id="5" name="TextBox 4"/>
+          <p:cNvSpPr txBox="1"/>
+          <p:nvPr/>
+        </p:nvSpPr>
+        <p:spPr>
+          <a:xfrm>
+            <a:off x="914400" y="1874519"/>
+            <a:ext cx="4754880" cy="457200"/>
+          </a:xfrm>
+          <a:prstGeom prst="rect">
+            <a:avLst/>
+          </a:prstGeom>
+          <a:noFill/>
+        </p:spPr>
+        <p:txBody>
+          <a:bodyPr wrap="square">
+            <a:spAutoFit/>
+          </a:bodyPr>
+          <a:lstStyle/>
+          <a:p>
+            <a:pPr algn="l"/>
+            <a:r>
+              <a:rPr sz="1400" b="1" i="0">
+                <a:solidFill>
+                  <a:srgbClr val="B32D2D"/>
+                </a:solidFill>
+                <a:latin typeface="Avenir Next"/>
+              </a:rPr>
+              <a:t>THE FORGERY PROBLEM</a:t>
+            </a:r>
+          </a:p>
+        </p:txBody>
+      </p:sp>
+      <p:sp>
+        <p:nvSpPr>
+          <p:cNvPr id="6" name="TextBox 5"/>
+          <p:cNvSpPr txBox="1"/>
+          <p:nvPr/>
+        </p:nvSpPr>
+        <p:spPr>
+          <a:xfrm>
+            <a:off x="914400" y="2377440"/>
+            <a:ext cx="4754880" cy="2194560"/>
+          </a:xfrm>
+          <a:prstGeom prst="rect">
+            <a:avLst/>
+          </a:prstGeom>
+          <a:noFill/>
+        </p:spPr>
+        <p:txBody>
+          <a:bodyPr wrap="square">
+            <a:spAutoFit/>
+          </a:bodyPr>
+          <a:lstStyle/>
+          <a:p>
+            <a:pPr algn="l"/>
+            <a:r>
+              <a:rPr sz="1300" b="0" i="0">
+                <a:solidFill>
+                  <a:srgbClr val="1B2A41"/>
+                </a:solidFill>
+                <a:latin typeface="Avenir Next"/>
+              </a:rPr>
+              <a:t>Rebuild every entry from the point of a</a:t>
+            </a:r>
+          </a:p>
+          <a:p>
+            <a:pPr algn="l"/>
+            <a:r>
+              <a:rPr sz="1300" b="0" i="0">
+                <a:solidFill>
+                  <a:srgbClr val="1B2A41"/>
+                </a:solidFill>
+                <a:latin typeface="Avenir Next"/>
+              </a:rPr>
+              <a:t>change forward, re-MAC the tail, and the</a:t>
+            </a:r>
+          </a:p>
+          <a:p>
+            <a:pPr algn="l"/>
+            <a:r>
+              <a:rPr sz="1300" b="0" i="0">
+                <a:solidFill>
+                  <a:srgbClr val="1B2A41"/>
+                </a:solidFill>
+                <a:latin typeface="Avenir Next"/>
+              </a:rPr>
+              <a:t>links all match again.</a:t>
+            </a:r>
+          </a:p>
+          <a:p>
+            <a:pPr algn="l"/>
+          </a:p>
+          <a:p>
+            <a:pPr algn="l"/>
+            <a:r>
+              <a:rPr sz="1300" b="0" i="0">
+                <a:solidFill>
+                  <a:srgbClr val="1B2A41"/>
+                </a:solidFill>
+                <a:latin typeface="Avenir Next"/>
+              </a:rPr>
+              <a:t>Internal consistency proves sequence —</a:t>
+            </a:r>
+          </a:p>
+          <a:p>
+            <a:pPr algn="l"/>
+            <a:r>
+              <a:rPr sz="1300" b="0" i="0">
+                <a:solidFill>
+                  <a:srgbClr val="1B2A41"/>
+                </a:solidFill>
+                <a:latin typeface="Avenir Next"/>
+              </a:rPr>
+              <a:t>it does not prove the sequence existed</a:t>
+            </a:r>
+          </a:p>
+          <a:p>
+            <a:pPr algn="l"/>
+            <a:r>
+              <a:rPr sz="1300" b="0" i="0">
+                <a:solidFill>
+                  <a:srgbClr val="1B2A41"/>
+                </a:solidFill>
+                <a:latin typeface="Avenir Next"/>
+              </a:rPr>
+              <a:t>BEFORE today.</a:t>
+            </a:r>
+          </a:p>
+        </p:txBody>
+      </p:sp>
+      <p:sp>
+        <p:nvSpPr>
+          <p:cNvPr id="7" name="Rounded Rectangle 6"/>
           <p:cNvSpPr/>
           <p:nvPr/>
         </p:nvSpPr>
         <p:spPr>
           <a:xfrm>
-            <a:off x="548640" y="1600200"/>
-            <a:ext cx="3749039" cy="310896"/>
+            <a:off x="6309360" y="1737360"/>
+            <a:ext cx="5212080" cy="3017520"/>
           </a:xfrm>
           <a:prstGeom prst="roundRect">
             <a:avLst/>
           </a:prstGeom>
           <a:solidFill>
-            <a:srgbClr val="1B2A41"/>
+            <a:srgbClr val="E7EEF2"/>
           </a:solidFill>
           <a:ln w="15875">
             <a:solidFill>
-              <a:srgbClr val="1B2A41"/>
+              <a:srgbClr val="0E7C7B"/>
             </a:solidFill>
           </a:ln>
         </p:spPr>
@@ -5821,28 +6561,19 @@
           <a:lstStyle/>
           <a:p>
             <a:pPr algn="ctr"/>
-            <a:r>
-              <a:rPr sz="1150" b="1">
-                <a:solidFill>
-                  <a:srgbClr val="FAF7F0"/>
-                </a:solidFill>
-                <a:latin typeface="Menlo"/>
-              </a:rPr>
-              <a:t>RECOMPUTED  (today, your tooling)</a:t>
-            </a:r>
-          </a:p>
-        </p:txBody>
-      </p:sp>
-      <p:sp>
-        <p:nvSpPr>
-          <p:cNvPr id="6" name="TextBox 5"/>
+          </a:p>
+        </p:txBody>
+      </p:sp>
+      <p:sp>
+        <p:nvSpPr>
+          <p:cNvPr id="8" name="TextBox 7"/>
           <p:cNvSpPr txBox="1"/>
           <p:nvPr/>
         </p:nvSpPr>
         <p:spPr>
           <a:xfrm>
-            <a:off x="658368" y="1947672"/>
-            <a:ext cx="3566159" cy="237744"/>
+            <a:off x="6492240" y="1874519"/>
+            <a:ext cx="4846320" cy="457200"/>
           </a:xfrm>
           <a:prstGeom prst="rect">
             <a:avLst/>
@@ -5857,27 +6588,27 @@
           <a:p>
             <a:pPr algn="l"/>
             <a:r>
-              <a:rPr sz="1050" b="0" i="0">
-                <a:solidFill>
-                  <a:srgbClr val="1B2A41"/>
-                </a:solidFill>
-                <a:latin typeface="Menlo"/>
-              </a:rPr>
-              <a:t>day       : 2025-05-23</a:t>
-            </a:r>
-          </a:p>
-        </p:txBody>
-      </p:sp>
-      <p:sp>
-        <p:nvSpPr>
-          <p:cNvPr id="7" name="TextBox 6"/>
+              <a:rPr sz="1400" b="1" i="0">
+                <a:solidFill>
+                  <a:srgbClr val="0E7C7B"/>
+                </a:solidFill>
+                <a:latin typeface="Avenir Next"/>
+              </a:rPr>
+              <a:t>THE ANCHOR</a:t>
+            </a:r>
+          </a:p>
+        </p:txBody>
+      </p:sp>
+      <p:sp>
+        <p:nvSpPr>
+          <p:cNvPr id="9" name="TextBox 8"/>
           <p:cNvSpPr txBox="1"/>
           <p:nvPr/>
         </p:nvSpPr>
         <p:spPr>
           <a:xfrm>
-            <a:off x="658368" y="2185415"/>
-            <a:ext cx="3566159" cy="237744"/>
+            <a:off x="6492240" y="2377440"/>
+            <a:ext cx="4846320" cy="2194560"/>
           </a:xfrm>
           <a:prstGeom prst="rect">
             <a:avLst/>
@@ -5892,27 +6623,90 @@
           <a:p>
             <a:pPr algn="l"/>
             <a:r>
-              <a:rPr sz="1050" b="0" i="0">
-                <a:solidFill>
-                  <a:srgbClr val="1B2A41"/>
-                </a:solidFill>
-                <a:latin typeface="Menlo"/>
-              </a:rPr>
-              <a:t>entries   : E-…-0001 … E-…-0517</a:t>
-            </a:r>
-          </a:p>
-        </p:txBody>
-      </p:sp>
-      <p:sp>
-        <p:nvSpPr>
-          <p:cNvPr id="8" name="TextBox 7"/>
+              <a:rPr sz="1300" b="0" i="0">
+                <a:solidFill>
+                  <a:srgbClr val="1B2A41"/>
+                </a:solidFill>
+                <a:latin typeface="Avenir Next"/>
+              </a:rPr>
+              <a:t>Each day's entries were rolled into a</a:t>
+            </a:r>
+          </a:p>
+          <a:p>
+            <a:pPr algn="l"/>
+            <a:r>
+              <a:rPr sz="1300" b="0" i="0">
+                <a:solidFill>
+                  <a:srgbClr val="1B2A41"/>
+                </a:solidFill>
+                <a:latin typeface="Avenir Next"/>
+              </a:rPr>
+              <a:t>Merkle root, signed by the HSM, and</a:t>
+            </a:r>
+          </a:p>
+          <a:p>
+            <a:pPr algn="l"/>
+            <a:r>
+              <a:rPr sz="1300" b="0" i="0">
+                <a:solidFill>
+                  <a:srgbClr val="1B2A41"/>
+                </a:solidFill>
+                <a:latin typeface="Avenir Next"/>
+              </a:rPr>
+              <a:t>PUBLISHED that day — outside the</a:t>
+            </a:r>
+          </a:p>
+          <a:p>
+            <a:pPr algn="l"/>
+            <a:r>
+              <a:rPr sz="1300" b="0" i="0">
+                <a:solidFill>
+                  <a:srgbClr val="1B2A41"/>
+                </a:solidFill>
+                <a:latin typeface="Avenir Next"/>
+              </a:rPr>
+              <a:t>institution's reach.</a:t>
+            </a:r>
+          </a:p>
+          <a:p>
+            <a:pPr algn="l"/>
+          </a:p>
+          <a:p>
+            <a:pPr algn="l"/>
+            <a:r>
+              <a:rPr sz="1300" b="0" i="0">
+                <a:solidFill>
+                  <a:srgbClr val="1B2A41"/>
+                </a:solidFill>
+                <a:latin typeface="Avenir Next"/>
+              </a:rPr>
+              <a:t>History is pinned where the bank's own</a:t>
+            </a:r>
+          </a:p>
+          <a:p>
+            <a:pPr algn="l"/>
+            <a:r>
+              <a:rPr sz="1300" b="0" i="0">
+                <a:solidFill>
+                  <a:srgbClr val="1B2A41"/>
+                </a:solidFill>
+                <a:latin typeface="Avenir Next"/>
+              </a:rPr>
+              <a:t>accounts cannot follow.</a:t>
+            </a:r>
+          </a:p>
+        </p:txBody>
+      </p:sp>
+      <p:sp>
+        <p:nvSpPr>
+          <p:cNvPr id="10" name="TextBox 9"/>
           <p:cNvSpPr txBox="1"/>
           <p:nvPr/>
         </p:nvSpPr>
         <p:spPr>
           <a:xfrm>
-            <a:off x="658368" y="2423159"/>
-            <a:ext cx="3566159" cy="237744"/>
+            <a:off x="731520" y="5120640"/>
+            <a:ext cx="10972800" cy="1097280"/>
           </a:xfrm>
           <a:prstGeom prst="rect">
             <a:avLst/>
@@ -5927,669 +6721,25 @@
           <a:p>
             <a:pPr algn="l"/>
             <a:r>
-              <a:rPr sz="1050" b="0" i="0">
-                <a:solidFill>
-                  <a:srgbClr val="1B2A41"/>
-                </a:solidFill>
-                <a:latin typeface="Menlo"/>
-              </a:rPr>
-              <a:t>leaf i    : mac of entry i</a:t>
-            </a:r>
-          </a:p>
-        </p:txBody>
-      </p:sp>
-      <p:sp>
-        <p:nvSpPr>
-          <p:cNvPr id="9" name="TextBox 8"/>
-          <p:cNvSpPr txBox="1"/>
-          <p:nvPr/>
-        </p:nvSpPr>
-        <p:spPr>
-          <a:xfrm>
-            <a:off x="658368" y="2660903"/>
-            <a:ext cx="3566159" cy="237744"/>
-          </a:xfrm>
-          <a:prstGeom prst="rect">
-            <a:avLst/>
-          </a:prstGeom>
-          <a:noFill/>
-        </p:spPr>
-        <p:txBody>
-          <a:bodyPr wrap="square">
-            <a:spAutoFit/>
-          </a:bodyPr>
-          <a:lstStyle/>
-          <a:p>
-            <a:pPr algn="l"/>
-            <a:r>
-              <a:rPr sz="1050" b="0" i="0">
-                <a:solidFill>
-                  <a:srgbClr val="0E7C7B"/>
-                </a:solidFill>
-                <a:latin typeface="Menlo"/>
-              </a:rPr>
-              <a:t>root'     : 6a3f…d208</a:t>
-            </a:r>
-          </a:p>
-        </p:txBody>
-      </p:sp>
-      <p:sp>
-        <p:nvSpPr>
-          <p:cNvPr id="10" name="Rounded Rectangle 9"/>
-          <p:cNvSpPr/>
-          <p:nvPr/>
-        </p:nvSpPr>
-        <p:spPr>
-          <a:xfrm>
-            <a:off x="4663440" y="1600200"/>
-            <a:ext cx="3749039" cy="1572768"/>
-          </a:xfrm>
-          <a:prstGeom prst="roundRect">
-            <a:avLst/>
-          </a:prstGeom>
-          <a:solidFill>
-            <a:srgbClr val="FAF7F0"/>
-          </a:solidFill>
-          <a:ln w="15875">
-            <a:solidFill>
-              <a:srgbClr val="1B2A41"/>
-            </a:solidFill>
-          </a:ln>
-        </p:spPr>
-        <p:style>
-          <a:lnRef idx="1">
-            <a:schemeClr val="accent1"/>
-          </a:lnRef>
-          <a:fillRef idx="3">
-            <a:schemeClr val="accent1"/>
-          </a:fillRef>
-          <a:effectRef idx="2">
-            <a:schemeClr val="accent1"/>
-          </a:effectRef>
-          <a:fontRef idx="minor">
-            <a:schemeClr val="lt1"/>
-          </a:fontRef>
-        </p:style>
-        <p:txBody>
-          <a:bodyPr rtlCol="0" anchor="ctr" wrap="square"/>
-          <a:lstStyle/>
-          <a:p>
-            <a:pPr algn="ctr"/>
-          </a:p>
-        </p:txBody>
-      </p:sp>
-      <p:sp>
-        <p:nvSpPr>
-          <p:cNvPr id="11" name="Rounded Rectangle 10"/>
-          <p:cNvSpPr/>
-          <p:nvPr/>
-        </p:nvSpPr>
-        <p:spPr>
-          <a:xfrm>
-            <a:off x="4663440" y="1600200"/>
-            <a:ext cx="3749039" cy="310896"/>
-          </a:xfrm>
-          <a:prstGeom prst="roundRect">
-            <a:avLst/>
-          </a:prstGeom>
-          <a:solidFill>
-            <a:srgbClr val="1B2A41"/>
-          </a:solidFill>
-          <a:ln w="15875">
-            <a:solidFill>
-              <a:srgbClr val="1B2A41"/>
-            </a:solidFill>
-          </a:ln>
-        </p:spPr>
-        <p:style>
-          <a:lnRef idx="1">
-            <a:schemeClr val="accent1"/>
-          </a:lnRef>
-          <a:fillRef idx="3">
-            <a:schemeClr val="accent1"/>
-          </a:fillRef>
-          <a:effectRef idx="2">
-            <a:schemeClr val="accent1"/>
-          </a:effectRef>
-          <a:fontRef idx="minor">
-            <a:schemeClr val="lt1"/>
-          </a:fontRef>
-        </p:style>
-        <p:txBody>
-          <a:bodyPr rtlCol="0" anchor="ctr" wrap="square"/>
-          <a:lstStyle/>
-          <a:p>
-            <a:pPr algn="ctr"/>
-            <a:r>
-              <a:rPr sz="1150" b="1">
-                <a:solidFill>
-                  <a:srgbClr val="FAF7F0"/>
-                </a:solidFill>
-                <a:latin typeface="Menlo"/>
-              </a:rPr>
-              <a:t>PUBLISHED SEAL  (May 23, 2025)</a:t>
-            </a:r>
-          </a:p>
-        </p:txBody>
-      </p:sp>
-      <p:sp>
-        <p:nvSpPr>
-          <p:cNvPr id="12" name="TextBox 11"/>
-          <p:cNvSpPr txBox="1"/>
-          <p:nvPr/>
-        </p:nvSpPr>
-        <p:spPr>
-          <a:xfrm>
-            <a:off x="4773168" y="1947672"/>
-            <a:ext cx="3566159" cy="237744"/>
-          </a:xfrm>
-          <a:prstGeom prst="rect">
-            <a:avLst/>
-          </a:prstGeom>
-          <a:noFill/>
-        </p:spPr>
-        <p:txBody>
-          <a:bodyPr wrap="square">
-            <a:spAutoFit/>
-          </a:bodyPr>
-          <a:lstStyle/>
-          <a:p>
-            <a:pPr algn="l"/>
-            <a:r>
-              <a:rPr sz="1050" b="0" i="0">
-                <a:solidFill>
-                  <a:srgbClr val="1B2A41"/>
-                </a:solidFill>
-                <a:latin typeface="Menlo"/>
-              </a:rPr>
-              <a:t>seal_id   : S-2025-05-23</a:t>
-            </a:r>
-          </a:p>
-        </p:txBody>
-      </p:sp>
-      <p:sp>
-        <p:nvSpPr>
-          <p:cNvPr id="13" name="TextBox 12"/>
-          <p:cNvSpPr txBox="1"/>
-          <p:nvPr/>
-        </p:nvSpPr>
-        <p:spPr>
-          <a:xfrm>
-            <a:off x="4773168" y="2185415"/>
-            <a:ext cx="3566159" cy="237744"/>
-          </a:xfrm>
-          <a:prstGeom prst="rect">
-            <a:avLst/>
-          </a:prstGeom>
-          <a:noFill/>
-        </p:spPr>
-        <p:txBody>
-          <a:bodyPr wrap="square">
-            <a:spAutoFit/>
-          </a:bodyPr>
-          <a:lstStyle/>
-          <a:p>
-            <a:pPr algn="l"/>
-            <a:r>
-              <a:rPr sz="1050" b="0" i="0">
-                <a:solidFill>
-                  <a:srgbClr val="0E7C7B"/>
-                </a:solidFill>
-                <a:latin typeface="Menlo"/>
-              </a:rPr>
-              <a:t>root      : 6a3f…d208   ◄ equal</a:t>
-            </a:r>
-          </a:p>
-        </p:txBody>
-      </p:sp>
-      <p:sp>
-        <p:nvSpPr>
-          <p:cNvPr id="14" name="TextBox 13"/>
-          <p:cNvSpPr txBox="1"/>
-          <p:nvPr/>
-        </p:nvSpPr>
-        <p:spPr>
-          <a:xfrm>
-            <a:off x="4773168" y="2423159"/>
-            <a:ext cx="3566159" cy="237744"/>
-          </a:xfrm>
-          <a:prstGeom prst="rect">
-            <a:avLst/>
-          </a:prstGeom>
-          <a:noFill/>
-        </p:spPr>
-        <p:txBody>
-          <a:bodyPr wrap="square">
-            <a:spAutoFit/>
-          </a:bodyPr>
-          <a:lstStyle/>
-          <a:p>
-            <a:pPr algn="l"/>
-            <a:r>
-              <a:rPr sz="1050" b="0" i="0">
-                <a:solidFill>
-                  <a:srgbClr val="1B2A41"/>
-                </a:solidFill>
-                <a:latin typeface="Menlo"/>
-              </a:rPr>
-              <a:t>signed_by : hsm-seal-01</a:t>
-            </a:r>
-          </a:p>
-        </p:txBody>
-      </p:sp>
-      <p:sp>
-        <p:nvSpPr>
-          <p:cNvPr id="15" name="TextBox 14"/>
-          <p:cNvSpPr txBox="1"/>
-          <p:nvPr/>
-        </p:nvSpPr>
-        <p:spPr>
-          <a:xfrm>
-            <a:off x="4773168" y="2660903"/>
-            <a:ext cx="3566159" cy="237744"/>
-          </a:xfrm>
-          <a:prstGeom prst="rect">
-            <a:avLst/>
-          </a:prstGeom>
-          <a:noFill/>
-        </p:spPr>
-        <p:txBody>
-          <a:bodyPr wrap="square">
-            <a:spAutoFit/>
-          </a:bodyPr>
-          <a:lstStyle/>
-          <a:p>
-            <a:pPr algn="l"/>
-            <a:r>
-              <a:rPr sz="1050" b="0" i="0">
-                <a:solidFill>
-                  <a:srgbClr val="1B2A41"/>
-                </a:solidFill>
-                <a:latin typeface="Menlo"/>
-              </a:rPr>
-              <a:t>sig       : ed25519:74bb…0e91</a:t>
-            </a:r>
-          </a:p>
-        </p:txBody>
-      </p:sp>
-      <p:sp>
-        <p:nvSpPr>
-          <p:cNvPr id="16" name="TextBox 15"/>
-          <p:cNvSpPr txBox="1"/>
-          <p:nvPr/>
-        </p:nvSpPr>
-        <p:spPr>
-          <a:xfrm>
-            <a:off x="4773168" y="2898647"/>
-            <a:ext cx="3566159" cy="237744"/>
-          </a:xfrm>
-          <a:prstGeom prst="rect">
-            <a:avLst/>
-          </a:prstGeom>
-          <a:noFill/>
-        </p:spPr>
-        <p:txBody>
-          <a:bodyPr wrap="square">
-            <a:spAutoFit/>
-          </a:bodyPr>
-          <a:lstStyle/>
-          <a:p>
-            <a:pPr algn="l"/>
-            <a:r>
-              <a:rPr sz="1050" b="0" i="0">
-                <a:solidFill>
-                  <a:srgbClr val="1B2A41"/>
-                </a:solidFill>
-                <a:latin typeface="Menlo"/>
-              </a:rPr>
-              <a:t>published : external log, T+0</a:t>
-            </a:r>
-          </a:p>
-        </p:txBody>
-      </p:sp>
-      <p:sp>
-        <p:nvSpPr>
-          <p:cNvPr id="17" name="Rounded Rectangle 16"/>
-          <p:cNvSpPr/>
-          <p:nvPr/>
-        </p:nvSpPr>
-        <p:spPr>
-          <a:xfrm>
-            <a:off x="8778240" y="1600200"/>
-            <a:ext cx="3017520" cy="1097280"/>
-          </a:xfrm>
-          <a:prstGeom prst="roundRect">
-            <a:avLst/>
-          </a:prstGeom>
-          <a:solidFill>
-            <a:srgbClr val="FAF7F0"/>
-          </a:solidFill>
-          <a:ln w="15875">
-            <a:solidFill>
-              <a:srgbClr val="1B2A41"/>
-            </a:solidFill>
-          </a:ln>
-        </p:spPr>
-        <p:style>
-          <a:lnRef idx="1">
-            <a:schemeClr val="accent1"/>
-          </a:lnRef>
-          <a:fillRef idx="3">
-            <a:schemeClr val="accent1"/>
-          </a:fillRef>
-          <a:effectRef idx="2">
-            <a:schemeClr val="accent1"/>
-          </a:effectRef>
-          <a:fontRef idx="minor">
-            <a:schemeClr val="lt1"/>
-          </a:fontRef>
-        </p:style>
-        <p:txBody>
-          <a:bodyPr rtlCol="0" anchor="ctr" wrap="square"/>
-          <a:lstStyle/>
-          <a:p>
-            <a:pPr algn="ctr"/>
-          </a:p>
-        </p:txBody>
-      </p:sp>
-      <p:sp>
-        <p:nvSpPr>
-          <p:cNvPr id="18" name="Rounded Rectangle 17"/>
-          <p:cNvSpPr/>
-          <p:nvPr/>
-        </p:nvSpPr>
-        <p:spPr>
-          <a:xfrm>
-            <a:off x="8778240" y="1600200"/>
-            <a:ext cx="3017520" cy="310896"/>
-          </a:xfrm>
-          <a:prstGeom prst="roundRect">
-            <a:avLst/>
-          </a:prstGeom>
-          <a:solidFill>
-            <a:srgbClr val="1B2A41"/>
-          </a:solidFill>
-          <a:ln w="15875">
-            <a:solidFill>
-              <a:srgbClr val="1B2A41"/>
-            </a:solidFill>
-          </a:ln>
-        </p:spPr>
-        <p:style>
-          <a:lnRef idx="1">
-            <a:schemeClr val="accent1"/>
-          </a:lnRef>
-          <a:fillRef idx="3">
-            <a:schemeClr val="accent1"/>
-          </a:fillRef>
-          <a:effectRef idx="2">
-            <a:schemeClr val="accent1"/>
-          </a:effectRef>
-          <a:fontRef idx="minor">
-            <a:schemeClr val="lt1"/>
-          </a:fontRef>
-        </p:style>
-        <p:txBody>
-          <a:bodyPr rtlCol="0" anchor="ctr" wrap="square"/>
-          <a:lstStyle/>
-          <a:p>
-            <a:pPr algn="ctr"/>
-            <a:r>
-              <a:rPr sz="1150" b="1">
-                <a:solidFill>
-                  <a:srgbClr val="FAF7F0"/>
-                </a:solidFill>
-                <a:latin typeface="Menlo"/>
-              </a:rPr>
-              <a:t>VERDICT (this day)</a:t>
-            </a:r>
-          </a:p>
-        </p:txBody>
-      </p:sp>
-      <p:sp>
-        <p:nvSpPr>
-          <p:cNvPr id="19" name="TextBox 18"/>
-          <p:cNvSpPr txBox="1"/>
-          <p:nvPr/>
-        </p:nvSpPr>
-        <p:spPr>
-          <a:xfrm>
-            <a:off x="8887967" y="1947672"/>
-            <a:ext cx="2834639" cy="237744"/>
-          </a:xfrm>
-          <a:prstGeom prst="rect">
-            <a:avLst/>
-          </a:prstGeom>
-          <a:noFill/>
-        </p:spPr>
-        <p:txBody>
-          <a:bodyPr wrap="square">
-            <a:spAutoFit/>
-          </a:bodyPr>
-          <a:lstStyle/>
-          <a:p>
-            <a:pPr algn="l"/>
-            <a:r>
-              <a:rPr sz="1050" b="0" i="0">
-                <a:solidFill>
-                  <a:srgbClr val="1B2A41"/>
-                </a:solidFill>
-                <a:latin typeface="Menlo"/>
-              </a:rPr>
-              <a:t>root' == root   ✓</a:t>
-            </a:r>
-          </a:p>
-        </p:txBody>
-      </p:sp>
-      <p:sp>
-        <p:nvSpPr>
-          <p:cNvPr id="20" name="TextBox 19"/>
-          <p:cNvSpPr txBox="1"/>
-          <p:nvPr/>
-        </p:nvSpPr>
-        <p:spPr>
-          <a:xfrm>
-            <a:off x="8887967" y="2185415"/>
-            <a:ext cx="2834639" cy="237744"/>
-          </a:xfrm>
-          <a:prstGeom prst="rect">
-            <a:avLst/>
-          </a:prstGeom>
-          <a:noFill/>
-        </p:spPr>
-        <p:txBody>
-          <a:bodyPr wrap="square">
-            <a:spAutoFit/>
-          </a:bodyPr>
-          <a:lstStyle/>
-          <a:p>
-            <a:pPr algn="l"/>
-            <a:r>
-              <a:rPr sz="1050" b="0" i="0">
-                <a:solidFill>
-                  <a:srgbClr val="1B2A41"/>
-                </a:solidFill>
-                <a:latin typeface="Menlo"/>
-              </a:rPr>
-              <a:t>sig valid       ✓ (step 4)</a:t>
-            </a:r>
-          </a:p>
-        </p:txBody>
-      </p:sp>
-      <p:sp>
-        <p:nvSpPr>
-          <p:cNvPr id="21" name="TextBox 20"/>
-          <p:cNvSpPr txBox="1"/>
-          <p:nvPr/>
-        </p:nvSpPr>
-        <p:spPr>
-          <a:xfrm>
-            <a:off x="8887967" y="2423159"/>
-            <a:ext cx="2834639" cy="237744"/>
-          </a:xfrm>
-          <a:prstGeom prst="rect">
-            <a:avLst/>
-          </a:prstGeom>
-          <a:noFill/>
-        </p:spPr>
-        <p:txBody>
-          <a:bodyPr wrap="square">
-            <a:spAutoFit/>
-          </a:bodyPr>
-          <a:lstStyle/>
-          <a:p>
-            <a:pPr algn="l"/>
-            <a:r>
-              <a:rPr sz="1050" b="0" i="0">
-                <a:solidFill>
-                  <a:srgbClr val="0E7C7B"/>
-                </a:solidFill>
-                <a:latin typeface="Menlo"/>
-              </a:rPr>
-              <a:t>day 2025-05-23  PROVEN</a:t>
-            </a:r>
-          </a:p>
-        </p:txBody>
-      </p:sp>
-      <p:cxnSp>
-        <p:nvCxnSpPr>
-          <p:cNvPr id="22" name="Connector 21"/>
-          <p:cNvCxnSpPr/>
-          <p:nvPr/>
-        </p:nvCxnSpPr>
-        <p:spPr>
-          <a:xfrm>
-            <a:off x="4297680" y="2514600"/>
-            <a:ext cx="365760" cy="0"/>
-          </a:xfrm>
-          <a:prstGeom prst="line">
-            <a:avLst/>
-          </a:prstGeom>
-          <a:ln w="25400">
-            <a:solidFill>
-              <a:srgbClr val="0E7C7B"/>
-            </a:solidFill>
-            <a:tailEnd type="arrow"/>
-          </a:ln>
-        </p:spPr>
-        <p:style>
-          <a:lnRef idx="2">
-            <a:schemeClr val="accent1"/>
-          </a:lnRef>
-          <a:fillRef idx="0">
-            <a:schemeClr val="accent1"/>
-          </a:fillRef>
-          <a:effectRef idx="1">
-            <a:schemeClr val="accent1"/>
-          </a:effectRef>
-          <a:fontRef idx="minor">
-            <a:schemeClr val="tx1"/>
-          </a:fontRef>
-        </p:style>
-      </p:cxnSp>
-      <p:cxnSp>
-        <p:nvCxnSpPr>
-          <p:cNvPr id="23" name="Connector 22"/>
-          <p:cNvCxnSpPr/>
-          <p:nvPr/>
-        </p:nvCxnSpPr>
-        <p:spPr>
-          <a:xfrm>
-            <a:off x="8412480" y="2514600"/>
-            <a:ext cx="365760" cy="0"/>
-          </a:xfrm>
-          <a:prstGeom prst="line">
-            <a:avLst/>
-          </a:prstGeom>
-          <a:ln w="25400">
-            <a:solidFill>
-              <a:srgbClr val="0E7C7B"/>
-            </a:solidFill>
-            <a:tailEnd type="arrow"/>
-          </a:ln>
-        </p:spPr>
-        <p:style>
-          <a:lnRef idx="2">
-            <a:schemeClr val="accent1"/>
-          </a:lnRef>
-          <a:fillRef idx="0">
-            <a:schemeClr val="accent1"/>
-          </a:fillRef>
-          <a:effectRef idx="1">
-            <a:schemeClr val="accent1"/>
-          </a:effectRef>
-          <a:fontRef idx="minor">
-            <a:schemeClr val="tx1"/>
-          </a:fontRef>
-        </p:style>
-      </p:cxnSp>
-      <p:sp>
-        <p:nvSpPr>
-          <p:cNvPr id="24" name="TextBox 23"/>
-          <p:cNvSpPr txBox="1"/>
-          <p:nvPr/>
-        </p:nvSpPr>
-        <p:spPr>
-          <a:xfrm>
-            <a:off x="548640" y="3931920"/>
-            <a:ext cx="11247120" cy="2011680"/>
-          </a:xfrm>
-          <a:prstGeom prst="rect">
-            <a:avLst/>
-          </a:prstGeom>
-          <a:noFill/>
-        </p:spPr>
-        <p:txBody>
-          <a:bodyPr wrap="square">
-            <a:spAutoFit/>
-          </a:bodyPr>
-          <a:lstStyle/>
-          <a:p>
-            <a:pPr algn="l"/>
-            <a:r>
-              <a:rPr sz="1500" b="0" i="0">
-                <a:solidFill>
-                  <a:srgbClr val="1B2A41"/>
-                </a:solidFill>
-                <a:latin typeface="Avenir Next"/>
-              </a:rPr>
-              <a:t>root' is computed from the entries you just walked; root came from the outside world with a</a:t>
-            </a:r>
-          </a:p>
-          <a:p>
-            <a:pPr algn="l"/>
-            <a:r>
-              <a:rPr sz="1500" b="0" i="0">
-                <a:solidFill>
-                  <a:srgbClr val="1B2A41"/>
-                </a:solidFill>
-                <a:latin typeface="Avenir Next"/>
-              </a:rPr>
-              <a:t>May 23, 2025 publication timestamp. Equality means this day's evidence existed, in this form,</a:t>
-            </a:r>
-          </a:p>
-          <a:p>
-            <a:pPr algn="l"/>
-            <a:r>
-              <a:rPr sz="1500" b="0" i="0">
-                <a:solidFill>
-                  <a:srgbClr val="1B2A41"/>
-                </a:solidFill>
-                <a:latin typeface="Avenir Next"/>
-              </a:rPr>
-              <a:t>on that day. Repeat for every day the walk crosses — each is an independent anchor, so even a</a:t>
-            </a:r>
-          </a:p>
-          <a:p>
-            <a:pPr algn="l"/>
-            <a:r>
-              <a:rPr sz="1500" b="0" i="0">
-                <a:solidFill>
-                  <a:srgbClr val="1B2A41"/>
-                </a:solidFill>
-                <a:latin typeface="Avenir Next"/>
-              </a:rPr>
-              <a:t>compromise discovered later cannot silently rewrite days sealed before it.</a:t>
+              <a:rPr sz="1600" b="1" i="0">
+                <a:solidFill>
+                  <a:srgbClr val="1B2A41"/>
+                </a:solidFill>
+                <a:latin typeface="Avenir Next"/>
+              </a:rPr>
+              <a:t>So the walk has a second half: recompute each crossed day's root and compare it to the seal</a:t>
+            </a:r>
+          </a:p>
+          <a:p>
+            <a:pPr algn="l"/>
+            <a:r>
+              <a:rPr sz="1600" b="1" i="0">
+                <a:solidFill>
+                  <a:srgbClr val="1B2A41"/>
+                </a:solidFill>
+                <a:latin typeface="Avenir Next"/>
+              </a:rPr>
+              <a:t>that day published — a year before you started asking.</a:t>
             </a:r>
           </a:p>
         </p:txBody>
@@ -6650,7 +6800,7 @@
                 </a:solidFill>
                 <a:latin typeface="Avenir Next"/>
               </a:rPr>
-              <a:t>Step 4 — validate keys against the registry manifest</a:t>
+              <a:t>Step 3 — recompute the day's Merkle root, compare to the published seal</a:t>
             </a:r>
           </a:p>
         </p:txBody>
@@ -6685,7 +6835,7 @@
                 </a:solidFill>
                 <a:latin typeface="Avenir Next"/>
               </a:rPr>
-              <a:t>Was the seal's signing key legitimate ON THAT DATE? The manifest answers — and you check the manifest yourself</a:t>
+              <a:t>May 23, 2025: 517 entries → one root → one signed seal</a:t>
             </a:r>
           </a:p>
         </p:txBody>
@@ -6699,7 +6849,7 @@
         <p:spPr>
           <a:xfrm>
             <a:off x="548640" y="1600200"/>
-            <a:ext cx="5394960" cy="2286000"/>
+            <a:ext cx="3749039" cy="1335024"/>
           </a:xfrm>
           <a:prstGeom prst="roundRect">
             <a:avLst/>
@@ -6744,7 +6894,7 @@
         <p:spPr>
           <a:xfrm>
             <a:off x="548640" y="1600200"/>
-            <a:ext cx="5394960" cy="310896"/>
+            <a:ext cx="3749039" cy="310896"/>
           </a:xfrm>
           <a:prstGeom prst="roundRect">
             <a:avLst/>
@@ -6784,7 +6934,7 @@
                 </a:solidFill>
                 <a:latin typeface="Menlo"/>
               </a:rPr>
-              <a:t>KEY REGISTRY MANIFEST  (HSM-signed)</a:t>
+              <a:t>RECOMPUTED  (today, your tooling)</a:t>
             </a:r>
           </a:p>
         </p:txBody>
@@ -6798,7 +6948,7 @@
         <p:spPr>
           <a:xfrm>
             <a:off x="658368" y="1947672"/>
-            <a:ext cx="5212080" cy="237744"/>
+            <a:ext cx="3566159" cy="237744"/>
           </a:xfrm>
           <a:prstGeom prst="rect">
             <a:avLst/>
@@ -6819,7 +6969,7 @@
                 </a:solidFill>
                 <a:latin typeface="Menlo"/>
               </a:rPr>
-              <a:t>manifest_root : m-88c2…511a</a:t>
+              <a:t>day       : 2025-05-23</a:t>
             </a:r>
           </a:p>
         </p:txBody>
@@ -6833,7 +6983,7 @@
         <p:spPr>
           <a:xfrm>
             <a:off x="658368" y="2185415"/>
-            <a:ext cx="5212080" cy="237744"/>
+            <a:ext cx="3566159" cy="237744"/>
           </a:xfrm>
           <a:prstGeom prst="rect">
             <a:avLst/>
@@ -6854,7 +7004,7 @@
                 </a:solidFill>
                 <a:latin typeface="Menlo"/>
               </a:rPr>
-              <a:t>signed_by     : hsm-registry-root</a:t>
+              <a:t>entries   : E-…-0001 … E-…-0517</a:t>
             </a:r>
           </a:p>
         </p:txBody>
@@ -6868,7 +7018,7 @@
         <p:spPr>
           <a:xfrm>
             <a:off x="658368" y="2423159"/>
-            <a:ext cx="5212080" cy="237744"/>
+            <a:ext cx="3566159" cy="237744"/>
           </a:xfrm>
           <a:prstGeom prst="rect">
             <a:avLst/>
@@ -6889,7 +7039,7 @@
                 </a:solidFill>
                 <a:latin typeface="Menlo"/>
               </a:rPr>
-              <a:t>sig           : ed25519:2f90…c6d3</a:t>
+              <a:t>leaf i    : mac of entry i</a:t>
             </a:r>
           </a:p>
         </p:txBody>
@@ -6903,7 +7053,7 @@
         <p:spPr>
           <a:xfrm>
             <a:off x="658368" y="2660903"/>
-            <a:ext cx="5212080" cy="237744"/>
+            <a:ext cx="3566159" cy="237744"/>
           </a:xfrm>
           <a:prstGeom prst="rect">
             <a:avLst/>
@@ -6920,25 +7070,124 @@
             <a:r>
               <a:rPr sz="1050" b="0" i="0">
                 <a:solidFill>
-                  <a:srgbClr val="1B2A41"/>
+                  <a:srgbClr val="0E7C7B"/>
                 </a:solidFill>
                 <a:latin typeface="Menlo"/>
               </a:rPr>
-              <a:t>─────────────────────────────────</a:t>
-            </a:r>
-          </a:p>
-        </p:txBody>
-      </p:sp>
-      <p:sp>
-        <p:nvSpPr>
-          <p:cNvPr id="10" name="TextBox 9"/>
+              <a:t>root'     : 6a3f…d208</a:t>
+            </a:r>
+          </a:p>
+        </p:txBody>
+      </p:sp>
+      <p:sp>
+        <p:nvSpPr>
+          <p:cNvPr id="10" name="Rounded Rectangle 9"/>
+          <p:cNvSpPr/>
+          <p:nvPr/>
+        </p:nvSpPr>
+        <p:spPr>
+          <a:xfrm>
+            <a:off x="4663440" y="1600200"/>
+            <a:ext cx="3749039" cy="1572768"/>
+          </a:xfrm>
+          <a:prstGeom prst="roundRect">
+            <a:avLst/>
+          </a:prstGeom>
+          <a:solidFill>
+            <a:srgbClr val="FAF7F0"/>
+          </a:solidFill>
+          <a:ln w="15875">
+            <a:solidFill>
+              <a:srgbClr val="1B2A41"/>
+            </a:solidFill>
+          </a:ln>
+        </p:spPr>
+        <p:style>
+          <a:lnRef idx="1">
+            <a:schemeClr val="accent1"/>
+          </a:lnRef>
+          <a:fillRef idx="3">
+            <a:schemeClr val="accent1"/>
+          </a:fillRef>
+          <a:effectRef idx="2">
+            <a:schemeClr val="accent1"/>
+          </a:effectRef>
+          <a:fontRef idx="minor">
+            <a:schemeClr val="lt1"/>
+          </a:fontRef>
+        </p:style>
+        <p:txBody>
+          <a:bodyPr rtlCol="0" anchor="ctr" wrap="square"/>
+          <a:lstStyle/>
+          <a:p>
+            <a:pPr algn="ctr"/>
+          </a:p>
+        </p:txBody>
+      </p:sp>
+      <p:sp>
+        <p:nvSpPr>
+          <p:cNvPr id="11" name="Rounded Rectangle 10"/>
+          <p:cNvSpPr/>
+          <p:nvPr/>
+        </p:nvSpPr>
+        <p:spPr>
+          <a:xfrm>
+            <a:off x="4663440" y="1600200"/>
+            <a:ext cx="3749039" cy="310896"/>
+          </a:xfrm>
+          <a:prstGeom prst="roundRect">
+            <a:avLst/>
+          </a:prstGeom>
+          <a:solidFill>
+            <a:srgbClr val="1B2A41"/>
+          </a:solidFill>
+          <a:ln w="15875">
+            <a:solidFill>
+              <a:srgbClr val="1B2A41"/>
+            </a:solidFill>
+          </a:ln>
+        </p:spPr>
+        <p:style>
+          <a:lnRef idx="1">
+            <a:schemeClr val="accent1"/>
+          </a:lnRef>
+          <a:fillRef idx="3">
+            <a:schemeClr val="accent1"/>
+          </a:fillRef>
+          <a:effectRef idx="2">
+            <a:schemeClr val="accent1"/>
+          </a:effectRef>
+          <a:fontRef idx="minor">
+            <a:schemeClr val="lt1"/>
+          </a:fontRef>
+        </p:style>
+        <p:txBody>
+          <a:bodyPr rtlCol="0" anchor="ctr" wrap="square"/>
+          <a:lstStyle/>
+          <a:p>
+            <a:pPr algn="ctr"/>
+            <a:r>
+              <a:rPr sz="1150" b="1">
+                <a:solidFill>
+                  <a:srgbClr val="FAF7F0"/>
+                </a:solidFill>
+                <a:latin typeface="Menlo"/>
+              </a:rPr>
+              <a:t>PUBLISHED SEAL  (May 23, 2025)</a:t>
+            </a:r>
+          </a:p>
+        </p:txBody>
+      </p:sp>
+      <p:sp>
+        <p:nvSpPr>
+          <p:cNvPr id="12" name="TextBox 11"/>
           <p:cNvSpPr txBox="1"/>
           <p:nvPr/>
         </p:nvSpPr>
         <p:spPr>
           <a:xfrm>
-            <a:off x="658368" y="2898647"/>
-            <a:ext cx="5212080" cy="237744"/>
+            <a:off x="4773168" y="1947672"/>
+            <a:ext cx="3566159" cy="237744"/>
           </a:xfrm>
           <a:prstGeom prst="rect">
             <a:avLst/>
@@ -6955,25 +7204,25 @@
             <a:r>
               <a:rPr sz="1050" b="0" i="0">
                 <a:solidFill>
-                  <a:srgbClr val="C99A2E"/>
+                  <a:srgbClr val="1B2A41"/>
                 </a:solidFill>
                 <a:latin typeface="Menlo"/>
               </a:rPr>
-              <a:t>ikm-2025-Q2-07 : valid 2025-04-01 → 2025-06-30</a:t>
-            </a:r>
-          </a:p>
-        </p:txBody>
-      </p:sp>
-      <p:sp>
-        <p:nvSpPr>
-          <p:cNvPr id="11" name="TextBox 10"/>
+              <a:t>seal_id   : S-2025-05-23</a:t>
+            </a:r>
+          </a:p>
+        </p:txBody>
+      </p:sp>
+      <p:sp>
+        <p:nvSpPr>
+          <p:cNvPr id="13" name="TextBox 12"/>
           <p:cNvSpPr txBox="1"/>
           <p:nvPr/>
         </p:nvSpPr>
         <p:spPr>
           <a:xfrm>
-            <a:off x="658368" y="3136391"/>
-            <a:ext cx="5212080" cy="237744"/>
+            <a:off x="4773168" y="2185415"/>
+            <a:ext cx="3566159" cy="237744"/>
           </a:xfrm>
           <a:prstGeom prst="rect">
             <a:avLst/>
@@ -6994,21 +7243,21 @@
                 </a:solidFill>
                 <a:latin typeface="Menlo"/>
               </a:rPr>
-              <a:t>hsm-seal-01    : valid 2024-11-15 → present</a:t>
-            </a:r>
-          </a:p>
-        </p:txBody>
-      </p:sp>
-      <p:sp>
-        <p:nvSpPr>
-          <p:cNvPr id="12" name="TextBox 11"/>
+              <a:t>root      : 6a3f…d208   ◄ equal</a:t>
+            </a:r>
+          </a:p>
+        </p:txBody>
+      </p:sp>
+      <p:sp>
+        <p:nvSpPr>
+          <p:cNvPr id="14" name="TextBox 13"/>
           <p:cNvSpPr txBox="1"/>
           <p:nvPr/>
         </p:nvSpPr>
         <p:spPr>
           <a:xfrm>
-            <a:off x="658368" y="3374135"/>
-            <a:ext cx="5212080" cy="237744"/>
+            <a:off x="4773168" y="2423159"/>
+            <a:ext cx="3566159" cy="237744"/>
           </a:xfrm>
           <a:prstGeom prst="rect">
             <a:avLst/>
@@ -7025,25 +7274,25 @@
             <a:r>
               <a:rPr sz="1050" b="0" i="0">
                 <a:solidFill>
-                  <a:srgbClr val="0E7C7B"/>
+                  <a:srgbClr val="1B2A41"/>
                 </a:solidFill>
                 <a:latin typeface="Menlo"/>
               </a:rPr>
-              <a:t>  fingerprint  : f7:2a:…:9c  ◄ reconcile by hand</a:t>
-            </a:r>
-          </a:p>
-        </p:txBody>
-      </p:sp>
-      <p:sp>
-        <p:nvSpPr>
-          <p:cNvPr id="13" name="TextBox 12"/>
+              <a:t>signed_by : hsm-seal-01</a:t>
+            </a:r>
+          </a:p>
+        </p:txBody>
+      </p:sp>
+      <p:sp>
+        <p:nvSpPr>
+          <p:cNvPr id="15" name="TextBox 14"/>
           <p:cNvSpPr txBox="1"/>
           <p:nvPr/>
         </p:nvSpPr>
         <p:spPr>
           <a:xfrm>
-            <a:off x="658368" y="3611879"/>
-            <a:ext cx="5212080" cy="237744"/>
+            <a:off x="4773168" y="2660903"/>
+            <a:ext cx="3566159" cy="237744"/>
           </a:xfrm>
           <a:prstGeom prst="rect">
             <a:avLst/>
@@ -7064,21 +7313,21 @@
                 </a:solidFill>
                 <a:latin typeface="Menlo"/>
               </a:rPr>
-              <a:t>roles          : registry-root ≠ seal-requester</a:t>
-            </a:r>
-          </a:p>
-        </p:txBody>
-      </p:sp>
-      <p:sp>
-        <p:nvSpPr>
-          <p:cNvPr id="14" name="TextBox 13"/>
+              <a:t>sig       : ed25519:74bb…0e91</a:t>
+            </a:r>
+          </a:p>
+        </p:txBody>
+      </p:sp>
+      <p:sp>
+        <p:nvSpPr>
+          <p:cNvPr id="16" name="TextBox 15"/>
           <p:cNvSpPr txBox="1"/>
           <p:nvPr/>
         </p:nvSpPr>
         <p:spPr>
           <a:xfrm>
-            <a:off x="6400800" y="1737360"/>
-            <a:ext cx="5212080" cy="3291840"/>
+            <a:off x="4773168" y="2898647"/>
+            <a:ext cx="3566159" cy="237744"/>
           </a:xfrm>
           <a:prstGeom prst="rect">
             <a:avLst/>
@@ -7093,156 +7342,126 @@
           <a:p>
             <a:pPr algn="l"/>
             <a:r>
-              <a:rPr sz="1300" b="0" i="0">
-                <a:solidFill>
-                  <a:srgbClr val="1B2A41"/>
-                </a:solidFill>
-                <a:latin typeface="Avenir Next"/>
-              </a:rPr>
-              <a:t>Three checks:</a:t>
-            </a:r>
-          </a:p>
-          <a:p>
-            <a:pPr algn="l"/>
-          </a:p>
-          <a:p>
-            <a:pPr algn="l"/>
-            <a:r>
-              <a:rPr sz="1300" b="0" i="0">
-                <a:solidFill>
-                  <a:srgbClr val="1B2A41"/>
-                </a:solidFill>
-                <a:latin typeface="Avenir Next"/>
-              </a:rPr>
-              <a:t>1.  The entry keys you used (ikm-2025-Q2-07)</a:t>
-            </a:r>
-          </a:p>
-          <a:p>
-            <a:pPr algn="l"/>
-            <a:r>
-              <a:rPr sz="1300" b="0" i="0">
-                <a:solidFill>
-                  <a:srgbClr val="1B2A41"/>
-                </a:solidFill>
-                <a:latin typeface="Avenir Next"/>
-              </a:rPr>
-              <a:t>     were valid in their entries' windows</a:t>
-            </a:r>
-          </a:p>
-          <a:p>
-            <a:pPr algn="l"/>
-          </a:p>
-          <a:p>
-            <a:pPr algn="l"/>
-            <a:r>
-              <a:rPr sz="1300" b="0" i="0">
-                <a:solidFill>
-                  <a:srgbClr val="1B2A41"/>
-                </a:solidFill>
-                <a:latin typeface="Avenir Next"/>
-              </a:rPr>
-              <a:t>2.  The seal signer (hsm-seal-01) was valid</a:t>
-            </a:r>
-          </a:p>
-          <a:p>
-            <a:pPr algn="l"/>
-            <a:r>
-              <a:rPr sz="1300" b="0" i="0">
-                <a:solidFill>
-                  <a:srgbClr val="1B2A41"/>
-                </a:solidFill>
-                <a:latin typeface="Avenir Next"/>
-              </a:rPr>
-              <a:t>     on May 23, 2025 — fingerprint reconciled</a:t>
-            </a:r>
-          </a:p>
-          <a:p>
-            <a:pPr algn="l"/>
-            <a:r>
-              <a:rPr sz="1300" b="0" i="0">
-                <a:solidFill>
-                  <a:srgbClr val="1B2A41"/>
-                </a:solidFill>
-                <a:latin typeface="Avenir Next"/>
-              </a:rPr>
-              <a:t>     with YOUR tooling against the published</a:t>
-            </a:r>
-          </a:p>
-          <a:p>
-            <a:pPr algn="l"/>
-            <a:r>
-              <a:rPr sz="1300" b="0" i="0">
-                <a:solidFill>
-                  <a:srgbClr val="1B2A41"/>
-                </a:solidFill>
-                <a:latin typeface="Avenir Next"/>
-              </a:rPr>
-              <a:t>     manifest root</a:t>
-            </a:r>
-          </a:p>
-          <a:p>
-            <a:pPr algn="l"/>
-          </a:p>
-          <a:p>
-            <a:pPr algn="l"/>
-            <a:r>
-              <a:rPr sz="1300" b="0" i="0">
-                <a:solidFill>
-                  <a:srgbClr val="1B2A41"/>
-                </a:solidFill>
-                <a:latin typeface="Avenir Next"/>
-              </a:rPr>
-              <a:t>3.  Separation of duties: the role holding the</a:t>
-            </a:r>
-          </a:p>
-          <a:p>
-            <a:pPr algn="l"/>
-            <a:r>
-              <a:rPr sz="1300" b="0" i="0">
-                <a:solidFill>
-                  <a:srgbClr val="1B2A41"/>
-                </a:solidFill>
-                <a:latin typeface="Avenir Next"/>
-              </a:rPr>
-              <a:t>     registry root can't request seals and can't</a:t>
-            </a:r>
-          </a:p>
-          <a:p>
-            <a:pPr algn="l"/>
-            <a:r>
-              <a:rPr sz="1300" b="0" i="0">
-                <a:solidFill>
-                  <a:srgbClr val="1B2A41"/>
-                </a:solidFill>
-                <a:latin typeface="Avenir Next"/>
-              </a:rPr>
-              <a:t>     extract keys — forging the manifest means</a:t>
-            </a:r>
-          </a:p>
-          <a:p>
-            <a:pPr algn="l"/>
-            <a:r>
-              <a:rPr sz="1300" b="0" i="0">
-                <a:solidFill>
-                  <a:srgbClr val="1B2A41"/>
-                </a:solidFill>
-                <a:latin typeface="Avenir Next"/>
-              </a:rPr>
-              <a:t>     defeating hardware custody, not policy</a:t>
-            </a:r>
-          </a:p>
-        </p:txBody>
-      </p:sp>
-      <p:sp>
-        <p:nvSpPr>
-          <p:cNvPr id="15" name="TextBox 14"/>
+              <a:rPr sz="1050" b="0" i="0">
+                <a:solidFill>
+                  <a:srgbClr val="1B2A41"/>
+                </a:solidFill>
+                <a:latin typeface="Menlo"/>
+              </a:rPr>
+              <a:t>published : external log, T+0</a:t>
+            </a:r>
+          </a:p>
+        </p:txBody>
+      </p:sp>
+      <p:sp>
+        <p:nvSpPr>
+          <p:cNvPr id="17" name="Rounded Rectangle 16"/>
+          <p:cNvSpPr/>
+          <p:nvPr/>
+        </p:nvSpPr>
+        <p:spPr>
+          <a:xfrm>
+            <a:off x="8778240" y="1600200"/>
+            <a:ext cx="3017520" cy="1097280"/>
+          </a:xfrm>
+          <a:prstGeom prst="roundRect">
+            <a:avLst/>
+          </a:prstGeom>
+          <a:solidFill>
+            <a:srgbClr val="FAF7F0"/>
+          </a:solidFill>
+          <a:ln w="15875">
+            <a:solidFill>
+              <a:srgbClr val="1B2A41"/>
+            </a:solidFill>
+          </a:ln>
+        </p:spPr>
+        <p:style>
+          <a:lnRef idx="1">
+            <a:schemeClr val="accent1"/>
+          </a:lnRef>
+          <a:fillRef idx="3">
+            <a:schemeClr val="accent1"/>
+          </a:fillRef>
+          <a:effectRef idx="2">
+            <a:schemeClr val="accent1"/>
+          </a:effectRef>
+          <a:fontRef idx="minor">
+            <a:schemeClr val="lt1"/>
+          </a:fontRef>
+        </p:style>
+        <p:txBody>
+          <a:bodyPr rtlCol="0" anchor="ctr" wrap="square"/>
+          <a:lstStyle/>
+          <a:p>
+            <a:pPr algn="ctr"/>
+          </a:p>
+        </p:txBody>
+      </p:sp>
+      <p:sp>
+        <p:nvSpPr>
+          <p:cNvPr id="18" name="Rounded Rectangle 17"/>
+          <p:cNvSpPr/>
+          <p:nvPr/>
+        </p:nvSpPr>
+        <p:spPr>
+          <a:xfrm>
+            <a:off x="8778240" y="1600200"/>
+            <a:ext cx="3017520" cy="310896"/>
+          </a:xfrm>
+          <a:prstGeom prst="roundRect">
+            <a:avLst/>
+          </a:prstGeom>
+          <a:solidFill>
+            <a:srgbClr val="1B2A41"/>
+          </a:solidFill>
+          <a:ln w="15875">
+            <a:solidFill>
+              <a:srgbClr val="1B2A41"/>
+            </a:solidFill>
+          </a:ln>
+        </p:spPr>
+        <p:style>
+          <a:lnRef idx="1">
+            <a:schemeClr val="accent1"/>
+          </a:lnRef>
+          <a:fillRef idx="3">
+            <a:schemeClr val="accent1"/>
+          </a:fillRef>
+          <a:effectRef idx="2">
+            <a:schemeClr val="accent1"/>
+          </a:effectRef>
+          <a:fontRef idx="minor">
+            <a:schemeClr val="lt1"/>
+          </a:fontRef>
+        </p:style>
+        <p:txBody>
+          <a:bodyPr rtlCol="0" anchor="ctr" wrap="square"/>
+          <a:lstStyle/>
+          <a:p>
+            <a:pPr algn="ctr"/>
+            <a:r>
+              <a:rPr sz="1150" b="1">
+                <a:solidFill>
+                  <a:srgbClr val="FAF7F0"/>
+                </a:solidFill>
+                <a:latin typeface="Menlo"/>
+              </a:rPr>
+              <a:t>VERDICT (this day)</a:t>
+            </a:r>
+          </a:p>
+        </p:txBody>
+      </p:sp>
+      <p:sp>
+        <p:nvSpPr>
+          <p:cNvPr id="19" name="TextBox 18"/>
           <p:cNvSpPr txBox="1"/>
           <p:nvPr/>
         </p:nvSpPr>
         <p:spPr>
           <a:xfrm>
-            <a:off x="548640" y="5257800"/>
-            <a:ext cx="11247120" cy="731520"/>
+            <a:off x="8887967" y="1947672"/>
+            <a:ext cx="2834639" cy="237744"/>
           </a:xfrm>
           <a:prstGeom prst="rect">
             <a:avLst/>
@@ -7257,13 +7476,226 @@
           <a:p>
             <a:pPr algn="l"/>
             <a:r>
-              <a:rPr sz="1400" b="0" i="1">
-                <a:solidFill>
-                  <a:srgbClr val="6B7480"/>
-                </a:solidFill>
-                <a:latin typeface="Avenir Next"/>
-              </a:rPr>
-              <a:t>This is the examiner's independence step — no bank tooling, no bank word. (Danny Tran's turn, ch. 24.)</a:t>
+              <a:rPr sz="1050" b="0" i="0">
+                <a:solidFill>
+                  <a:srgbClr val="1B2A41"/>
+                </a:solidFill>
+                <a:latin typeface="Menlo"/>
+              </a:rPr>
+              <a:t>root' == root   ✓</a:t>
+            </a:r>
+          </a:p>
+        </p:txBody>
+      </p:sp>
+      <p:sp>
+        <p:nvSpPr>
+          <p:cNvPr id="20" name="TextBox 19"/>
+          <p:cNvSpPr txBox="1"/>
+          <p:nvPr/>
+        </p:nvSpPr>
+        <p:spPr>
+          <a:xfrm>
+            <a:off x="8887967" y="2185415"/>
+            <a:ext cx="2834639" cy="237744"/>
+          </a:xfrm>
+          <a:prstGeom prst="rect">
+            <a:avLst/>
+          </a:prstGeom>
+          <a:noFill/>
+        </p:spPr>
+        <p:txBody>
+          <a:bodyPr wrap="square">
+            <a:spAutoFit/>
+          </a:bodyPr>
+          <a:lstStyle/>
+          <a:p>
+            <a:pPr algn="l"/>
+            <a:r>
+              <a:rPr sz="1050" b="0" i="0">
+                <a:solidFill>
+                  <a:srgbClr val="1B2A41"/>
+                </a:solidFill>
+                <a:latin typeface="Menlo"/>
+              </a:rPr>
+              <a:t>sig valid       ✓ (step 4)</a:t>
+            </a:r>
+          </a:p>
+        </p:txBody>
+      </p:sp>
+      <p:sp>
+        <p:nvSpPr>
+          <p:cNvPr id="21" name="TextBox 20"/>
+          <p:cNvSpPr txBox="1"/>
+          <p:nvPr/>
+        </p:nvSpPr>
+        <p:spPr>
+          <a:xfrm>
+            <a:off x="8887967" y="2423159"/>
+            <a:ext cx="2834639" cy="237744"/>
+          </a:xfrm>
+          <a:prstGeom prst="rect">
+            <a:avLst/>
+          </a:prstGeom>
+          <a:noFill/>
+        </p:spPr>
+        <p:txBody>
+          <a:bodyPr wrap="square">
+            <a:spAutoFit/>
+          </a:bodyPr>
+          <a:lstStyle/>
+          <a:p>
+            <a:pPr algn="l"/>
+            <a:r>
+              <a:rPr sz="1050" b="0" i="0">
+                <a:solidFill>
+                  <a:srgbClr val="0E7C7B"/>
+                </a:solidFill>
+                <a:latin typeface="Menlo"/>
+              </a:rPr>
+              <a:t>day 2025-05-23  PROVEN</a:t>
+            </a:r>
+          </a:p>
+        </p:txBody>
+      </p:sp>
+      <p:cxnSp>
+        <p:nvCxnSpPr>
+          <p:cNvPr id="22" name="Connector 21"/>
+          <p:cNvCxnSpPr/>
+          <p:nvPr/>
+        </p:nvCxnSpPr>
+        <p:spPr>
+          <a:xfrm>
+            <a:off x="4297680" y="2514600"/>
+            <a:ext cx="365760" cy="0"/>
+          </a:xfrm>
+          <a:prstGeom prst="line">
+            <a:avLst/>
+          </a:prstGeom>
+          <a:ln w="25400">
+            <a:solidFill>
+              <a:srgbClr val="0E7C7B"/>
+            </a:solidFill>
+            <a:tailEnd type="arrow"/>
+          </a:ln>
+        </p:spPr>
+        <p:style>
+          <a:lnRef idx="2">
+            <a:schemeClr val="accent1"/>
+          </a:lnRef>
+          <a:fillRef idx="0">
+            <a:schemeClr val="accent1"/>
+          </a:fillRef>
+          <a:effectRef idx="1">
+            <a:schemeClr val="accent1"/>
+          </a:effectRef>
+          <a:fontRef idx="minor">
+            <a:schemeClr val="tx1"/>
+          </a:fontRef>
+        </p:style>
+      </p:cxnSp>
+      <p:cxnSp>
+        <p:nvCxnSpPr>
+          <p:cNvPr id="23" name="Connector 22"/>
+          <p:cNvCxnSpPr/>
+          <p:nvPr/>
+        </p:nvCxnSpPr>
+        <p:spPr>
+          <a:xfrm>
+            <a:off x="8412480" y="2514600"/>
+            <a:ext cx="365760" cy="0"/>
+          </a:xfrm>
+          <a:prstGeom prst="line">
+            <a:avLst/>
+          </a:prstGeom>
+          <a:ln w="25400">
+            <a:solidFill>
+              <a:srgbClr val="0E7C7B"/>
+            </a:solidFill>
+            <a:tailEnd type="arrow"/>
+          </a:ln>
+        </p:spPr>
+        <p:style>
+          <a:lnRef idx="2">
+            <a:schemeClr val="accent1"/>
+          </a:lnRef>
+          <a:fillRef idx="0">
+            <a:schemeClr val="accent1"/>
+          </a:fillRef>
+          <a:effectRef idx="1">
+            <a:schemeClr val="accent1"/>
+          </a:effectRef>
+          <a:fontRef idx="minor">
+            <a:schemeClr val="tx1"/>
+          </a:fontRef>
+        </p:style>
+      </p:cxnSp>
+      <p:sp>
+        <p:nvSpPr>
+          <p:cNvPr id="24" name="TextBox 23"/>
+          <p:cNvSpPr txBox="1"/>
+          <p:nvPr/>
+        </p:nvSpPr>
+        <p:spPr>
+          <a:xfrm>
+            <a:off x="548640" y="3931920"/>
+            <a:ext cx="11247120" cy="2011680"/>
+          </a:xfrm>
+          <a:prstGeom prst="rect">
+            <a:avLst/>
+          </a:prstGeom>
+          <a:noFill/>
+        </p:spPr>
+        <p:txBody>
+          <a:bodyPr wrap="square">
+            <a:spAutoFit/>
+          </a:bodyPr>
+          <a:lstStyle/>
+          <a:p>
+            <a:pPr algn="l"/>
+            <a:r>
+              <a:rPr sz="1500" b="0" i="0">
+                <a:solidFill>
+                  <a:srgbClr val="1B2A41"/>
+                </a:solidFill>
+                <a:latin typeface="Avenir Next"/>
+              </a:rPr>
+              <a:t>root' is computed from the entries you just walked; root came from the outside world with a</a:t>
+            </a:r>
+          </a:p>
+          <a:p>
+            <a:pPr algn="l"/>
+            <a:r>
+              <a:rPr sz="1500" b="0" i="0">
+                <a:solidFill>
+                  <a:srgbClr val="1B2A41"/>
+                </a:solidFill>
+                <a:latin typeface="Avenir Next"/>
+              </a:rPr>
+              <a:t>May 23, 2025 publication timestamp. Equality means this day's evidence existed, in this form,</a:t>
+            </a:r>
+          </a:p>
+          <a:p>
+            <a:pPr algn="l"/>
+            <a:r>
+              <a:rPr sz="1500" b="0" i="0">
+                <a:solidFill>
+                  <a:srgbClr val="1B2A41"/>
+                </a:solidFill>
+                <a:latin typeface="Avenir Next"/>
+              </a:rPr>
+              <a:t>on that day. Repeat for every day the walk crosses — each is an independent anchor, so even a</a:t>
+            </a:r>
+          </a:p>
+          <a:p>
+            <a:pPr algn="l"/>
+            <a:r>
+              <a:rPr sz="1500" b="0" i="0">
+                <a:solidFill>
+                  <a:srgbClr val="1B2A41"/>
+                </a:solidFill>
+                <a:latin typeface="Avenir Next"/>
+              </a:rPr>
+              <a:t>compromise discovered later cannot silently rewrite days sealed before it.</a:t>
             </a:r>
           </a:p>
         </p:txBody>
@@ -7324,21 +7756,56 @@
                 </a:solidFill>
                 <a:latin typeface="Avenir Next"/>
               </a:rPr>
-              <a:t>Step 5 — the reconstructed lineage, end to end</a:t>
-            </a:r>
-          </a:p>
-        </p:txBody>
-      </p:sp>
-      <p:sp>
-        <p:nvSpPr>
-          <p:cNvPr id="3" name="Rounded Rectangle 2"/>
+              <a:t>Step 4 — validate keys against the registry manifest</a:t>
+            </a:r>
+          </a:p>
+        </p:txBody>
+      </p:sp>
+      <p:sp>
+        <p:nvSpPr>
+          <p:cNvPr id="3" name="TextBox 2"/>
+          <p:cNvSpPr txBox="1"/>
+          <p:nvPr/>
+        </p:nvSpPr>
+        <p:spPr>
+          <a:xfrm>
+            <a:off x="548640" y="868680"/>
+            <a:ext cx="11064240" cy="457200"/>
+          </a:xfrm>
+          <a:prstGeom prst="rect">
+            <a:avLst/>
+          </a:prstGeom>
+          <a:noFill/>
+        </p:spPr>
+        <p:txBody>
+          <a:bodyPr wrap="square">
+            <a:spAutoFit/>
+          </a:bodyPr>
+          <a:lstStyle/>
+          <a:p>
+            <a:pPr algn="l"/>
+            <a:r>
+              <a:rPr sz="1400" b="0" i="1">
+                <a:solidFill>
+                  <a:srgbClr val="6B7480"/>
+                </a:solidFill>
+                <a:latin typeface="Avenir Next"/>
+              </a:rPr>
+              <a:t>Was the seal's signing key legitimate ON THAT DATE? The manifest answers — and you check the manifest yourself</a:t>
+            </a:r>
+          </a:p>
+        </p:txBody>
+      </p:sp>
+      <p:sp>
+        <p:nvSpPr>
+          <p:cNvPr id="4" name="Rounded Rectangle 3"/>
           <p:cNvSpPr/>
           <p:nvPr/>
         </p:nvSpPr>
         <p:spPr>
           <a:xfrm>
-            <a:off x="502920" y="2743200"/>
-            <a:ext cx="1783080" cy="1188720"/>
+            <a:off x="548640" y="1600200"/>
+            <a:ext cx="5394960" cy="2286000"/>
           </a:xfrm>
           <a:prstGeom prst="roundRect">
             <a:avLst/>
@@ -7371,46 +7838,25 @@
           <a:lstStyle/>
           <a:p>
             <a:pPr algn="ctr"/>
-            <a:r>
-              <a:rPr sz="1050" b="1">
-                <a:solidFill>
-                  <a:srgbClr val="1B2A41"/>
-                </a:solidFill>
-                <a:latin typeface="Avenir Next"/>
-              </a:rPr>
-              <a:t>ARTIFACT</a:t>
-            </a:r>
-          </a:p>
-          <a:p>
-            <a:pPr algn="ctr"/>
-            <a:r>
-              <a:rPr sz="1050" b="0">
-                <a:solidFill>
-                  <a:srgbClr val="1B2A41"/>
-                </a:solidFill>
-                <a:latin typeface="Avenir Next"/>
-              </a:rPr>
-              <a:t>LN-2025-088231</a:t>
-            </a:r>
-          </a:p>
-        </p:txBody>
-      </p:sp>
-      <p:sp>
-        <p:nvSpPr>
-          <p:cNvPr id="4" name="Rounded Rectangle 3"/>
+          </a:p>
+        </p:txBody>
+      </p:sp>
+      <p:sp>
+        <p:nvSpPr>
+          <p:cNvPr id="5" name="Rounded Rectangle 4"/>
           <p:cNvSpPr/>
           <p:nvPr/>
         </p:nvSpPr>
         <p:spPr>
           <a:xfrm>
-            <a:off x="2450591" y="2743200"/>
-            <a:ext cx="1783080" cy="1188720"/>
+            <a:off x="548640" y="1600200"/>
+            <a:ext cx="5394960" cy="310896"/>
           </a:xfrm>
           <a:prstGeom prst="roundRect">
             <a:avLst/>
           </a:prstGeom>
           <a:solidFill>
-            <a:srgbClr val="FAF7F0"/>
+            <a:srgbClr val="1B2A41"/>
           </a:solidFill>
           <a:ln w="15875">
             <a:solidFill>
@@ -7438,473 +7884,297 @@
           <a:p>
             <a:pPr algn="ctr"/>
             <a:r>
-              <a:rPr sz="1050" b="1">
-                <a:solidFill>
-                  <a:srgbClr val="1B2A41"/>
-                </a:solidFill>
-                <a:latin typeface="Avenir Next"/>
-              </a:rPr>
-              <a:t>ENTRY 0412</a:t>
-            </a:r>
-          </a:p>
-          <a:p>
-            <a:pPr algn="ctr"/>
-            <a:r>
-              <a:rPr sz="1050" b="0">
-                <a:solidFill>
-                  <a:srgbClr val="1B2A41"/>
-                </a:solidFill>
-                <a:latin typeface="Avenir Next"/>
-              </a:rPr>
-              <a:t>mac b44a…91c7</a:t>
-            </a:r>
-          </a:p>
-        </p:txBody>
-      </p:sp>
-      <p:cxnSp>
-        <p:nvCxnSpPr>
-          <p:cNvPr id="5" name="Connector 4"/>
-          <p:cNvCxnSpPr/>
-          <p:nvPr/>
-        </p:nvCxnSpPr>
-        <p:spPr>
-          <a:xfrm>
-            <a:off x="2249423" y="3337560"/>
-            <a:ext cx="201168" cy="0"/>
-          </a:xfrm>
-          <a:prstGeom prst="line">
-            <a:avLst/>
-          </a:prstGeom>
-          <a:ln w="28575">
-            <a:solidFill>
-              <a:srgbClr val="0E7C7B"/>
-            </a:solidFill>
-            <a:tailEnd type="arrow"/>
-          </a:ln>
-        </p:spPr>
-        <p:style>
-          <a:lnRef idx="2">
-            <a:schemeClr val="accent1"/>
-          </a:lnRef>
-          <a:fillRef idx="0">
-            <a:schemeClr val="accent1"/>
-          </a:fillRef>
-          <a:effectRef idx="1">
-            <a:schemeClr val="accent1"/>
-          </a:effectRef>
-          <a:fontRef idx="minor">
-            <a:schemeClr val="tx1"/>
-          </a:fontRef>
-        </p:style>
-      </p:cxnSp>
-      <p:sp>
-        <p:nvSpPr>
-          <p:cNvPr id="6" name="Rounded Rectangle 5"/>
-          <p:cNvSpPr/>
-          <p:nvPr/>
-        </p:nvSpPr>
-        <p:spPr>
-          <a:xfrm>
-            <a:off x="4398264" y="2743200"/>
-            <a:ext cx="1783080" cy="1188720"/>
-          </a:xfrm>
-          <a:prstGeom prst="roundRect">
-            <a:avLst/>
-          </a:prstGeom>
-          <a:solidFill>
-            <a:srgbClr val="E7EEF2"/>
-          </a:solidFill>
-          <a:ln w="15875">
-            <a:solidFill>
-              <a:srgbClr val="1B2A41"/>
-            </a:solidFill>
-          </a:ln>
-        </p:spPr>
-        <p:style>
-          <a:lnRef idx="1">
-            <a:schemeClr val="accent1"/>
-          </a:lnRef>
-          <a:fillRef idx="3">
-            <a:schemeClr val="accent1"/>
-          </a:fillRef>
-          <a:effectRef idx="2">
-            <a:schemeClr val="accent1"/>
-          </a:effectRef>
-          <a:fontRef idx="minor">
-            <a:schemeClr val="lt1"/>
-          </a:fontRef>
-        </p:style>
-        <p:txBody>
-          <a:bodyPr rtlCol="0" anchor="ctr" wrap="square"/>
-          <a:lstStyle/>
-          <a:p>
-            <a:pPr algn="ctr"/>
-            <a:r>
-              <a:rPr sz="1050" b="1">
-                <a:solidFill>
-                  <a:srgbClr val="1B2A41"/>
-                </a:solidFill>
-                <a:latin typeface="Avenir Next"/>
-              </a:rPr>
-              <a:t>… verified walk …</a:t>
-            </a:r>
-          </a:p>
-          <a:p>
-            <a:pPr algn="ctr"/>
-            <a:r>
-              <a:rPr sz="1050" b="0">
-                <a:solidFill>
-                  <a:srgbClr val="1B2A41"/>
-                </a:solidFill>
-                <a:latin typeface="Avenir Next"/>
-              </a:rPr>
-              <a:t>0411 → 0410 → … → genesis</a:t>
-            </a:r>
-          </a:p>
-        </p:txBody>
-      </p:sp>
-      <p:cxnSp>
-        <p:nvCxnSpPr>
-          <p:cNvPr id="7" name="Connector 6"/>
-          <p:cNvCxnSpPr/>
-          <p:nvPr/>
-        </p:nvCxnSpPr>
-        <p:spPr>
-          <a:xfrm>
-            <a:off x="4197096" y="3337560"/>
-            <a:ext cx="201168" cy="0"/>
-          </a:xfrm>
-          <a:prstGeom prst="line">
-            <a:avLst/>
-          </a:prstGeom>
-          <a:ln w="28575">
-            <a:solidFill>
-              <a:srgbClr val="0E7C7B"/>
-            </a:solidFill>
-            <a:tailEnd type="arrow"/>
-          </a:ln>
-        </p:spPr>
-        <p:style>
-          <a:lnRef idx="2">
-            <a:schemeClr val="accent1"/>
-          </a:lnRef>
-          <a:fillRef idx="0">
-            <a:schemeClr val="accent1"/>
-          </a:fillRef>
-          <a:effectRef idx="1">
-            <a:schemeClr val="accent1"/>
-          </a:effectRef>
-          <a:fontRef idx="minor">
-            <a:schemeClr val="tx1"/>
-          </a:fontRef>
-        </p:style>
-      </p:cxnSp>
-      <p:sp>
-        <p:nvSpPr>
-          <p:cNvPr id="8" name="Rounded Rectangle 7"/>
-          <p:cNvSpPr/>
-          <p:nvPr/>
-        </p:nvSpPr>
-        <p:spPr>
-          <a:xfrm>
-            <a:off x="6345936" y="2743200"/>
-            <a:ext cx="1783080" cy="1188720"/>
-          </a:xfrm>
-          <a:prstGeom prst="roundRect">
-            <a:avLst/>
-          </a:prstGeom>
-          <a:solidFill>
-            <a:srgbClr val="E7EEF2"/>
-          </a:solidFill>
-          <a:ln w="15875">
-            <a:solidFill>
-              <a:srgbClr val="1B2A41"/>
-            </a:solidFill>
-          </a:ln>
-        </p:spPr>
-        <p:style>
-          <a:lnRef idx="1">
-            <a:schemeClr val="accent1"/>
-          </a:lnRef>
-          <a:fillRef idx="3">
-            <a:schemeClr val="accent1"/>
-          </a:fillRef>
-          <a:effectRef idx="2">
-            <a:schemeClr val="accent1"/>
-          </a:effectRef>
-          <a:fontRef idx="minor">
-            <a:schemeClr val="lt1"/>
-          </a:fontRef>
-        </p:style>
-        <p:txBody>
-          <a:bodyPr rtlCol="0" anchor="ctr" wrap="square"/>
-          <a:lstStyle/>
-          <a:p>
-            <a:pPr algn="ctr"/>
-            <a:r>
-              <a:rPr sz="1050" b="1">
-                <a:solidFill>
-                  <a:srgbClr val="1B2A41"/>
-                </a:solidFill>
-                <a:latin typeface="Avenir Next"/>
-              </a:rPr>
-              <a:t>DAY ROOTS</a:t>
-            </a:r>
-          </a:p>
-          <a:p>
-            <a:pPr algn="ctr"/>
-            <a:r>
-              <a:rPr sz="1050" b="0">
-                <a:solidFill>
-                  <a:srgbClr val="1B2A41"/>
-                </a:solidFill>
-                <a:latin typeface="Avenir Next"/>
-              </a:rPr>
-              <a:t>root' == root, each day</a:t>
-            </a:r>
-          </a:p>
-        </p:txBody>
-      </p:sp>
-      <p:cxnSp>
-        <p:nvCxnSpPr>
-          <p:cNvPr id="9" name="Connector 8"/>
-          <p:cNvCxnSpPr/>
-          <p:nvPr/>
-        </p:nvCxnSpPr>
-        <p:spPr>
-          <a:xfrm>
-            <a:off x="6144768" y="3337560"/>
-            <a:ext cx="201168" cy="0"/>
-          </a:xfrm>
-          <a:prstGeom prst="line">
-            <a:avLst/>
-          </a:prstGeom>
-          <a:ln w="28575">
-            <a:solidFill>
-              <a:srgbClr val="0E7C7B"/>
-            </a:solidFill>
-            <a:tailEnd type="arrow"/>
-          </a:ln>
-        </p:spPr>
-        <p:style>
-          <a:lnRef idx="2">
-            <a:schemeClr val="accent1"/>
-          </a:lnRef>
-          <a:fillRef idx="0">
-            <a:schemeClr val="accent1"/>
-          </a:fillRef>
-          <a:effectRef idx="1">
-            <a:schemeClr val="accent1"/>
-          </a:effectRef>
-          <a:fontRef idx="minor">
-            <a:schemeClr val="tx1"/>
-          </a:fontRef>
-        </p:style>
-      </p:cxnSp>
-      <p:sp>
-        <p:nvSpPr>
-          <p:cNvPr id="10" name="Rounded Rectangle 9"/>
-          <p:cNvSpPr/>
-          <p:nvPr/>
-        </p:nvSpPr>
-        <p:spPr>
-          <a:xfrm>
-            <a:off x="8293608" y="2743200"/>
-            <a:ext cx="1783080" cy="1188720"/>
-          </a:xfrm>
-          <a:prstGeom prst="roundRect">
-            <a:avLst/>
-          </a:prstGeom>
-          <a:solidFill>
-            <a:srgbClr val="E7EEF2"/>
-          </a:solidFill>
-          <a:ln w="15875">
-            <a:solidFill>
-              <a:srgbClr val="0E7C7B"/>
-            </a:solidFill>
-          </a:ln>
-        </p:spPr>
-        <p:style>
-          <a:lnRef idx="1">
-            <a:schemeClr val="accent1"/>
-          </a:lnRef>
-          <a:fillRef idx="3">
-            <a:schemeClr val="accent1"/>
-          </a:fillRef>
-          <a:effectRef idx="2">
-            <a:schemeClr val="accent1"/>
-          </a:effectRef>
-          <a:fontRef idx="minor">
-            <a:schemeClr val="lt1"/>
-          </a:fontRef>
-        </p:style>
-        <p:txBody>
-          <a:bodyPr rtlCol="0" anchor="ctr" wrap="square"/>
-          <a:lstStyle/>
-          <a:p>
-            <a:pPr algn="ctr"/>
-            <a:r>
-              <a:rPr sz="1050" b="1">
-                <a:solidFill>
-                  <a:srgbClr val="1B2A41"/>
-                </a:solidFill>
-                <a:latin typeface="Avenir Next"/>
-              </a:rPr>
-              <a:t>SEALS</a:t>
-            </a:r>
-          </a:p>
-          <a:p>
-            <a:pPr algn="ctr"/>
-            <a:r>
-              <a:rPr sz="1050" b="0">
-                <a:solidFill>
-                  <a:srgbClr val="1B2A41"/>
-                </a:solidFill>
-                <a:latin typeface="Avenir Next"/>
-              </a:rPr>
-              <a:t>signed + published, T+0</a:t>
-            </a:r>
-          </a:p>
-        </p:txBody>
-      </p:sp>
-      <p:cxnSp>
-        <p:nvCxnSpPr>
-          <p:cNvPr id="11" name="Connector 10"/>
-          <p:cNvCxnSpPr/>
-          <p:nvPr/>
-        </p:nvCxnSpPr>
-        <p:spPr>
-          <a:xfrm>
-            <a:off x="8092440" y="3337560"/>
-            <a:ext cx="201168" cy="0"/>
-          </a:xfrm>
-          <a:prstGeom prst="line">
-            <a:avLst/>
-          </a:prstGeom>
-          <a:ln w="28575">
-            <a:solidFill>
-              <a:srgbClr val="0E7C7B"/>
-            </a:solidFill>
-            <a:tailEnd type="arrow"/>
-          </a:ln>
-        </p:spPr>
-        <p:style>
-          <a:lnRef idx="2">
-            <a:schemeClr val="accent1"/>
-          </a:lnRef>
-          <a:fillRef idx="0">
-            <a:schemeClr val="accent1"/>
-          </a:fillRef>
-          <a:effectRef idx="1">
-            <a:schemeClr val="accent1"/>
-          </a:effectRef>
-          <a:fontRef idx="minor">
-            <a:schemeClr val="tx1"/>
-          </a:fontRef>
-        </p:style>
-      </p:cxnSp>
-      <p:sp>
-        <p:nvSpPr>
-          <p:cNvPr id="12" name="Rounded Rectangle 11"/>
-          <p:cNvSpPr/>
-          <p:nvPr/>
-        </p:nvSpPr>
-        <p:spPr>
-          <a:xfrm>
-            <a:off x="10241280" y="2743200"/>
-            <a:ext cx="1783080" cy="1188720"/>
-          </a:xfrm>
-          <a:prstGeom prst="roundRect">
-            <a:avLst/>
-          </a:prstGeom>
-          <a:solidFill>
-            <a:srgbClr val="1B2A41"/>
-          </a:solidFill>
-          <a:ln w="15875">
-            <a:solidFill>
-              <a:srgbClr val="0E7C7B"/>
-            </a:solidFill>
-          </a:ln>
-        </p:spPr>
-        <p:style>
-          <a:lnRef idx="1">
-            <a:schemeClr val="accent1"/>
-          </a:lnRef>
-          <a:fillRef idx="3">
-            <a:schemeClr val="accent1"/>
-          </a:fillRef>
-          <a:effectRef idx="2">
-            <a:schemeClr val="accent1"/>
-          </a:effectRef>
-          <a:fontRef idx="minor">
-            <a:schemeClr val="lt1"/>
-          </a:fontRef>
-        </p:style>
-        <p:txBody>
-          <a:bodyPr rtlCol="0" anchor="ctr" wrap="square"/>
-          <a:lstStyle/>
-          <a:p>
-            <a:pPr algn="ctr"/>
-            <a:r>
-              <a:rPr sz="1050" b="1">
+              <a:rPr sz="1150" b="1">
                 <a:solidFill>
                   <a:srgbClr val="FAF7F0"/>
                 </a:solidFill>
-                <a:latin typeface="Avenir Next"/>
-              </a:rPr>
-              <a:t>MANIFEST</a:t>
-            </a:r>
-          </a:p>
-          <a:p>
-            <a:pPr algn="ctr"/>
-            <a:r>
-              <a:rPr sz="1050" b="0">
-                <a:solidFill>
-                  <a:srgbClr val="FAF7F0"/>
-                </a:solidFill>
-                <a:latin typeface="Avenir Next"/>
-              </a:rPr>
-              <a:t>keys vouched, roles split</a:t>
-            </a:r>
-          </a:p>
-        </p:txBody>
-      </p:sp>
-      <p:cxnSp>
-        <p:nvCxnSpPr>
-          <p:cNvPr id="13" name="Connector 12"/>
-          <p:cNvCxnSpPr/>
-          <p:nvPr/>
-        </p:nvCxnSpPr>
-        <p:spPr>
-          <a:xfrm>
-            <a:off x="10040111" y="3337560"/>
-            <a:ext cx="201169" cy="0"/>
-          </a:xfrm>
-          <a:prstGeom prst="line">
-            <a:avLst/>
-          </a:prstGeom>
-          <a:ln w="28575">
-            <a:solidFill>
-              <a:srgbClr val="0E7C7B"/>
-            </a:solidFill>
-            <a:tailEnd type="arrow"/>
-          </a:ln>
-        </p:spPr>
-        <p:style>
-          <a:lnRef idx="2">
-            <a:schemeClr val="accent1"/>
-          </a:lnRef>
-          <a:fillRef idx="0">
-            <a:schemeClr val="accent1"/>
-          </a:fillRef>
-          <a:effectRef idx="1">
-            <a:schemeClr val="accent1"/>
-          </a:effectRef>
-          <a:fontRef idx="minor">
-            <a:schemeClr val="tx1"/>
-          </a:fontRef>
-        </p:style>
-      </p:cxnSp>
+                <a:latin typeface="Menlo"/>
+              </a:rPr>
+              <a:t>KEY REGISTRY MANIFEST  (HSM-signed)</a:t>
+            </a:r>
+          </a:p>
+        </p:txBody>
+      </p:sp>
+      <p:sp>
+        <p:nvSpPr>
+          <p:cNvPr id="6" name="TextBox 5"/>
+          <p:cNvSpPr txBox="1"/>
+          <p:nvPr/>
+        </p:nvSpPr>
+        <p:spPr>
+          <a:xfrm>
+            <a:off x="658368" y="1947672"/>
+            <a:ext cx="5212080" cy="237744"/>
+          </a:xfrm>
+          <a:prstGeom prst="rect">
+            <a:avLst/>
+          </a:prstGeom>
+          <a:noFill/>
+        </p:spPr>
+        <p:txBody>
+          <a:bodyPr wrap="square">
+            <a:spAutoFit/>
+          </a:bodyPr>
+          <a:lstStyle/>
+          <a:p>
+            <a:pPr algn="l"/>
+            <a:r>
+              <a:rPr sz="1050" b="0" i="0">
+                <a:solidFill>
+                  <a:srgbClr val="1B2A41"/>
+                </a:solidFill>
+                <a:latin typeface="Menlo"/>
+              </a:rPr>
+              <a:t>manifest_root : m-88c2…511a</a:t>
+            </a:r>
+          </a:p>
+        </p:txBody>
+      </p:sp>
+      <p:sp>
+        <p:nvSpPr>
+          <p:cNvPr id="7" name="TextBox 6"/>
+          <p:cNvSpPr txBox="1"/>
+          <p:nvPr/>
+        </p:nvSpPr>
+        <p:spPr>
+          <a:xfrm>
+            <a:off x="658368" y="2185415"/>
+            <a:ext cx="5212080" cy="237744"/>
+          </a:xfrm>
+          <a:prstGeom prst="rect">
+            <a:avLst/>
+          </a:prstGeom>
+          <a:noFill/>
+        </p:spPr>
+        <p:txBody>
+          <a:bodyPr wrap="square">
+            <a:spAutoFit/>
+          </a:bodyPr>
+          <a:lstStyle/>
+          <a:p>
+            <a:pPr algn="l"/>
+            <a:r>
+              <a:rPr sz="1050" b="0" i="0">
+                <a:solidFill>
+                  <a:srgbClr val="1B2A41"/>
+                </a:solidFill>
+                <a:latin typeface="Menlo"/>
+              </a:rPr>
+              <a:t>signed_by     : hsm-registry-root</a:t>
+            </a:r>
+          </a:p>
+        </p:txBody>
+      </p:sp>
+      <p:sp>
+        <p:nvSpPr>
+          <p:cNvPr id="8" name="TextBox 7"/>
+          <p:cNvSpPr txBox="1"/>
+          <p:nvPr/>
+        </p:nvSpPr>
+        <p:spPr>
+          <a:xfrm>
+            <a:off x="658368" y="2423159"/>
+            <a:ext cx="5212080" cy="237744"/>
+          </a:xfrm>
+          <a:prstGeom prst="rect">
+            <a:avLst/>
+          </a:prstGeom>
+          <a:noFill/>
+        </p:spPr>
+        <p:txBody>
+          <a:bodyPr wrap="square">
+            <a:spAutoFit/>
+          </a:bodyPr>
+          <a:lstStyle/>
+          <a:p>
+            <a:pPr algn="l"/>
+            <a:r>
+              <a:rPr sz="1050" b="0" i="0">
+                <a:solidFill>
+                  <a:srgbClr val="1B2A41"/>
+                </a:solidFill>
+                <a:latin typeface="Menlo"/>
+              </a:rPr>
+              <a:t>sig           : ed25519:2f90…c6d3</a:t>
+            </a:r>
+          </a:p>
+        </p:txBody>
+      </p:sp>
+      <p:sp>
+        <p:nvSpPr>
+          <p:cNvPr id="9" name="TextBox 8"/>
+          <p:cNvSpPr txBox="1"/>
+          <p:nvPr/>
+        </p:nvSpPr>
+        <p:spPr>
+          <a:xfrm>
+            <a:off x="658368" y="2660903"/>
+            <a:ext cx="5212080" cy="237744"/>
+          </a:xfrm>
+          <a:prstGeom prst="rect">
+            <a:avLst/>
+          </a:prstGeom>
+          <a:noFill/>
+        </p:spPr>
+        <p:txBody>
+          <a:bodyPr wrap="square">
+            <a:spAutoFit/>
+          </a:bodyPr>
+          <a:lstStyle/>
+          <a:p>
+            <a:pPr algn="l"/>
+            <a:r>
+              <a:rPr sz="1050" b="0" i="0">
+                <a:solidFill>
+                  <a:srgbClr val="1B2A41"/>
+                </a:solidFill>
+                <a:latin typeface="Menlo"/>
+              </a:rPr>
+              <a:t>─────────────────────────────────</a:t>
+            </a:r>
+          </a:p>
+        </p:txBody>
+      </p:sp>
+      <p:sp>
+        <p:nvSpPr>
+          <p:cNvPr id="10" name="TextBox 9"/>
+          <p:cNvSpPr txBox="1"/>
+          <p:nvPr/>
+        </p:nvSpPr>
+        <p:spPr>
+          <a:xfrm>
+            <a:off x="658368" y="2898647"/>
+            <a:ext cx="5212080" cy="237744"/>
+          </a:xfrm>
+          <a:prstGeom prst="rect">
+            <a:avLst/>
+          </a:prstGeom>
+          <a:noFill/>
+        </p:spPr>
+        <p:txBody>
+          <a:bodyPr wrap="square">
+            <a:spAutoFit/>
+          </a:bodyPr>
+          <a:lstStyle/>
+          <a:p>
+            <a:pPr algn="l"/>
+            <a:r>
+              <a:rPr sz="1050" b="0" i="0">
+                <a:solidFill>
+                  <a:srgbClr val="C99A2E"/>
+                </a:solidFill>
+                <a:latin typeface="Menlo"/>
+              </a:rPr>
+              <a:t>ikm-2025-Q2-07 : valid 2025-04-01 → 2025-06-30</a:t>
+            </a:r>
+          </a:p>
+        </p:txBody>
+      </p:sp>
+      <p:sp>
+        <p:nvSpPr>
+          <p:cNvPr id="11" name="TextBox 10"/>
+          <p:cNvSpPr txBox="1"/>
+          <p:nvPr/>
+        </p:nvSpPr>
+        <p:spPr>
+          <a:xfrm>
+            <a:off x="658368" y="3136391"/>
+            <a:ext cx="5212080" cy="237744"/>
+          </a:xfrm>
+          <a:prstGeom prst="rect">
+            <a:avLst/>
+          </a:prstGeom>
+          <a:noFill/>
+        </p:spPr>
+        <p:txBody>
+          <a:bodyPr wrap="square">
+            <a:spAutoFit/>
+          </a:bodyPr>
+          <a:lstStyle/>
+          <a:p>
+            <a:pPr algn="l"/>
+            <a:r>
+              <a:rPr sz="1050" b="0" i="0">
+                <a:solidFill>
+                  <a:srgbClr val="0E7C7B"/>
+                </a:solidFill>
+                <a:latin typeface="Menlo"/>
+              </a:rPr>
+              <a:t>hsm-seal-01    : valid 2024-11-15 → present</a:t>
+            </a:r>
+          </a:p>
+        </p:txBody>
+      </p:sp>
+      <p:sp>
+        <p:nvSpPr>
+          <p:cNvPr id="12" name="TextBox 11"/>
+          <p:cNvSpPr txBox="1"/>
+          <p:nvPr/>
+        </p:nvSpPr>
+        <p:spPr>
+          <a:xfrm>
+            <a:off x="658368" y="3374135"/>
+            <a:ext cx="5212080" cy="237744"/>
+          </a:xfrm>
+          <a:prstGeom prst="rect">
+            <a:avLst/>
+          </a:prstGeom>
+          <a:noFill/>
+        </p:spPr>
+        <p:txBody>
+          <a:bodyPr wrap="square">
+            <a:spAutoFit/>
+          </a:bodyPr>
+          <a:lstStyle/>
+          <a:p>
+            <a:pPr algn="l"/>
+            <a:r>
+              <a:rPr sz="1050" b="0" i="0">
+                <a:solidFill>
+                  <a:srgbClr val="0E7C7B"/>
+                </a:solidFill>
+                <a:latin typeface="Menlo"/>
+              </a:rPr>
+              <a:t>  fingerprint  : f7:2a:…:9c  ◄ reconcile by hand</a:t>
+            </a:r>
+          </a:p>
+        </p:txBody>
+      </p:sp>
+      <p:sp>
+        <p:nvSpPr>
+          <p:cNvPr id="13" name="TextBox 12"/>
+          <p:cNvSpPr txBox="1"/>
+          <p:nvPr/>
+        </p:nvSpPr>
+        <p:spPr>
+          <a:xfrm>
+            <a:off x="658368" y="3611879"/>
+            <a:ext cx="5212080" cy="237744"/>
+          </a:xfrm>
+          <a:prstGeom prst="rect">
+            <a:avLst/>
+          </a:prstGeom>
+          <a:noFill/>
+        </p:spPr>
+        <p:txBody>
+          <a:bodyPr wrap="square">
+            <a:spAutoFit/>
+          </a:bodyPr>
+          <a:lstStyle/>
+          <a:p>
+            <a:pPr algn="l"/>
+            <a:r>
+              <a:rPr sz="1050" b="0" i="0">
+                <a:solidFill>
+                  <a:srgbClr val="1B2A41"/>
+                </a:solidFill>
+                <a:latin typeface="Menlo"/>
+              </a:rPr>
+              <a:t>roles          : registry-root ≠ seal-requester</a:t>
+            </a:r>
+          </a:p>
+        </p:txBody>
+      </p:sp>
       <p:sp>
         <p:nvSpPr>
           <p:cNvPr id="14" name="TextBox 13"/>
@@ -7913,8 +8183,8 @@
         </p:nvSpPr>
         <p:spPr>
           <a:xfrm>
-            <a:off x="548640" y="4480560"/>
-            <a:ext cx="11155680" cy="1554480"/>
+            <a:off x="6400800" y="1737360"/>
+            <a:ext cx="5212080" cy="3291840"/>
           </a:xfrm>
           <a:prstGeom prst="rect">
             <a:avLst/>
@@ -7929,37 +8199,177 @@
           <a:p>
             <a:pPr algn="l"/>
             <a:r>
-              <a:rPr sz="1500" b="0" i="0">
-                <a:solidFill>
-                  <a:srgbClr val="1B2A41"/>
-                </a:solidFill>
-                <a:latin typeface="Avenir Next"/>
-              </a:rPr>
-              <a:t>Outcome is binary and reproducible: byte-equal reconstruction of the record's history, or a break</a:t>
-            </a:r>
-          </a:p>
-          <a:p>
-            <a:pPr algn="l"/>
-            <a:r>
-              <a:rPr sz="1500" b="0" i="0">
-                <a:solidFill>
-                  <a:srgbClr val="1B2A41"/>
-                </a:solidFill>
-                <a:latin typeface="Avenir Next"/>
-              </a:rPr>
-              <a:t>at an exact hop / exact byte offset showing precisely where history diverges. Any examiner running</a:t>
-            </a:r>
-          </a:p>
-          <a:p>
-            <a:pPr algn="l"/>
-            <a:r>
-              <a:rPr sz="1500" b="0" i="0">
-                <a:solidFill>
-                  <a:srgbClr val="1B2A41"/>
-                </a:solidFill>
-                <a:latin typeface="Avenir Next"/>
-              </a:rPr>
-              <a:t>the same procedure gets the same verdict — that is what replaces “as represented by management.”</a:t>
+              <a:rPr sz="1300" b="0" i="0">
+                <a:solidFill>
+                  <a:srgbClr val="1B2A41"/>
+                </a:solidFill>
+                <a:latin typeface="Avenir Next"/>
+              </a:rPr>
+              <a:t>Three checks:</a:t>
+            </a:r>
+          </a:p>
+          <a:p>
+            <a:pPr algn="l"/>
+          </a:p>
+          <a:p>
+            <a:pPr algn="l"/>
+            <a:r>
+              <a:rPr sz="1300" b="0" i="0">
+                <a:solidFill>
+                  <a:srgbClr val="1B2A41"/>
+                </a:solidFill>
+                <a:latin typeface="Avenir Next"/>
+              </a:rPr>
+              <a:t>1.  The entry keys you used (ikm-2025-Q2-07)</a:t>
+            </a:r>
+          </a:p>
+          <a:p>
+            <a:pPr algn="l"/>
+            <a:r>
+              <a:rPr sz="1300" b="0" i="0">
+                <a:solidFill>
+                  <a:srgbClr val="1B2A41"/>
+                </a:solidFill>
+                <a:latin typeface="Avenir Next"/>
+              </a:rPr>
+              <a:t>     were valid in their entries' windows</a:t>
+            </a:r>
+          </a:p>
+          <a:p>
+            <a:pPr algn="l"/>
+          </a:p>
+          <a:p>
+            <a:pPr algn="l"/>
+            <a:r>
+              <a:rPr sz="1300" b="0" i="0">
+                <a:solidFill>
+                  <a:srgbClr val="1B2A41"/>
+                </a:solidFill>
+                <a:latin typeface="Avenir Next"/>
+              </a:rPr>
+              <a:t>2.  The seal signer (hsm-seal-01) was valid</a:t>
+            </a:r>
+          </a:p>
+          <a:p>
+            <a:pPr algn="l"/>
+            <a:r>
+              <a:rPr sz="1300" b="0" i="0">
+                <a:solidFill>
+                  <a:srgbClr val="1B2A41"/>
+                </a:solidFill>
+                <a:latin typeface="Avenir Next"/>
+              </a:rPr>
+              <a:t>     on May 23, 2025 — fingerprint reconciled</a:t>
+            </a:r>
+          </a:p>
+          <a:p>
+            <a:pPr algn="l"/>
+            <a:r>
+              <a:rPr sz="1300" b="0" i="0">
+                <a:solidFill>
+                  <a:srgbClr val="1B2A41"/>
+                </a:solidFill>
+                <a:latin typeface="Avenir Next"/>
+              </a:rPr>
+              <a:t>     with YOUR tooling against the published</a:t>
+            </a:r>
+          </a:p>
+          <a:p>
+            <a:pPr algn="l"/>
+            <a:r>
+              <a:rPr sz="1300" b="0" i="0">
+                <a:solidFill>
+                  <a:srgbClr val="1B2A41"/>
+                </a:solidFill>
+                <a:latin typeface="Avenir Next"/>
+              </a:rPr>
+              <a:t>     manifest root</a:t>
+            </a:r>
+          </a:p>
+          <a:p>
+            <a:pPr algn="l"/>
+          </a:p>
+          <a:p>
+            <a:pPr algn="l"/>
+            <a:r>
+              <a:rPr sz="1300" b="0" i="0">
+                <a:solidFill>
+                  <a:srgbClr val="1B2A41"/>
+                </a:solidFill>
+                <a:latin typeface="Avenir Next"/>
+              </a:rPr>
+              <a:t>3.  Separation of duties: the role holding the</a:t>
+            </a:r>
+          </a:p>
+          <a:p>
+            <a:pPr algn="l"/>
+            <a:r>
+              <a:rPr sz="1300" b="0" i="0">
+                <a:solidFill>
+                  <a:srgbClr val="1B2A41"/>
+                </a:solidFill>
+                <a:latin typeface="Avenir Next"/>
+              </a:rPr>
+              <a:t>     registry root can't request seals and can't</a:t>
+            </a:r>
+          </a:p>
+          <a:p>
+            <a:pPr algn="l"/>
+            <a:r>
+              <a:rPr sz="1300" b="0" i="0">
+                <a:solidFill>
+                  <a:srgbClr val="1B2A41"/>
+                </a:solidFill>
+                <a:latin typeface="Avenir Next"/>
+              </a:rPr>
+              <a:t>     extract keys — forging the manifest means</a:t>
+            </a:r>
+          </a:p>
+          <a:p>
+            <a:pPr algn="l"/>
+            <a:r>
+              <a:rPr sz="1300" b="0" i="0">
+                <a:solidFill>
+                  <a:srgbClr val="1B2A41"/>
+                </a:solidFill>
+                <a:latin typeface="Avenir Next"/>
+              </a:rPr>
+              <a:t>     defeating hardware custody, not policy</a:t>
+            </a:r>
+          </a:p>
+        </p:txBody>
+      </p:sp>
+      <p:sp>
+        <p:nvSpPr>
+          <p:cNvPr id="15" name="TextBox 14"/>
+          <p:cNvSpPr txBox="1"/>
+          <p:nvPr/>
+        </p:nvSpPr>
+        <p:spPr>
+          <a:xfrm>
+            <a:off x="548640" y="5257800"/>
+            <a:ext cx="11247120" cy="731520"/>
+          </a:xfrm>
+          <a:prstGeom prst="rect">
+            <a:avLst/>
+          </a:prstGeom>
+          <a:noFill/>
+        </p:spPr>
+        <p:txBody>
+          <a:bodyPr wrap="square">
+            <a:spAutoFit/>
+          </a:bodyPr>
+          <a:lstStyle/>
+          <a:p>
+            <a:pPr algn="l"/>
+            <a:r>
+              <a:rPr sz="1400" b="0" i="1">
+                <a:solidFill>
+                  <a:srgbClr val="6B7480"/>
+                </a:solidFill>
+                <a:latin typeface="Avenir Next"/>
+              </a:rPr>
+              <a:t>This is the examiner's independence step — no bank tooling, no bank word. (Danny Tran's turn, ch. 24.)</a:t>
             </a:r>
           </a:p>
         </p:txBody>
@@ -8020,56 +8430,21 @@
                 </a:solidFill>
                 <a:latin typeface="Avenir Next"/>
               </a:rPr>
-              <a:t>The shortcut — Merkle inclusion proof</a:t>
-            </a:r>
-          </a:p>
-        </p:txBody>
-      </p:sp>
-      <p:sp>
-        <p:nvSpPr>
-          <p:cNvPr id="3" name="TextBox 2"/>
-          <p:cNvSpPr txBox="1"/>
-          <p:nvPr/>
-        </p:nvSpPr>
-        <p:spPr>
-          <a:xfrm>
-            <a:off x="548640" y="868680"/>
-            <a:ext cx="11064240" cy="457200"/>
-          </a:xfrm>
-          <a:prstGeom prst="rect">
-            <a:avLst/>
-          </a:prstGeom>
-          <a:noFill/>
-        </p:spPr>
-        <p:txBody>
-          <a:bodyPr wrap="square">
-            <a:spAutoFit/>
-          </a:bodyPr>
-          <a:lstStyle/>
-          <a:p>
-            <a:pPr algn="l"/>
-            <a:r>
-              <a:rPr sz="1400" b="0" i="1">
-                <a:solidFill>
-                  <a:srgbClr val="6B7480"/>
-                </a:solidFill>
-                <a:latin typeface="Avenir Next"/>
-              </a:rPr>
-              <a:t>When the question is only “is this record in the sealed set?” — skip the full walk</a:t>
-            </a:r>
-          </a:p>
-        </p:txBody>
-      </p:sp>
-      <p:sp>
-        <p:nvSpPr>
-          <p:cNvPr id="4" name="Rounded Rectangle 3"/>
+              <a:t>Step 5 — the reconstructed lineage, end to end</a:t>
+            </a:r>
+          </a:p>
+        </p:txBody>
+      </p:sp>
+      <p:sp>
+        <p:nvSpPr>
+          <p:cNvPr id="3" name="Rounded Rectangle 2"/>
           <p:cNvSpPr/>
           <p:nvPr/>
         </p:nvSpPr>
         <p:spPr>
           <a:xfrm>
-            <a:off x="640080" y="1645920"/>
-            <a:ext cx="4937760" cy="2048256"/>
+            <a:off x="502920" y="2743200"/>
+            <a:ext cx="1783080" cy="1188720"/>
           </a:xfrm>
           <a:prstGeom prst="roundRect">
             <a:avLst/>
@@ -8102,25 +8477,46 @@
           <a:lstStyle/>
           <a:p>
             <a:pPr algn="ctr"/>
-          </a:p>
-        </p:txBody>
-      </p:sp>
-      <p:sp>
-        <p:nvSpPr>
-          <p:cNvPr id="5" name="Rounded Rectangle 4"/>
+            <a:r>
+              <a:rPr sz="1050" b="1">
+                <a:solidFill>
+                  <a:srgbClr val="1B2A41"/>
+                </a:solidFill>
+                <a:latin typeface="Avenir Next"/>
+              </a:rPr>
+              <a:t>ARTIFACT</a:t>
+            </a:r>
+          </a:p>
+          <a:p>
+            <a:pPr algn="ctr"/>
+            <a:r>
+              <a:rPr sz="1050" b="0">
+                <a:solidFill>
+                  <a:srgbClr val="1B2A41"/>
+                </a:solidFill>
+                <a:latin typeface="Avenir Next"/>
+              </a:rPr>
+              <a:t>LN-2025-088231</a:t>
+            </a:r>
+          </a:p>
+        </p:txBody>
+      </p:sp>
+      <p:sp>
+        <p:nvSpPr>
+          <p:cNvPr id="4" name="Rounded Rectangle 3"/>
           <p:cNvSpPr/>
           <p:nvPr/>
         </p:nvSpPr>
         <p:spPr>
           <a:xfrm>
-            <a:off x="640080" y="1645920"/>
-            <a:ext cx="4937760" cy="310896"/>
+            <a:off x="2450591" y="2743200"/>
+            <a:ext cx="1783080" cy="1188720"/>
           </a:xfrm>
           <a:prstGeom prst="roundRect">
             <a:avLst/>
           </a:prstGeom>
           <a:solidFill>
-            <a:srgbClr val="1B2A41"/>
+            <a:srgbClr val="FAF7F0"/>
           </a:solidFill>
           <a:ln w="15875">
             <a:solidFill>
@@ -8148,27 +8544,483 @@
           <a:p>
             <a:pPr algn="ctr"/>
             <a:r>
-              <a:rPr sz="1150" b="1">
+              <a:rPr sz="1050" b="1">
+                <a:solidFill>
+                  <a:srgbClr val="1B2A41"/>
+                </a:solidFill>
+                <a:latin typeface="Avenir Next"/>
+              </a:rPr>
+              <a:t>ENTRY 0412</a:t>
+            </a:r>
+          </a:p>
+          <a:p>
+            <a:pPr algn="ctr"/>
+            <a:r>
+              <a:rPr sz="1050" b="0">
+                <a:solidFill>
+                  <a:srgbClr val="1B2A41"/>
+                </a:solidFill>
+                <a:latin typeface="Avenir Next"/>
+              </a:rPr>
+              <a:t>mac b44a…91c7</a:t>
+            </a:r>
+          </a:p>
+        </p:txBody>
+      </p:sp>
+      <p:cxnSp>
+        <p:nvCxnSpPr>
+          <p:cNvPr id="5" name="Connector 4"/>
+          <p:cNvCxnSpPr/>
+          <p:nvPr/>
+        </p:nvCxnSpPr>
+        <p:spPr>
+          <a:xfrm>
+            <a:off x="2249423" y="3337560"/>
+            <a:ext cx="201168" cy="0"/>
+          </a:xfrm>
+          <a:prstGeom prst="line">
+            <a:avLst/>
+          </a:prstGeom>
+          <a:ln w="28575">
+            <a:solidFill>
+              <a:srgbClr val="0E7C7B"/>
+            </a:solidFill>
+            <a:tailEnd type="arrow"/>
+          </a:ln>
+        </p:spPr>
+        <p:style>
+          <a:lnRef idx="2">
+            <a:schemeClr val="accent1"/>
+          </a:lnRef>
+          <a:fillRef idx="0">
+            <a:schemeClr val="accent1"/>
+          </a:fillRef>
+          <a:effectRef idx="1">
+            <a:schemeClr val="accent1"/>
+          </a:effectRef>
+          <a:fontRef idx="minor">
+            <a:schemeClr val="tx1"/>
+          </a:fontRef>
+        </p:style>
+      </p:cxnSp>
+      <p:sp>
+        <p:nvSpPr>
+          <p:cNvPr id="6" name="Rounded Rectangle 5"/>
+          <p:cNvSpPr/>
+          <p:nvPr/>
+        </p:nvSpPr>
+        <p:spPr>
+          <a:xfrm>
+            <a:off x="4398264" y="2743200"/>
+            <a:ext cx="1783080" cy="1188720"/>
+          </a:xfrm>
+          <a:prstGeom prst="roundRect">
+            <a:avLst/>
+          </a:prstGeom>
+          <a:solidFill>
+            <a:srgbClr val="E7EEF2"/>
+          </a:solidFill>
+          <a:ln w="15875">
+            <a:solidFill>
+              <a:srgbClr val="1B2A41"/>
+            </a:solidFill>
+          </a:ln>
+        </p:spPr>
+        <p:style>
+          <a:lnRef idx="1">
+            <a:schemeClr val="accent1"/>
+          </a:lnRef>
+          <a:fillRef idx="3">
+            <a:schemeClr val="accent1"/>
+          </a:fillRef>
+          <a:effectRef idx="2">
+            <a:schemeClr val="accent1"/>
+          </a:effectRef>
+          <a:fontRef idx="minor">
+            <a:schemeClr val="lt1"/>
+          </a:fontRef>
+        </p:style>
+        <p:txBody>
+          <a:bodyPr rtlCol="0" anchor="ctr" wrap="square"/>
+          <a:lstStyle/>
+          <a:p>
+            <a:pPr algn="ctr"/>
+            <a:r>
+              <a:rPr sz="1050" b="1">
+                <a:solidFill>
+                  <a:srgbClr val="1B2A41"/>
+                </a:solidFill>
+                <a:latin typeface="Avenir Next"/>
+              </a:rPr>
+              <a:t>… verified walk …</a:t>
+            </a:r>
+          </a:p>
+          <a:p>
+            <a:pPr algn="ctr"/>
+            <a:r>
+              <a:rPr sz="1050" b="0">
+                <a:solidFill>
+                  <a:srgbClr val="1B2A41"/>
+                </a:solidFill>
+                <a:latin typeface="Avenir Next"/>
+              </a:rPr>
+              <a:t>0411 → 0410 → … → genesis</a:t>
+            </a:r>
+          </a:p>
+        </p:txBody>
+      </p:sp>
+      <p:cxnSp>
+        <p:nvCxnSpPr>
+          <p:cNvPr id="7" name="Connector 6"/>
+          <p:cNvCxnSpPr/>
+          <p:nvPr/>
+        </p:nvCxnSpPr>
+        <p:spPr>
+          <a:xfrm>
+            <a:off x="4197096" y="3337560"/>
+            <a:ext cx="201168" cy="0"/>
+          </a:xfrm>
+          <a:prstGeom prst="line">
+            <a:avLst/>
+          </a:prstGeom>
+          <a:ln w="28575">
+            <a:solidFill>
+              <a:srgbClr val="0E7C7B"/>
+            </a:solidFill>
+            <a:tailEnd type="arrow"/>
+          </a:ln>
+        </p:spPr>
+        <p:style>
+          <a:lnRef idx="2">
+            <a:schemeClr val="accent1"/>
+          </a:lnRef>
+          <a:fillRef idx="0">
+            <a:schemeClr val="accent1"/>
+          </a:fillRef>
+          <a:effectRef idx="1">
+            <a:schemeClr val="accent1"/>
+          </a:effectRef>
+          <a:fontRef idx="minor">
+            <a:schemeClr val="tx1"/>
+          </a:fontRef>
+        </p:style>
+      </p:cxnSp>
+      <p:sp>
+        <p:nvSpPr>
+          <p:cNvPr id="8" name="Rounded Rectangle 7"/>
+          <p:cNvSpPr/>
+          <p:nvPr/>
+        </p:nvSpPr>
+        <p:spPr>
+          <a:xfrm>
+            <a:off x="6345936" y="2743200"/>
+            <a:ext cx="1783080" cy="1188720"/>
+          </a:xfrm>
+          <a:prstGeom prst="roundRect">
+            <a:avLst/>
+          </a:prstGeom>
+          <a:solidFill>
+            <a:srgbClr val="E7EEF2"/>
+          </a:solidFill>
+          <a:ln w="15875">
+            <a:solidFill>
+              <a:srgbClr val="1B2A41"/>
+            </a:solidFill>
+          </a:ln>
+        </p:spPr>
+        <p:style>
+          <a:lnRef idx="1">
+            <a:schemeClr val="accent1"/>
+          </a:lnRef>
+          <a:fillRef idx="3">
+            <a:schemeClr val="accent1"/>
+          </a:fillRef>
+          <a:effectRef idx="2">
+            <a:schemeClr val="accent1"/>
+          </a:effectRef>
+          <a:fontRef idx="minor">
+            <a:schemeClr val="lt1"/>
+          </a:fontRef>
+        </p:style>
+        <p:txBody>
+          <a:bodyPr rtlCol="0" anchor="ctr" wrap="square"/>
+          <a:lstStyle/>
+          <a:p>
+            <a:pPr algn="ctr"/>
+            <a:r>
+              <a:rPr sz="1050" b="1">
+                <a:solidFill>
+                  <a:srgbClr val="1B2A41"/>
+                </a:solidFill>
+                <a:latin typeface="Avenir Next"/>
+              </a:rPr>
+              <a:t>DAY ROOTS</a:t>
+            </a:r>
+          </a:p>
+          <a:p>
+            <a:pPr algn="ctr"/>
+            <a:r>
+              <a:rPr sz="1050" b="0">
+                <a:solidFill>
+                  <a:srgbClr val="1B2A41"/>
+                </a:solidFill>
+                <a:latin typeface="Avenir Next"/>
+              </a:rPr>
+              <a:t>root' == root, each day</a:t>
+            </a:r>
+          </a:p>
+        </p:txBody>
+      </p:sp>
+      <p:cxnSp>
+        <p:nvCxnSpPr>
+          <p:cNvPr id="9" name="Connector 8"/>
+          <p:cNvCxnSpPr/>
+          <p:nvPr/>
+        </p:nvCxnSpPr>
+        <p:spPr>
+          <a:xfrm>
+            <a:off x="6144768" y="3337560"/>
+            <a:ext cx="201168" cy="0"/>
+          </a:xfrm>
+          <a:prstGeom prst="line">
+            <a:avLst/>
+          </a:prstGeom>
+          <a:ln w="28575">
+            <a:solidFill>
+              <a:srgbClr val="0E7C7B"/>
+            </a:solidFill>
+            <a:tailEnd type="arrow"/>
+          </a:ln>
+        </p:spPr>
+        <p:style>
+          <a:lnRef idx="2">
+            <a:schemeClr val="accent1"/>
+          </a:lnRef>
+          <a:fillRef idx="0">
+            <a:schemeClr val="accent1"/>
+          </a:fillRef>
+          <a:effectRef idx="1">
+            <a:schemeClr val="accent1"/>
+          </a:effectRef>
+          <a:fontRef idx="minor">
+            <a:schemeClr val="tx1"/>
+          </a:fontRef>
+        </p:style>
+      </p:cxnSp>
+      <p:sp>
+        <p:nvSpPr>
+          <p:cNvPr id="10" name="Rounded Rectangle 9"/>
+          <p:cNvSpPr/>
+          <p:nvPr/>
+        </p:nvSpPr>
+        <p:spPr>
+          <a:xfrm>
+            <a:off x="8293608" y="2743200"/>
+            <a:ext cx="1783080" cy="1188720"/>
+          </a:xfrm>
+          <a:prstGeom prst="roundRect">
+            <a:avLst/>
+          </a:prstGeom>
+          <a:solidFill>
+            <a:srgbClr val="E7EEF2"/>
+          </a:solidFill>
+          <a:ln w="15875">
+            <a:solidFill>
+              <a:srgbClr val="0E7C7B"/>
+            </a:solidFill>
+          </a:ln>
+        </p:spPr>
+        <p:style>
+          <a:lnRef idx="1">
+            <a:schemeClr val="accent1"/>
+          </a:lnRef>
+          <a:fillRef idx="3">
+            <a:schemeClr val="accent1"/>
+          </a:fillRef>
+          <a:effectRef idx="2">
+            <a:schemeClr val="accent1"/>
+          </a:effectRef>
+          <a:fontRef idx="minor">
+            <a:schemeClr val="lt1"/>
+          </a:fontRef>
+        </p:style>
+        <p:txBody>
+          <a:bodyPr rtlCol="0" anchor="ctr" wrap="square"/>
+          <a:lstStyle/>
+          <a:p>
+            <a:pPr algn="ctr"/>
+            <a:r>
+              <a:rPr sz="1050" b="1">
+                <a:solidFill>
+                  <a:srgbClr val="1B2A41"/>
+                </a:solidFill>
+                <a:latin typeface="Avenir Next"/>
+              </a:rPr>
+              <a:t>SEALS</a:t>
+            </a:r>
+          </a:p>
+          <a:p>
+            <a:pPr algn="ctr"/>
+            <a:r>
+              <a:rPr sz="1050" b="0">
+                <a:solidFill>
+                  <a:srgbClr val="1B2A41"/>
+                </a:solidFill>
+                <a:latin typeface="Avenir Next"/>
+              </a:rPr>
+              <a:t>signed + published, T+0</a:t>
+            </a:r>
+          </a:p>
+        </p:txBody>
+      </p:sp>
+      <p:cxnSp>
+        <p:nvCxnSpPr>
+          <p:cNvPr id="11" name="Connector 10"/>
+          <p:cNvCxnSpPr/>
+          <p:nvPr/>
+        </p:nvCxnSpPr>
+        <p:spPr>
+          <a:xfrm>
+            <a:off x="8092440" y="3337560"/>
+            <a:ext cx="201168" cy="0"/>
+          </a:xfrm>
+          <a:prstGeom prst="line">
+            <a:avLst/>
+          </a:prstGeom>
+          <a:ln w="28575">
+            <a:solidFill>
+              <a:srgbClr val="0E7C7B"/>
+            </a:solidFill>
+            <a:tailEnd type="arrow"/>
+          </a:ln>
+        </p:spPr>
+        <p:style>
+          <a:lnRef idx="2">
+            <a:schemeClr val="accent1"/>
+          </a:lnRef>
+          <a:fillRef idx="0">
+            <a:schemeClr val="accent1"/>
+          </a:fillRef>
+          <a:effectRef idx="1">
+            <a:schemeClr val="accent1"/>
+          </a:effectRef>
+          <a:fontRef idx="minor">
+            <a:schemeClr val="tx1"/>
+          </a:fontRef>
+        </p:style>
+      </p:cxnSp>
+      <p:sp>
+        <p:nvSpPr>
+          <p:cNvPr id="12" name="Rounded Rectangle 11"/>
+          <p:cNvSpPr/>
+          <p:nvPr/>
+        </p:nvSpPr>
+        <p:spPr>
+          <a:xfrm>
+            <a:off x="10241280" y="2743200"/>
+            <a:ext cx="1783080" cy="1188720"/>
+          </a:xfrm>
+          <a:prstGeom prst="roundRect">
+            <a:avLst/>
+          </a:prstGeom>
+          <a:solidFill>
+            <a:srgbClr val="1B2A41"/>
+          </a:solidFill>
+          <a:ln w="15875">
+            <a:solidFill>
+              <a:srgbClr val="0E7C7B"/>
+            </a:solidFill>
+          </a:ln>
+        </p:spPr>
+        <p:style>
+          <a:lnRef idx="1">
+            <a:schemeClr val="accent1"/>
+          </a:lnRef>
+          <a:fillRef idx="3">
+            <a:schemeClr val="accent1"/>
+          </a:fillRef>
+          <a:effectRef idx="2">
+            <a:schemeClr val="accent1"/>
+          </a:effectRef>
+          <a:fontRef idx="minor">
+            <a:schemeClr val="lt1"/>
+          </a:fontRef>
+        </p:style>
+        <p:txBody>
+          <a:bodyPr rtlCol="0" anchor="ctr" wrap="square"/>
+          <a:lstStyle/>
+          <a:p>
+            <a:pPr algn="ctr"/>
+            <a:r>
+              <a:rPr sz="1050" b="1">
                 <a:solidFill>
                   <a:srgbClr val="FAF7F0"/>
                 </a:solidFill>
-                <a:latin typeface="Menlo"/>
-              </a:rPr>
-              <a:t>INCLUSION PROOF for entry 0412</a:t>
-            </a:r>
-          </a:p>
-        </p:txBody>
-      </p:sp>
-      <p:sp>
-        <p:nvSpPr>
-          <p:cNvPr id="6" name="TextBox 5"/>
+                <a:latin typeface="Avenir Next"/>
+              </a:rPr>
+              <a:t>MANIFEST</a:t>
+            </a:r>
+          </a:p>
+          <a:p>
+            <a:pPr algn="ctr"/>
+            <a:r>
+              <a:rPr sz="1050" b="0">
+                <a:solidFill>
+                  <a:srgbClr val="FAF7F0"/>
+                </a:solidFill>
+                <a:latin typeface="Avenir Next"/>
+              </a:rPr>
+              <a:t>keys vouched, roles split</a:t>
+            </a:r>
+          </a:p>
+        </p:txBody>
+      </p:sp>
+      <p:cxnSp>
+        <p:nvCxnSpPr>
+          <p:cNvPr id="13" name="Connector 12"/>
+          <p:cNvCxnSpPr/>
+          <p:nvPr/>
+        </p:nvCxnSpPr>
+        <p:spPr>
+          <a:xfrm>
+            <a:off x="10040111" y="3337560"/>
+            <a:ext cx="201169" cy="0"/>
+          </a:xfrm>
+          <a:prstGeom prst="line">
+            <a:avLst/>
+          </a:prstGeom>
+          <a:ln w="28575">
+            <a:solidFill>
+              <a:srgbClr val="0E7C7B"/>
+            </a:solidFill>
+            <a:tailEnd type="arrow"/>
+          </a:ln>
+        </p:spPr>
+        <p:style>
+          <a:lnRef idx="2">
+            <a:schemeClr val="accent1"/>
+          </a:lnRef>
+          <a:fillRef idx="0">
+            <a:schemeClr val="accent1"/>
+          </a:fillRef>
+          <a:effectRef idx="1">
+            <a:schemeClr val="accent1"/>
+          </a:effectRef>
+          <a:fontRef idx="minor">
+            <a:schemeClr val="tx1"/>
+          </a:fontRef>
+        </p:style>
+      </p:cxnSp>
+      <p:sp>
+        <p:nvSpPr>
+          <p:cNvPr id="14" name="TextBox 13"/>
           <p:cNvSpPr txBox="1"/>
           <p:nvPr/>
         </p:nvSpPr>
         <p:spPr>
           <a:xfrm>
-            <a:off x="749808" y="1993392"/>
-            <a:ext cx="4754880" cy="237744"/>
+            <a:off x="548640" y="4480560"/>
+            <a:ext cx="11155680" cy="1554480"/>
           </a:xfrm>
           <a:prstGeom prst="rect">
             <a:avLst/>
@@ -8183,372 +9035,37 @@
           <a:p>
             <a:pPr algn="l"/>
             <a:r>
-              <a:rPr sz="1050" b="0" i="0">
-                <a:solidFill>
-                  <a:srgbClr val="1B2A41"/>
-                </a:solidFill>
-                <a:latin typeface="Menlo"/>
-              </a:rPr>
-              <a:t>leaf      : mac(0412) = b44a…91c7</a:t>
-            </a:r>
-          </a:p>
-        </p:txBody>
-      </p:sp>
-      <p:sp>
-        <p:nvSpPr>
-          <p:cNvPr id="7" name="TextBox 6"/>
-          <p:cNvSpPr txBox="1"/>
-          <p:nvPr/>
-        </p:nvSpPr>
-        <p:spPr>
-          <a:xfrm>
-            <a:off x="749808" y="2231136"/>
-            <a:ext cx="4754880" cy="237744"/>
-          </a:xfrm>
-          <a:prstGeom prst="rect">
-            <a:avLst/>
-          </a:prstGeom>
-          <a:noFill/>
-        </p:spPr>
-        <p:txBody>
-          <a:bodyPr wrap="square">
-            <a:spAutoFit/>
-          </a:bodyPr>
-          <a:lstStyle/>
-          <a:p>
-            <a:pPr algn="l"/>
-            <a:r>
-              <a:rPr sz="1050" b="0" i="0">
-                <a:solidFill>
-                  <a:srgbClr val="1B2A41"/>
-                </a:solidFill>
-                <a:latin typeface="Menlo"/>
-              </a:rPr>
-              <a:t>sibling 1 : mac(0411) = 5d81…e903</a:t>
-            </a:r>
-          </a:p>
-        </p:txBody>
-      </p:sp>
-      <p:sp>
-        <p:nvSpPr>
-          <p:cNvPr id="8" name="TextBox 7"/>
-          <p:cNvSpPr txBox="1"/>
-          <p:nvPr/>
-        </p:nvSpPr>
-        <p:spPr>
-          <a:xfrm>
-            <a:off x="749808" y="2468880"/>
-            <a:ext cx="4754880" cy="237744"/>
-          </a:xfrm>
-          <a:prstGeom prst="rect">
-            <a:avLst/>
-          </a:prstGeom>
-          <a:noFill/>
-        </p:spPr>
-        <p:txBody>
-          <a:bodyPr wrap="square">
-            <a:spAutoFit/>
-          </a:bodyPr>
-          <a:lstStyle/>
-          <a:p>
-            <a:pPr algn="l"/>
-            <a:r>
-              <a:rPr sz="1050" b="0" i="0">
-                <a:solidFill>
-                  <a:srgbClr val="1B2A41"/>
-                </a:solidFill>
-                <a:latin typeface="Menlo"/>
-              </a:rPr>
-              <a:t>sibling 2 : node(0409-0410) = e3c7…20aa</a:t>
-            </a:r>
-          </a:p>
-        </p:txBody>
-      </p:sp>
-      <p:sp>
-        <p:nvSpPr>
-          <p:cNvPr id="9" name="TextBox 8"/>
-          <p:cNvSpPr txBox="1"/>
-          <p:nvPr/>
-        </p:nvSpPr>
-        <p:spPr>
-          <a:xfrm>
-            <a:off x="749808" y="2706624"/>
-            <a:ext cx="4754880" cy="237744"/>
-          </a:xfrm>
-          <a:prstGeom prst="rect">
-            <a:avLst/>
-          </a:prstGeom>
-          <a:noFill/>
-        </p:spPr>
-        <p:txBody>
-          <a:bodyPr wrap="square">
-            <a:spAutoFit/>
-          </a:bodyPr>
-          <a:lstStyle/>
-          <a:p>
-            <a:pPr algn="l"/>
-            <a:r>
-              <a:rPr sz="1050" b="0" i="0">
-                <a:solidFill>
-                  <a:srgbClr val="1B2A41"/>
-                </a:solidFill>
-                <a:latin typeface="Menlo"/>
-              </a:rPr>
-              <a:t>sibling 3 : node(0401-0408) = 91d5…b3fe</a:t>
-            </a:r>
-          </a:p>
-        </p:txBody>
-      </p:sp>
-      <p:sp>
-        <p:nvSpPr>
-          <p:cNvPr id="10" name="TextBox 9"/>
-          <p:cNvSpPr txBox="1"/>
-          <p:nvPr/>
-        </p:nvSpPr>
-        <p:spPr>
-          <a:xfrm>
-            <a:off x="749808" y="2944368"/>
-            <a:ext cx="4754880" cy="237744"/>
-          </a:xfrm>
-          <a:prstGeom prst="rect">
-            <a:avLst/>
-          </a:prstGeom>
-          <a:noFill/>
-        </p:spPr>
-        <p:txBody>
-          <a:bodyPr wrap="square">
-            <a:spAutoFit/>
-          </a:bodyPr>
-          <a:lstStyle/>
-          <a:p>
-            <a:pPr algn="l"/>
-            <a:r>
-              <a:rPr sz="1050" b="0" i="0">
-                <a:solidFill>
-                  <a:srgbClr val="1B2A41"/>
-                </a:solidFill>
-                <a:latin typeface="Menlo"/>
-              </a:rPr>
-              <a:t>  …  ~10 hashes for 517 entries  …</a:t>
-            </a:r>
-          </a:p>
-        </p:txBody>
-      </p:sp>
-      <p:sp>
-        <p:nvSpPr>
-          <p:cNvPr id="11" name="TextBox 10"/>
-          <p:cNvSpPr txBox="1"/>
-          <p:nvPr/>
-        </p:nvSpPr>
-        <p:spPr>
-          <a:xfrm>
-            <a:off x="749808" y="3182111"/>
-            <a:ext cx="4754880" cy="237744"/>
-          </a:xfrm>
-          <a:prstGeom prst="rect">
-            <a:avLst/>
-          </a:prstGeom>
-          <a:noFill/>
-        </p:spPr>
-        <p:txBody>
-          <a:bodyPr wrap="square">
-            <a:spAutoFit/>
-          </a:bodyPr>
-          <a:lstStyle/>
-          <a:p>
-            <a:pPr algn="l"/>
-            <a:r>
-              <a:rPr sz="1050" b="0" i="0">
-                <a:solidFill>
-                  <a:srgbClr val="0E7C7B"/>
-                </a:solidFill>
-                <a:latin typeface="Menlo"/>
-              </a:rPr>
-              <a:t>computes  : root' = 6a3f…d208</a:t>
-            </a:r>
-          </a:p>
-        </p:txBody>
-      </p:sp>
-      <p:sp>
-        <p:nvSpPr>
-          <p:cNvPr id="12" name="TextBox 11"/>
-          <p:cNvSpPr txBox="1"/>
-          <p:nvPr/>
-        </p:nvSpPr>
-        <p:spPr>
-          <a:xfrm>
-            <a:off x="749808" y="3419855"/>
-            <a:ext cx="4754880" cy="237744"/>
-          </a:xfrm>
-          <a:prstGeom prst="rect">
-            <a:avLst/>
-          </a:prstGeom>
-          <a:noFill/>
-        </p:spPr>
-        <p:txBody>
-          <a:bodyPr wrap="square">
-            <a:spAutoFit/>
-          </a:bodyPr>
-          <a:lstStyle/>
-          <a:p>
-            <a:pPr algn="l"/>
-            <a:r>
-              <a:rPr sz="1050" b="0" i="0">
-                <a:solidFill>
-                  <a:srgbClr val="0E7C7B"/>
-                </a:solidFill>
-                <a:latin typeface="Menlo"/>
-              </a:rPr>
-              <a:t>compare   : seal S-2025-05-23  ✓</a:t>
-            </a:r>
-          </a:p>
-        </p:txBody>
-      </p:sp>
-      <p:sp>
-        <p:nvSpPr>
-          <p:cNvPr id="13" name="TextBox 12"/>
-          <p:cNvSpPr txBox="1"/>
-          <p:nvPr/>
-        </p:nvSpPr>
-        <p:spPr>
-          <a:xfrm>
-            <a:off x="6126480" y="1828800"/>
-            <a:ext cx="5486400" cy="3108960"/>
-          </a:xfrm>
-          <a:prstGeom prst="rect">
-            <a:avLst/>
-          </a:prstGeom>
-          <a:noFill/>
-        </p:spPr>
-        <p:txBody>
-          <a:bodyPr wrap="square">
-            <a:spAutoFit/>
-          </a:bodyPr>
-          <a:lstStyle/>
-          <a:p>
-            <a:pPr algn="l"/>
-            <a:r>
-              <a:rPr sz="1350" b="0" i="0">
-                <a:solidFill>
-                  <a:srgbClr val="1B2A41"/>
-                </a:solidFill>
-                <a:latin typeface="Avenir Next"/>
-              </a:rPr>
-              <a:t>Hand over ~log2(N) sibling hashes — about ten</a:t>
-            </a:r>
-          </a:p>
-          <a:p>
-            <a:pPr algn="l"/>
-            <a:r>
-              <a:rPr sz="1350" b="0" i="0">
-                <a:solidFill>
-                  <a:srgbClr val="1B2A41"/>
-                </a:solidFill>
-                <a:latin typeface="Avenir Next"/>
-              </a:rPr>
-              <a:t>for a 517-entry day — and anyone can recompute</a:t>
-            </a:r>
-          </a:p>
-          <a:p>
-            <a:pPr algn="l"/>
-            <a:r>
-              <a:rPr sz="1350" b="0" i="0">
-                <a:solidFill>
-                  <a:srgbClr val="1B2A41"/>
-                </a:solidFill>
-                <a:latin typeface="Avenir Next"/>
-              </a:rPr>
-              <a:t>the path from the record's leaf up to the root and</a:t>
-            </a:r>
-          </a:p>
-          <a:p>
-            <a:pPr algn="l"/>
-            <a:r>
-              <a:rPr sz="1350" b="0" i="0">
-                <a:solidFill>
-                  <a:srgbClr val="1B2A41"/>
-                </a:solidFill>
-                <a:latin typeface="Avenir Next"/>
-              </a:rPr>
-              <a:t>compare it to the published seal.</a:t>
-            </a:r>
-          </a:p>
-          <a:p>
-            <a:pPr algn="l"/>
-          </a:p>
-          <a:p>
-            <a:pPr algn="l"/>
-            <a:r>
-              <a:rPr sz="1350" b="0" i="0">
-                <a:solidFill>
-                  <a:srgbClr val="1B2A41"/>
-                </a:solidFill>
-                <a:latin typeface="Avenir Next"/>
-              </a:rPr>
-              <a:t>Membership proven in seconds, nothing else</a:t>
-            </a:r>
-          </a:p>
-          <a:p>
-            <a:pPr algn="l"/>
-            <a:r>
-              <a:rPr sz="1350" b="0" i="0">
-                <a:solidFill>
-                  <a:srgbClr val="1B2A41"/>
-                </a:solidFill>
-                <a:latin typeface="Avenir Next"/>
-              </a:rPr>
-              <a:t>revealed.</a:t>
-            </a:r>
-          </a:p>
-          <a:p>
-            <a:pPr algn="l"/>
-          </a:p>
-          <a:p>
-            <a:pPr algn="l"/>
-            <a:r>
-              <a:rPr sz="1350" b="0" i="0">
-                <a:solidFill>
-                  <a:srgbClr val="1B2A41"/>
-                </a:solidFill>
-                <a:latin typeface="Avenir Next"/>
-              </a:rPr>
-              <a:t>Use the full backward walk when LINEAGE or</a:t>
-            </a:r>
-          </a:p>
-          <a:p>
-            <a:pPr algn="l"/>
-            <a:r>
-              <a:rPr sz="1350" b="0" i="0">
-                <a:solidFill>
-                  <a:srgbClr val="1B2A41"/>
-                </a:solidFill>
-                <a:latin typeface="Avenir Next"/>
-              </a:rPr>
-              <a:t>ORDERING is the question (e.g. the 7 TAC §3.24</a:t>
-            </a:r>
-          </a:p>
-          <a:p>
-            <a:pPr algn="l"/>
-            <a:r>
-              <a:rPr sz="1350" b="0" i="0">
-                <a:solidFill>
-                  <a:srgbClr val="1B2A41"/>
-                </a:solidFill>
-                <a:latin typeface="Avenir Next"/>
-              </a:rPr>
-              <a:t>regulator-before-customer proof); use inclusion</a:t>
-            </a:r>
-          </a:p>
-          <a:p>
-            <a:pPr algn="l"/>
-            <a:r>
-              <a:rPr sz="1350" b="0" i="0">
-                <a:solidFill>
-                  <a:srgbClr val="1B2A41"/>
-                </a:solidFill>
-                <a:latin typeface="Avenir Next"/>
-              </a:rPr>
-              <a:t>when membership is.</a:t>
+              <a:rPr sz="1500" b="0" i="0">
+                <a:solidFill>
+                  <a:srgbClr val="1B2A41"/>
+                </a:solidFill>
+                <a:latin typeface="Avenir Next"/>
+              </a:rPr>
+              <a:t>Outcome is binary and reproducible: byte-equal reconstruction of the record's history, or a break</a:t>
+            </a:r>
+          </a:p>
+          <a:p>
+            <a:pPr algn="l"/>
+            <a:r>
+              <a:rPr sz="1500" b="0" i="0">
+                <a:solidFill>
+                  <a:srgbClr val="1B2A41"/>
+                </a:solidFill>
+                <a:latin typeface="Avenir Next"/>
+              </a:rPr>
+              <a:t>at an exact hop / exact byte offset showing precisely where history diverges. Any examiner running</a:t>
+            </a:r>
+          </a:p>
+          <a:p>
+            <a:pPr algn="l"/>
+            <a:r>
+              <a:rPr sz="1500" b="0" i="0">
+                <a:solidFill>
+                  <a:srgbClr val="1B2A41"/>
+                </a:solidFill>
+                <a:latin typeface="Avenir Next"/>
+              </a:rPr>
+              <a:t>the same procedure gets the same verdict — that is what replaces “as represented by management.”</a:t>
             </a:r>
           </a:p>
         </p:txBody>
@@ -8609,7 +9126,7 @@
                 </a:solidFill>
                 <a:latin typeface="Avenir Next"/>
               </a:rPr>
-              <a:t>Reference</a:t>
+              <a:t>The shortcut — Merkle inclusion proof</a:t>
             </a:r>
           </a:p>
         </p:txBody>
@@ -8622,8 +9139,8 @@
         </p:nvSpPr>
         <p:spPr>
           <a:xfrm>
-            <a:off x="822960" y="1554480"/>
-            <a:ext cx="10789920" cy="4389120"/>
+            <a:off x="548640" y="868680"/>
+            <a:ext cx="11064240" cy="457200"/>
           </a:xfrm>
           <a:prstGeom prst="rect">
             <a:avLst/>
@@ -8638,127 +9155,506 @@
           <a:p>
             <a:pPr algn="l"/>
             <a:r>
-              <a:rPr sz="1500" b="0" i="0">
-                <a:solidFill>
-                  <a:srgbClr val="1B2A41"/>
-                </a:solidFill>
-                <a:latin typeface="Avenir Next"/>
-              </a:rPr>
-              <a:t>In practice:  ffiec-verify  runs steps 1-4 and reports the verdict</a:t>
-            </a:r>
-          </a:p>
-          <a:p>
-            <a:pPr algn="l"/>
-            <a:r>
-              <a:rPr sz="1500" b="0" i="0">
-                <a:solidFill>
-                  <a:srgbClr val="1B2A41"/>
-                </a:solidFill>
-                <a:latin typeface="Avenir Next"/>
-              </a:rPr>
-              <a:t>    (profiles: ffiec, tx-dob — framing changes, verdict never does)</a:t>
-            </a:r>
-          </a:p>
-          <a:p>
-            <a:pPr algn="l"/>
-          </a:p>
-          <a:p>
-            <a:pPr algn="l"/>
-            <a:r>
-              <a:rPr sz="1500" b="0" i="0">
-                <a:solidFill>
-                  <a:srgbClr val="1B2A41"/>
-                </a:solidFill>
-                <a:latin typeface="Avenir Next"/>
-              </a:rPr>
-              <a:t>Spec (public, ffiec-public / chain-of-custody 0.3.0):</a:t>
-            </a:r>
-          </a:p>
-          <a:p>
-            <a:pPr algn="l"/>
-            <a:r>
-              <a:rPr sz="1500" b="0" i="0">
-                <a:solidFill>
-                  <a:srgbClr val="1B2A41"/>
-                </a:solidFill>
-                <a:latin typeface="Avenir Next"/>
-              </a:rPr>
-              <a:t>    §4    the four primitives — per-event MAC, Merkle seal, HSM signature, publication</a:t>
-            </a:r>
-          </a:p>
-          <a:p>
-            <a:pPr algn="l"/>
-            <a:r>
-              <a:rPr sz="1500" b="0" i="0">
-                <a:solidFill>
-                  <a:srgbClr val="1B2A41"/>
-                </a:solidFill>
-                <a:latin typeface="Avenir Next"/>
-              </a:rPr>
-              <a:t>    §7    the verifier procedure this deck walks</a:t>
-            </a:r>
-          </a:p>
-          <a:p>
-            <a:pPr algn="l"/>
-            <a:r>
-              <a:rPr sz="1500" b="0" i="0">
-                <a:solidFill>
-                  <a:srgbClr val="1B2A41"/>
-                </a:solidFill>
-                <a:latin typeface="Avenir Next"/>
-              </a:rPr>
-              <a:t>    §10.76 / §10.1 / §10.5   key-registry manifest, fingerprint reconciliation, role separation</a:t>
-            </a:r>
-          </a:p>
-          <a:p>
-            <a:pPr algn="l"/>
-            <a:r>
-              <a:rPr sz="1500" b="0" i="0">
-                <a:solidFill>
-                  <a:srgbClr val="1B2A41"/>
-                </a:solidFill>
-                <a:latin typeface="Avenir Next"/>
-              </a:rPr>
-              <a:t>    §10.84   ordering proofs across already-sealed days</a:t>
-            </a:r>
-          </a:p>
-          <a:p>
-            <a:pPr algn="l"/>
-            <a:r>
-              <a:rPr sz="1500" b="0" i="0">
-                <a:solidFill>
-                  <a:srgbClr val="1B2A41"/>
-                </a:solidFill>
-                <a:latin typeface="Avenir Next"/>
-              </a:rPr>
-              <a:t>    §10.9    retention — keys and seals must outlive the longest-lived artifact they verify</a:t>
-            </a:r>
-          </a:p>
-          <a:p>
-            <a:pPr algn="l"/>
-          </a:p>
-          <a:p>
-            <a:pPr algn="l"/>
-            <a:r>
-              <a:rPr sz="1500" b="0" i="0">
-                <a:solidFill>
-                  <a:srgbClr val="1B2A41"/>
-                </a:solidFill>
-                <a:latin typeface="Avenir Next"/>
-              </a:rPr>
-              <a:t>Companion deck:  diagrams/compliance/merkle-seal-chain.pptx  (forward construction + tamper cascade)</a:t>
-            </a:r>
-          </a:p>
-          <a:p>
-            <a:pPr algn="l"/>
-            <a:r>
-              <a:rPr sz="1500" b="0" i="0">
-                <a:solidFill>
-                  <a:srgbClr val="1B2A41"/>
-                </a:solidFill>
-                <a:latin typeface="Avenir Next"/>
-              </a:rPr>
-              <a:t>Narrative:  prose/compliance/novel/24-success-bank.md</a:t>
+              <a:rPr sz="1400" b="0" i="1">
+                <a:solidFill>
+                  <a:srgbClr val="6B7480"/>
+                </a:solidFill>
+                <a:latin typeface="Avenir Next"/>
+              </a:rPr>
+              <a:t>When the question is only “is this record in the sealed set?” — skip the full walk</a:t>
+            </a:r>
+          </a:p>
+        </p:txBody>
+      </p:sp>
+      <p:sp>
+        <p:nvSpPr>
+          <p:cNvPr id="4" name="Rounded Rectangle 3"/>
+          <p:cNvSpPr/>
+          <p:nvPr/>
+        </p:nvSpPr>
+        <p:spPr>
+          <a:xfrm>
+            <a:off x="640080" y="1645920"/>
+            <a:ext cx="4937760" cy="2048256"/>
+          </a:xfrm>
+          <a:prstGeom prst="roundRect">
+            <a:avLst/>
+          </a:prstGeom>
+          <a:solidFill>
+            <a:srgbClr val="FAF7F0"/>
+          </a:solidFill>
+          <a:ln w="15875">
+            <a:solidFill>
+              <a:srgbClr val="1B2A41"/>
+            </a:solidFill>
+          </a:ln>
+        </p:spPr>
+        <p:style>
+          <a:lnRef idx="1">
+            <a:schemeClr val="accent1"/>
+          </a:lnRef>
+          <a:fillRef idx="3">
+            <a:schemeClr val="accent1"/>
+          </a:fillRef>
+          <a:effectRef idx="2">
+            <a:schemeClr val="accent1"/>
+          </a:effectRef>
+          <a:fontRef idx="minor">
+            <a:schemeClr val="lt1"/>
+          </a:fontRef>
+        </p:style>
+        <p:txBody>
+          <a:bodyPr rtlCol="0" anchor="ctr" wrap="square"/>
+          <a:lstStyle/>
+          <a:p>
+            <a:pPr algn="ctr"/>
+          </a:p>
+        </p:txBody>
+      </p:sp>
+      <p:sp>
+        <p:nvSpPr>
+          <p:cNvPr id="5" name="Rounded Rectangle 4"/>
+          <p:cNvSpPr/>
+          <p:nvPr/>
+        </p:nvSpPr>
+        <p:spPr>
+          <a:xfrm>
+            <a:off x="640080" y="1645920"/>
+            <a:ext cx="4937760" cy="310896"/>
+          </a:xfrm>
+          <a:prstGeom prst="roundRect">
+            <a:avLst/>
+          </a:prstGeom>
+          <a:solidFill>
+            <a:srgbClr val="1B2A41"/>
+          </a:solidFill>
+          <a:ln w="15875">
+            <a:solidFill>
+              <a:srgbClr val="1B2A41"/>
+            </a:solidFill>
+          </a:ln>
+        </p:spPr>
+        <p:style>
+          <a:lnRef idx="1">
+            <a:schemeClr val="accent1"/>
+          </a:lnRef>
+          <a:fillRef idx="3">
+            <a:schemeClr val="accent1"/>
+          </a:fillRef>
+          <a:effectRef idx="2">
+            <a:schemeClr val="accent1"/>
+          </a:effectRef>
+          <a:fontRef idx="minor">
+            <a:schemeClr val="lt1"/>
+          </a:fontRef>
+        </p:style>
+        <p:txBody>
+          <a:bodyPr rtlCol="0" anchor="ctr" wrap="square"/>
+          <a:lstStyle/>
+          <a:p>
+            <a:pPr algn="ctr"/>
+            <a:r>
+              <a:rPr sz="1150" b="1">
+                <a:solidFill>
+                  <a:srgbClr val="FAF7F0"/>
+                </a:solidFill>
+                <a:latin typeface="Menlo"/>
+              </a:rPr>
+              <a:t>INCLUSION PROOF for entry 0412</a:t>
+            </a:r>
+          </a:p>
+        </p:txBody>
+      </p:sp>
+      <p:sp>
+        <p:nvSpPr>
+          <p:cNvPr id="6" name="TextBox 5"/>
+          <p:cNvSpPr txBox="1"/>
+          <p:nvPr/>
+        </p:nvSpPr>
+        <p:spPr>
+          <a:xfrm>
+            <a:off x="749808" y="1993392"/>
+            <a:ext cx="4754880" cy="237744"/>
+          </a:xfrm>
+          <a:prstGeom prst="rect">
+            <a:avLst/>
+          </a:prstGeom>
+          <a:noFill/>
+        </p:spPr>
+        <p:txBody>
+          <a:bodyPr wrap="square">
+            <a:spAutoFit/>
+          </a:bodyPr>
+          <a:lstStyle/>
+          <a:p>
+            <a:pPr algn="l"/>
+            <a:r>
+              <a:rPr sz="1050" b="0" i="0">
+                <a:solidFill>
+                  <a:srgbClr val="1B2A41"/>
+                </a:solidFill>
+                <a:latin typeface="Menlo"/>
+              </a:rPr>
+              <a:t>leaf      : mac(0412) = b44a…91c7</a:t>
+            </a:r>
+          </a:p>
+        </p:txBody>
+      </p:sp>
+      <p:sp>
+        <p:nvSpPr>
+          <p:cNvPr id="7" name="TextBox 6"/>
+          <p:cNvSpPr txBox="1"/>
+          <p:nvPr/>
+        </p:nvSpPr>
+        <p:spPr>
+          <a:xfrm>
+            <a:off x="749808" y="2231136"/>
+            <a:ext cx="4754880" cy="237744"/>
+          </a:xfrm>
+          <a:prstGeom prst="rect">
+            <a:avLst/>
+          </a:prstGeom>
+          <a:noFill/>
+        </p:spPr>
+        <p:txBody>
+          <a:bodyPr wrap="square">
+            <a:spAutoFit/>
+          </a:bodyPr>
+          <a:lstStyle/>
+          <a:p>
+            <a:pPr algn="l"/>
+            <a:r>
+              <a:rPr sz="1050" b="0" i="0">
+                <a:solidFill>
+                  <a:srgbClr val="1B2A41"/>
+                </a:solidFill>
+                <a:latin typeface="Menlo"/>
+              </a:rPr>
+              <a:t>sibling 1 : mac(0411) = 5d81…e903</a:t>
+            </a:r>
+          </a:p>
+        </p:txBody>
+      </p:sp>
+      <p:sp>
+        <p:nvSpPr>
+          <p:cNvPr id="8" name="TextBox 7"/>
+          <p:cNvSpPr txBox="1"/>
+          <p:nvPr/>
+        </p:nvSpPr>
+        <p:spPr>
+          <a:xfrm>
+            <a:off x="749808" y="2468880"/>
+            <a:ext cx="4754880" cy="237744"/>
+          </a:xfrm>
+          <a:prstGeom prst="rect">
+            <a:avLst/>
+          </a:prstGeom>
+          <a:noFill/>
+        </p:spPr>
+        <p:txBody>
+          <a:bodyPr wrap="square">
+            <a:spAutoFit/>
+          </a:bodyPr>
+          <a:lstStyle/>
+          <a:p>
+            <a:pPr algn="l"/>
+            <a:r>
+              <a:rPr sz="1050" b="0" i="0">
+                <a:solidFill>
+                  <a:srgbClr val="1B2A41"/>
+                </a:solidFill>
+                <a:latin typeface="Menlo"/>
+              </a:rPr>
+              <a:t>sibling 2 : node(0409-0410) = e3c7…20aa</a:t>
+            </a:r>
+          </a:p>
+        </p:txBody>
+      </p:sp>
+      <p:sp>
+        <p:nvSpPr>
+          <p:cNvPr id="9" name="TextBox 8"/>
+          <p:cNvSpPr txBox="1"/>
+          <p:nvPr/>
+        </p:nvSpPr>
+        <p:spPr>
+          <a:xfrm>
+            <a:off x="749808" y="2706624"/>
+            <a:ext cx="4754880" cy="237744"/>
+          </a:xfrm>
+          <a:prstGeom prst="rect">
+            <a:avLst/>
+          </a:prstGeom>
+          <a:noFill/>
+        </p:spPr>
+        <p:txBody>
+          <a:bodyPr wrap="square">
+            <a:spAutoFit/>
+          </a:bodyPr>
+          <a:lstStyle/>
+          <a:p>
+            <a:pPr algn="l"/>
+            <a:r>
+              <a:rPr sz="1050" b="0" i="0">
+                <a:solidFill>
+                  <a:srgbClr val="1B2A41"/>
+                </a:solidFill>
+                <a:latin typeface="Menlo"/>
+              </a:rPr>
+              <a:t>sibling 3 : node(0401-0408) = 91d5…b3fe</a:t>
+            </a:r>
+          </a:p>
+        </p:txBody>
+      </p:sp>
+      <p:sp>
+        <p:nvSpPr>
+          <p:cNvPr id="10" name="TextBox 9"/>
+          <p:cNvSpPr txBox="1"/>
+          <p:nvPr/>
+        </p:nvSpPr>
+        <p:spPr>
+          <a:xfrm>
+            <a:off x="749808" y="2944368"/>
+            <a:ext cx="4754880" cy="237744"/>
+          </a:xfrm>
+          <a:prstGeom prst="rect">
+            <a:avLst/>
+          </a:prstGeom>
+          <a:noFill/>
+        </p:spPr>
+        <p:txBody>
+          <a:bodyPr wrap="square">
+            <a:spAutoFit/>
+          </a:bodyPr>
+          <a:lstStyle/>
+          <a:p>
+            <a:pPr algn="l"/>
+            <a:r>
+              <a:rPr sz="1050" b="0" i="0">
+                <a:solidFill>
+                  <a:srgbClr val="1B2A41"/>
+                </a:solidFill>
+                <a:latin typeface="Menlo"/>
+              </a:rPr>
+              <a:t>  …  ~10 hashes for 517 entries  …</a:t>
+            </a:r>
+          </a:p>
+        </p:txBody>
+      </p:sp>
+      <p:sp>
+        <p:nvSpPr>
+          <p:cNvPr id="11" name="TextBox 10"/>
+          <p:cNvSpPr txBox="1"/>
+          <p:nvPr/>
+        </p:nvSpPr>
+        <p:spPr>
+          <a:xfrm>
+            <a:off x="749808" y="3182111"/>
+            <a:ext cx="4754880" cy="237744"/>
+          </a:xfrm>
+          <a:prstGeom prst="rect">
+            <a:avLst/>
+          </a:prstGeom>
+          <a:noFill/>
+        </p:spPr>
+        <p:txBody>
+          <a:bodyPr wrap="square">
+            <a:spAutoFit/>
+          </a:bodyPr>
+          <a:lstStyle/>
+          <a:p>
+            <a:pPr algn="l"/>
+            <a:r>
+              <a:rPr sz="1050" b="0" i="0">
+                <a:solidFill>
+                  <a:srgbClr val="0E7C7B"/>
+                </a:solidFill>
+                <a:latin typeface="Menlo"/>
+              </a:rPr>
+              <a:t>computes  : root' = 6a3f…d208</a:t>
+            </a:r>
+          </a:p>
+        </p:txBody>
+      </p:sp>
+      <p:sp>
+        <p:nvSpPr>
+          <p:cNvPr id="12" name="TextBox 11"/>
+          <p:cNvSpPr txBox="1"/>
+          <p:nvPr/>
+        </p:nvSpPr>
+        <p:spPr>
+          <a:xfrm>
+            <a:off x="749808" y="3419855"/>
+            <a:ext cx="4754880" cy="237744"/>
+          </a:xfrm>
+          <a:prstGeom prst="rect">
+            <a:avLst/>
+          </a:prstGeom>
+          <a:noFill/>
+        </p:spPr>
+        <p:txBody>
+          <a:bodyPr wrap="square">
+            <a:spAutoFit/>
+          </a:bodyPr>
+          <a:lstStyle/>
+          <a:p>
+            <a:pPr algn="l"/>
+            <a:r>
+              <a:rPr sz="1050" b="0" i="0">
+                <a:solidFill>
+                  <a:srgbClr val="0E7C7B"/>
+                </a:solidFill>
+                <a:latin typeface="Menlo"/>
+              </a:rPr>
+              <a:t>compare   : seal S-2025-05-23  ✓</a:t>
+            </a:r>
+          </a:p>
+        </p:txBody>
+      </p:sp>
+      <p:sp>
+        <p:nvSpPr>
+          <p:cNvPr id="13" name="TextBox 12"/>
+          <p:cNvSpPr txBox="1"/>
+          <p:nvPr/>
+        </p:nvSpPr>
+        <p:spPr>
+          <a:xfrm>
+            <a:off x="6126480" y="1828800"/>
+            <a:ext cx="5486400" cy="3108960"/>
+          </a:xfrm>
+          <a:prstGeom prst="rect">
+            <a:avLst/>
+          </a:prstGeom>
+          <a:noFill/>
+        </p:spPr>
+        <p:txBody>
+          <a:bodyPr wrap="square">
+            <a:spAutoFit/>
+          </a:bodyPr>
+          <a:lstStyle/>
+          <a:p>
+            <a:pPr algn="l"/>
+            <a:r>
+              <a:rPr sz="1350" b="0" i="0">
+                <a:solidFill>
+                  <a:srgbClr val="1B2A41"/>
+                </a:solidFill>
+                <a:latin typeface="Avenir Next"/>
+              </a:rPr>
+              <a:t>Hand over ~log2(N) sibling hashes — about ten</a:t>
+            </a:r>
+          </a:p>
+          <a:p>
+            <a:pPr algn="l"/>
+            <a:r>
+              <a:rPr sz="1350" b="0" i="0">
+                <a:solidFill>
+                  <a:srgbClr val="1B2A41"/>
+                </a:solidFill>
+                <a:latin typeface="Avenir Next"/>
+              </a:rPr>
+              <a:t>for a 517-entry day — and anyone can recompute</a:t>
+            </a:r>
+          </a:p>
+          <a:p>
+            <a:pPr algn="l"/>
+            <a:r>
+              <a:rPr sz="1350" b="0" i="0">
+                <a:solidFill>
+                  <a:srgbClr val="1B2A41"/>
+                </a:solidFill>
+                <a:latin typeface="Avenir Next"/>
+              </a:rPr>
+              <a:t>the path from the record's leaf up to the root and</a:t>
+            </a:r>
+          </a:p>
+          <a:p>
+            <a:pPr algn="l"/>
+            <a:r>
+              <a:rPr sz="1350" b="0" i="0">
+                <a:solidFill>
+                  <a:srgbClr val="1B2A41"/>
+                </a:solidFill>
+                <a:latin typeface="Avenir Next"/>
+              </a:rPr>
+              <a:t>compare it to the published seal.</a:t>
+            </a:r>
+          </a:p>
+          <a:p>
+            <a:pPr algn="l"/>
+          </a:p>
+          <a:p>
+            <a:pPr algn="l"/>
+            <a:r>
+              <a:rPr sz="1350" b="0" i="0">
+                <a:solidFill>
+                  <a:srgbClr val="1B2A41"/>
+                </a:solidFill>
+                <a:latin typeface="Avenir Next"/>
+              </a:rPr>
+              <a:t>Membership proven in seconds, nothing else</a:t>
+            </a:r>
+          </a:p>
+          <a:p>
+            <a:pPr algn="l"/>
+            <a:r>
+              <a:rPr sz="1350" b="0" i="0">
+                <a:solidFill>
+                  <a:srgbClr val="1B2A41"/>
+                </a:solidFill>
+                <a:latin typeface="Avenir Next"/>
+              </a:rPr>
+              <a:t>revealed.</a:t>
+            </a:r>
+          </a:p>
+          <a:p>
+            <a:pPr algn="l"/>
+          </a:p>
+          <a:p>
+            <a:pPr algn="l"/>
+            <a:r>
+              <a:rPr sz="1350" b="0" i="0">
+                <a:solidFill>
+                  <a:srgbClr val="1B2A41"/>
+                </a:solidFill>
+                <a:latin typeface="Avenir Next"/>
+              </a:rPr>
+              <a:t>Use the full backward walk when LINEAGE or</a:t>
+            </a:r>
+          </a:p>
+          <a:p>
+            <a:pPr algn="l"/>
+            <a:r>
+              <a:rPr sz="1350" b="0" i="0">
+                <a:solidFill>
+                  <a:srgbClr val="1B2A41"/>
+                </a:solidFill>
+                <a:latin typeface="Avenir Next"/>
+              </a:rPr>
+              <a:t>ORDERING is the question (e.g. the 7 TAC §3.24</a:t>
+            </a:r>
+          </a:p>
+          <a:p>
+            <a:pPr algn="l"/>
+            <a:r>
+              <a:rPr sz="1350" b="0" i="0">
+                <a:solidFill>
+                  <a:srgbClr val="1B2A41"/>
+                </a:solidFill>
+                <a:latin typeface="Avenir Next"/>
+              </a:rPr>
+              <a:t>regulator-before-customer proof); use inclusion</a:t>
+            </a:r>
+          </a:p>
+          <a:p>
+            <a:pPr algn="l"/>
+            <a:r>
+              <a:rPr sz="1350" b="0" i="0">
+                <a:solidFill>
+                  <a:srgbClr val="1B2A41"/>
+                </a:solidFill>
+                <a:latin typeface="Avenir Next"/>
+              </a:rPr>
+              <a:t>when membership is.</a:t>
             </a:r>
           </a:p>
         </p:txBody>
